--- a/submission/Kairos-AI-Submission.pptx
+++ b/submission/Kairos-AI-Submission.pptx
@@ -1,51 +1,49 @@
 
 <file path=ppt/presentation.xml><?xml version="1.0" encoding="utf-8"?>
-<p:presentation xmlns:a="http://schemas.openxmlformats.org/drawingml/2006/main" xmlns:r="http://schemas.openxmlformats.org/officeDocument/2006/relationships" xmlns:mc="http://schemas.openxmlformats.org/markup-compatibility/2006" xmlns:mv="urn:schemas-microsoft-com:mac:vml" xmlns:p="http://schemas.openxmlformats.org/presentationml/2006/main" xmlns:c="http://schemas.openxmlformats.org/drawingml/2006/chart" xmlns:dgm="http://schemas.openxmlformats.org/drawingml/2006/diagram" xmlns:o="urn:schemas-microsoft-com:office:office" xmlns:v="urn:schemas-microsoft-com:vml" xmlns:pvml="urn:schemas-microsoft-com:office:powerpoint" xmlns:com="http://schemas.openxmlformats.org/drawingml/2006/compatibility" xmlns:p14="http://schemas.microsoft.com/office/powerpoint/2010/main" xmlns:p15="http://schemas.microsoft.com/office/powerpoint/2012/main" xmlns:ahyp="http://schemas.microsoft.com/office/drawing/2018/hyperlinkcolor" autoCompressPictures="0" embedTrueTypeFonts="1" strictFirstAndLastChars="0" saveSubsetFonts="1">
+<p:presentation xmlns:a="http://schemas.openxmlformats.org/drawingml/2006/main" xmlns:r="http://schemas.openxmlformats.org/officeDocument/2006/relationships" xmlns:p="http://schemas.openxmlformats.org/presentationml/2006/main" strictFirstAndLastChars="0" embedTrueTypeFonts="1" saveSubsetFonts="1" autoCompressPictures="0">
   <p:sldMasterIdLst>
-    <p:sldMasterId id="2147483659" r:id="rId4"/>
+    <p:sldMasterId id="2147483659" r:id="rId1"/>
   </p:sldMasterIdLst>
   <p:notesMasterIdLst>
-    <p:notesMasterId r:id="rId5"/>
+    <p:notesMasterId r:id="rId16"/>
   </p:notesMasterIdLst>
   <p:sldIdLst>
-    <p:sldId id="256" r:id="rId6"/>
-    <p:sldId id="257" r:id="rId7"/>
-    <p:sldId id="258" r:id="rId8"/>
-    <p:sldId id="259" r:id="rId9"/>
-    <p:sldId id="260" r:id="rId10"/>
-    <p:sldId id="261" r:id="rId11"/>
-    <p:sldId id="262" r:id="rId12"/>
-    <p:sldId id="263" r:id="rId13"/>
-    <p:sldId id="264" r:id="rId14"/>
-    <p:sldId id="265" r:id="rId15"/>
-    <p:sldId id="266" r:id="rId16"/>
-    <p:sldId id="267" r:id="rId17"/>
-    <p:sldId id="268" r:id="rId18"/>
-    <p:sldId id="269" r:id="rId19"/>
-    <p:sldId id="270" r:id="rId20"/>
-    <p:sldId id="271" r:id="rId21"/>
+    <p:sldId id="256" r:id="rId2"/>
+    <p:sldId id="258" r:id="rId3"/>
+    <p:sldId id="259" r:id="rId4"/>
+    <p:sldId id="260" r:id="rId5"/>
+    <p:sldId id="261" r:id="rId6"/>
+    <p:sldId id="262" r:id="rId7"/>
+    <p:sldId id="263" r:id="rId8"/>
+    <p:sldId id="264" r:id="rId9"/>
+    <p:sldId id="265" r:id="rId10"/>
+    <p:sldId id="266" r:id="rId11"/>
+    <p:sldId id="267" r:id="rId12"/>
+    <p:sldId id="268" r:id="rId13"/>
+    <p:sldId id="269" r:id="rId14"/>
+    <p:sldId id="271" r:id="rId15"/>
   </p:sldIdLst>
-  <p:sldSz cy="5143500" cx="9144000"/>
+  <p:sldSz cx="9144000" cy="5143500" type="screen16x9"/>
   <p:notesSz cx="6858000" cy="9144000"/>
   <p:embeddedFontLst>
     <p:embeddedFont>
-      <p:font typeface="Google Sans Flex Medium"/>
-      <p:regular r:id="rId22"/>
-      <p:bold r:id="rId23"/>
+      <p:font typeface="Google Sans Flex" panose="020B0604020202020204" charset="0"/>
+      <p:regular r:id="rId17"/>
+      <p:bold r:id="rId18"/>
     </p:embeddedFont>
     <p:embeddedFont>
-      <p:font typeface="Google Sans Flex"/>
-      <p:regular r:id="rId24"/>
-      <p:bold r:id="rId25"/>
+      <p:font typeface="Google Sans Flex Medium" panose="020B0604020202020204" charset="0"/>
+      <p:regular r:id="rId19"/>
+      <p:bold r:id="rId20"/>
     </p:embeddedFont>
     <p:embeddedFont>
-      <p:font typeface="Google Sans Flex SemiBold"/>
-      <p:regular r:id="rId26"/>
-      <p:bold r:id="rId27"/>
+      <p:font typeface="Google Sans Flex SemiBold" panose="020B0604020202020204" charset="0"/>
+      <p:regular r:id="rId21"/>
+      <p:bold r:id="rId22"/>
     </p:embeddedFont>
   </p:embeddedFontLst>
   <p:defaultTextStyle>
-    <a:defPPr lvl="0" marR="0" rtl="0" algn="l">
+    <a:defPPr marR="0" lvl="0" algn="l" rtl="0">
       <a:lnSpc>
         <a:spcPct val="100000"/>
       </a:lnSpc>
@@ -56,7 +54,7 @@
         <a:spcPts val="0"/>
       </a:spcAft>
     </a:defPPr>
-    <a:lvl1pPr lvl="0" marR="0" rtl="0" algn="l">
+    <a:lvl1pPr marR="0" lvl="0" algn="l" rtl="0">
       <a:lnSpc>
         <a:spcPct val="100000"/>
       </a:lnSpc>
@@ -70,7 +68,7 @@
         <a:srgbClr val="000000"/>
       </a:buClr>
       <a:buFont typeface="Arial"/>
-      <a:defRPr b="0" i="0" spc="0" sz="1400" u="none" cap="none" strike="noStrike">
+      <a:defRPr sz="1400" b="0" i="0" u="none" strike="noStrike" cap="none" spc="0">
         <a:solidFill>
           <a:srgbClr val="000000"/>
         </a:solidFill>
@@ -80,7 +78,7 @@
         <a:sym typeface="Arial"/>
       </a:defRPr>
     </a:lvl1pPr>
-    <a:lvl2pPr lvl="1" marR="0" rtl="0" algn="l">
+    <a:lvl2pPr marR="0" lvl="1" algn="l" rtl="0">
       <a:lnSpc>
         <a:spcPct val="100000"/>
       </a:lnSpc>
@@ -94,7 +92,7 @@
         <a:srgbClr val="000000"/>
       </a:buClr>
       <a:buFont typeface="Arial"/>
-      <a:defRPr b="0" i="0" spc="0" sz="1400" u="none" cap="none" strike="noStrike">
+      <a:defRPr sz="1400" b="0" i="0" u="none" strike="noStrike" cap="none" spc="0">
         <a:solidFill>
           <a:srgbClr val="000000"/>
         </a:solidFill>
@@ -104,7 +102,7 @@
         <a:sym typeface="Arial"/>
       </a:defRPr>
     </a:lvl2pPr>
-    <a:lvl3pPr lvl="2" marR="0" rtl="0" algn="l">
+    <a:lvl3pPr marR="0" lvl="2" algn="l" rtl="0">
       <a:lnSpc>
         <a:spcPct val="100000"/>
       </a:lnSpc>
@@ -118,7 +116,7 @@
         <a:srgbClr val="000000"/>
       </a:buClr>
       <a:buFont typeface="Arial"/>
-      <a:defRPr b="0" i="0" spc="0" sz="1400" u="none" cap="none" strike="noStrike">
+      <a:defRPr sz="1400" b="0" i="0" u="none" strike="noStrike" cap="none" spc="0">
         <a:solidFill>
           <a:srgbClr val="000000"/>
         </a:solidFill>
@@ -128,7 +126,7 @@
         <a:sym typeface="Arial"/>
       </a:defRPr>
     </a:lvl3pPr>
-    <a:lvl4pPr lvl="3" marR="0" rtl="0" algn="l">
+    <a:lvl4pPr marR="0" lvl="3" algn="l" rtl="0">
       <a:lnSpc>
         <a:spcPct val="100000"/>
       </a:lnSpc>
@@ -142,7 +140,7 @@
         <a:srgbClr val="000000"/>
       </a:buClr>
       <a:buFont typeface="Arial"/>
-      <a:defRPr b="0" i="0" spc="0" sz="1400" u="none" cap="none" strike="noStrike">
+      <a:defRPr sz="1400" b="0" i="0" u="none" strike="noStrike" cap="none" spc="0">
         <a:solidFill>
           <a:srgbClr val="000000"/>
         </a:solidFill>
@@ -152,7 +150,7 @@
         <a:sym typeface="Arial"/>
       </a:defRPr>
     </a:lvl4pPr>
-    <a:lvl5pPr lvl="4" marR="0" rtl="0" algn="l">
+    <a:lvl5pPr marR="0" lvl="4" algn="l" rtl="0">
       <a:lnSpc>
         <a:spcPct val="100000"/>
       </a:lnSpc>
@@ -166,7 +164,7 @@
         <a:srgbClr val="000000"/>
       </a:buClr>
       <a:buFont typeface="Arial"/>
-      <a:defRPr b="0" i="0" spc="0" sz="1400" u="none" cap="none" strike="noStrike">
+      <a:defRPr sz="1400" b="0" i="0" u="none" strike="noStrike" cap="none" spc="0">
         <a:solidFill>
           <a:srgbClr val="000000"/>
         </a:solidFill>
@@ -176,7 +174,7 @@
         <a:sym typeface="Arial"/>
       </a:defRPr>
     </a:lvl5pPr>
-    <a:lvl6pPr lvl="5" marR="0" rtl="0" algn="l">
+    <a:lvl6pPr marR="0" lvl="5" algn="l" rtl="0">
       <a:lnSpc>
         <a:spcPct val="100000"/>
       </a:lnSpc>
@@ -190,7 +188,7 @@
         <a:srgbClr val="000000"/>
       </a:buClr>
       <a:buFont typeface="Arial"/>
-      <a:defRPr b="0" i="0" spc="0" sz="1400" u="none" cap="none" strike="noStrike">
+      <a:defRPr sz="1400" b="0" i="0" u="none" strike="noStrike" cap="none" spc="0">
         <a:solidFill>
           <a:srgbClr val="000000"/>
         </a:solidFill>
@@ -200,7 +198,7 @@
         <a:sym typeface="Arial"/>
       </a:defRPr>
     </a:lvl6pPr>
-    <a:lvl7pPr lvl="6" marR="0" rtl="0" algn="l">
+    <a:lvl7pPr marR="0" lvl="6" algn="l" rtl="0">
       <a:lnSpc>
         <a:spcPct val="100000"/>
       </a:lnSpc>
@@ -214,7 +212,7 @@
         <a:srgbClr val="000000"/>
       </a:buClr>
       <a:buFont typeface="Arial"/>
-      <a:defRPr b="0" i="0" spc="0" sz="1400" u="none" cap="none" strike="noStrike">
+      <a:defRPr sz="1400" b="0" i="0" u="none" strike="noStrike" cap="none" spc="0">
         <a:solidFill>
           <a:srgbClr val="000000"/>
         </a:solidFill>
@@ -224,7 +222,7 @@
         <a:sym typeface="Arial"/>
       </a:defRPr>
     </a:lvl7pPr>
-    <a:lvl8pPr lvl="7" marR="0" rtl="0" algn="l">
+    <a:lvl8pPr marR="0" lvl="7" algn="l" rtl="0">
       <a:lnSpc>
         <a:spcPct val="100000"/>
       </a:lnSpc>
@@ -238,7 +236,7 @@
         <a:srgbClr val="000000"/>
       </a:buClr>
       <a:buFont typeface="Arial"/>
-      <a:defRPr b="0" i="0" spc="0" sz="1400" u="none" cap="none" strike="noStrike">
+      <a:defRPr sz="1400" b="0" i="0" u="none" strike="noStrike" cap="none" spc="0">
         <a:solidFill>
           <a:srgbClr val="000000"/>
         </a:solidFill>
@@ -248,7 +246,7 @@
         <a:sym typeface="Arial"/>
       </a:defRPr>
     </a:lvl8pPr>
-    <a:lvl9pPr lvl="8" marR="0" rtl="0" algn="l">
+    <a:lvl9pPr marR="0" lvl="8" algn="l" rtl="0">
       <a:lnSpc>
         <a:spcPct val="100000"/>
       </a:lnSpc>
@@ -262,7 +260,7 @@
         <a:srgbClr val="000000"/>
       </a:buClr>
       <a:buFont typeface="Arial"/>
-      <a:defRPr b="0" i="0" spc="0" sz="1400" u="none" cap="none" strike="noStrike">
+      <a:defRPr sz="1400" b="0" i="0" u="none" strike="noStrike" cap="none" spc="0">
         <a:solidFill>
           <a:srgbClr val="000000"/>
         </a:solidFill>
@@ -275,7 +273,7 @@
   </p:defaultTextStyle>
   <p:extLst>
     <p:ext uri="{EFAFB233-063F-42B5-8137-9DF3F51BA10A}">
-      <p15:sldGuideLst>
+      <p15:sldGuideLst xmlns:p15="http://schemas.microsoft.com/office/powerpoint/2012/main">
         <p15:guide id="1" orient="horz" pos="1620">
           <p15:clr>
             <a:srgbClr val="747775"/>
@@ -293,11 +291,16 @@
 </file>
 
 <file path=ppt/notesMasters/notesMaster1.xml><?xml version="1.0" encoding="utf-8"?>
-<p:notesMaster xmlns:a="http://schemas.openxmlformats.org/drawingml/2006/main" xmlns:r="http://schemas.openxmlformats.org/officeDocument/2006/relationships" xmlns:mc="http://schemas.openxmlformats.org/markup-compatibility/2006" xmlns:mv="urn:schemas-microsoft-com:mac:vml" xmlns:p="http://schemas.openxmlformats.org/presentationml/2006/main" xmlns:c="http://schemas.openxmlformats.org/drawingml/2006/chart" xmlns:dgm="http://schemas.openxmlformats.org/drawingml/2006/diagram" xmlns:o="urn:schemas-microsoft-com:office:office" xmlns:v="urn:schemas-microsoft-com:vml" xmlns:pvml="urn:schemas-microsoft-com:office:powerpoint" xmlns:com="http://schemas.openxmlformats.org/drawingml/2006/compatibility" xmlns:p14="http://schemas.microsoft.com/office/powerpoint/2010/main" xmlns:p15="http://schemas.microsoft.com/office/powerpoint/2012/main" xmlns:ahyp="http://schemas.microsoft.com/office/drawing/2018/hyperlinkcolor">
+<p:notesMaster xmlns:a="http://schemas.openxmlformats.org/drawingml/2006/main" xmlns:r="http://schemas.openxmlformats.org/officeDocument/2006/relationships" xmlns:p="http://schemas.openxmlformats.org/presentationml/2006/main">
   <p:cSld>
+    <p:bg>
+      <p:bgRef idx="1001">
+        <a:schemeClr val="bg1"/>
+      </p:bgRef>
+    </p:bg>
     <p:spTree>
       <p:nvGrpSpPr>
-        <p:cNvPr id="2" name="Shape 2"/>
+        <p:cNvPr id="1" name="Shape 2"/>
         <p:cNvGrpSpPr/>
         <p:nvPr/>
       </p:nvGrpSpPr>
@@ -312,9 +315,11 @@
       <p:sp>
         <p:nvSpPr>
           <p:cNvPr id="3" name="Google Shape;3;n"/>
-          <p:cNvSpPr/>
+          <p:cNvSpPr>
+            <a:spLocks noGrp="1" noRot="1" noChangeAspect="1"/>
+          </p:cNvSpPr>
           <p:nvPr>
-            <p:ph idx="2" type="sldImg"/>
+            <p:ph type="sldImg" idx="2"/>
           </p:nvPr>
         </p:nvSpPr>
         <p:spPr>
@@ -323,9 +328,13 @@
             <a:ext cx="6096075" cy="3429000"/>
           </a:xfrm>
           <a:custGeom>
-            <a:rect b="b" l="l" r="r" t="t"/>
+            <a:avLst/>
+            <a:gdLst/>
+            <a:ahLst/>
+            <a:cxnLst/>
+            <a:rect l="l" t="t" r="r" b="b"/>
             <a:pathLst>
-              <a:path extrusionOk="0" h="120000" w="120000">
+              <a:path w="120000" h="120000" extrusionOk="0">
                 <a:moveTo>
                   <a:pt x="0" y="0"/>
                 </a:moveTo>
@@ -343,23 +352,25 @@
             </a:pathLst>
           </a:custGeom>
           <a:noFill/>
-          <a:ln cap="flat" cmpd="sng" w="9525">
+          <a:ln w="9525" cap="flat" cmpd="sng">
             <a:solidFill>
               <a:srgbClr val="000000"/>
             </a:solidFill>
             <a:prstDash val="solid"/>
             <a:round/>
-            <a:headEnd len="sm" w="sm" type="none"/>
-            <a:tailEnd len="sm" w="sm" type="none"/>
+            <a:headEnd type="none" w="sm" len="sm"/>
+            <a:tailEnd type="none" w="sm" len="sm"/>
           </a:ln>
         </p:spPr>
       </p:sp>
       <p:sp>
         <p:nvSpPr>
           <p:cNvPr id="4" name="Google Shape;4;n"/>
-          <p:cNvSpPr txBox="1"/>
+          <p:cNvSpPr txBox="1">
+            <a:spLocks noGrp="1"/>
+          </p:cNvSpPr>
           <p:nvPr>
-            <p:ph idx="1" type="body"/>
+            <p:ph type="body" idx="1"/>
           </p:nvPr>
         </p:nvSpPr>
         <p:spPr>
@@ -376,11 +387,11 @@
           </a:ln>
         </p:spPr>
         <p:txBody>
-          <a:bodyPr anchorCtr="0" anchor="t" bIns="91425" lIns="91425" spcFirstLastPara="1" rIns="91425" wrap="square" tIns="91425">
+          <a:bodyPr spcFirstLastPara="1" wrap="square" lIns="91425" tIns="91425" rIns="91425" bIns="91425" anchor="t" anchorCtr="0">
             <a:noAutofit/>
           </a:bodyPr>
           <a:lstStyle>
-            <a:lvl1pPr indent="-298450" lvl="0" marL="457200">
+            <a:lvl1pPr marL="457200" lvl="0" indent="-298450">
               <a:spcBef>
                 <a:spcPts val="0"/>
               </a:spcBef>
@@ -391,7 +402,7 @@
               <a:buChar char="●"/>
               <a:defRPr sz="1100"/>
             </a:lvl1pPr>
-            <a:lvl2pPr indent="-298450" lvl="1" marL="914400">
+            <a:lvl2pPr marL="914400" lvl="1" indent="-298450">
               <a:spcBef>
                 <a:spcPts val="0"/>
               </a:spcBef>
@@ -402,7 +413,7 @@
               <a:buChar char="○"/>
               <a:defRPr sz="1100"/>
             </a:lvl2pPr>
-            <a:lvl3pPr indent="-298450" lvl="2" marL="1371600">
+            <a:lvl3pPr marL="1371600" lvl="2" indent="-298450">
               <a:spcBef>
                 <a:spcPts val="0"/>
               </a:spcBef>
@@ -413,7 +424,7 @@
               <a:buChar char="■"/>
               <a:defRPr sz="1100"/>
             </a:lvl3pPr>
-            <a:lvl4pPr indent="-298450" lvl="3" marL="1828800">
+            <a:lvl4pPr marL="1828800" lvl="3" indent="-298450">
               <a:spcBef>
                 <a:spcPts val="0"/>
               </a:spcBef>
@@ -424,7 +435,7 @@
               <a:buChar char="●"/>
               <a:defRPr sz="1100"/>
             </a:lvl4pPr>
-            <a:lvl5pPr indent="-298450" lvl="4" marL="2286000">
+            <a:lvl5pPr marL="2286000" lvl="4" indent="-298450">
               <a:spcBef>
                 <a:spcPts val="0"/>
               </a:spcBef>
@@ -435,7 +446,7 @@
               <a:buChar char="○"/>
               <a:defRPr sz="1100"/>
             </a:lvl5pPr>
-            <a:lvl6pPr indent="-298450" lvl="5" marL="2743200">
+            <a:lvl6pPr marL="2743200" lvl="5" indent="-298450">
               <a:spcBef>
                 <a:spcPts val="0"/>
               </a:spcBef>
@@ -446,7 +457,7 @@
               <a:buChar char="■"/>
               <a:defRPr sz="1100"/>
             </a:lvl6pPr>
-            <a:lvl7pPr indent="-298450" lvl="6" marL="3200400">
+            <a:lvl7pPr marL="3200400" lvl="6" indent="-298450">
               <a:spcBef>
                 <a:spcPts val="0"/>
               </a:spcBef>
@@ -457,7 +468,7 @@
               <a:buChar char="●"/>
               <a:defRPr sz="1100"/>
             </a:lvl7pPr>
-            <a:lvl8pPr indent="-298450" lvl="7" marL="3657600">
+            <a:lvl8pPr marL="3657600" lvl="7" indent="-298450">
               <a:spcBef>
                 <a:spcPts val="0"/>
               </a:spcBef>
@@ -468,7 +479,7 @@
               <a:buChar char="○"/>
               <a:defRPr sz="1100"/>
             </a:lvl8pPr>
-            <a:lvl9pPr indent="-298450" lvl="8" marL="4114800">
+            <a:lvl9pPr marL="4114800" lvl="8" indent="-298450">
               <a:spcBef>
                 <a:spcPts val="0"/>
               </a:spcBef>
@@ -480,14 +491,16 @@
               <a:defRPr sz="1100"/>
             </a:lvl9pPr>
           </a:lstStyle>
-          <a:p/>
+          <a:p>
+            <a:endParaRPr/>
+          </a:p>
         </p:txBody>
       </p:sp>
     </p:spTree>
   </p:cSld>
-  <p:clrMap accent1="accent1" accent2="accent2" accent3="accent3" accent4="accent4" accent5="accent5" accent6="accent6" bg1="lt1" bg2="dk2" tx1="dk1" tx2="lt2" folHlink="folHlink" hlink="hlink"/>
+  <p:clrMap bg1="lt1" tx1="dk1" bg2="dk2" tx2="lt2" accent1="accent1" accent2="accent2" accent3="accent3" accent4="accent4" accent5="accent5" accent6="accent6" hlink="hlink" folHlink="folHlink"/>
   <p:notesStyle>
-    <a:defPPr lvl="0" marR="0" rtl="0" algn="l">
+    <a:defPPr marR="0" lvl="0" algn="l" rtl="0">
       <a:lnSpc>
         <a:spcPct val="100000"/>
       </a:lnSpc>
@@ -498,7 +511,7 @@
         <a:spcPts val="0"/>
       </a:spcAft>
     </a:defPPr>
-    <a:lvl1pPr lvl="0" marR="0" rtl="0" algn="l">
+    <a:lvl1pPr marR="0" lvl="0" algn="l" rtl="0">
       <a:lnSpc>
         <a:spcPct val="100000"/>
       </a:lnSpc>
@@ -512,7 +525,7 @@
         <a:srgbClr val="000000"/>
       </a:buClr>
       <a:buFont typeface="Arial"/>
-      <a:defRPr b="0" i="0" spc="0" sz="1400" u="none" cap="none" strike="noStrike">
+      <a:defRPr sz="1400" b="0" i="0" u="none" strike="noStrike" cap="none" spc="0">
         <a:solidFill>
           <a:srgbClr val="000000"/>
         </a:solidFill>
@@ -522,7 +535,7 @@
         <a:sym typeface="Arial"/>
       </a:defRPr>
     </a:lvl1pPr>
-    <a:lvl2pPr lvl="1" marR="0" rtl="0" algn="l">
+    <a:lvl2pPr marR="0" lvl="1" algn="l" rtl="0">
       <a:lnSpc>
         <a:spcPct val="100000"/>
       </a:lnSpc>
@@ -536,7 +549,7 @@
         <a:srgbClr val="000000"/>
       </a:buClr>
       <a:buFont typeface="Arial"/>
-      <a:defRPr b="0" i="0" spc="0" sz="1400" u="none" cap="none" strike="noStrike">
+      <a:defRPr sz="1400" b="0" i="0" u="none" strike="noStrike" cap="none" spc="0">
         <a:solidFill>
           <a:srgbClr val="000000"/>
         </a:solidFill>
@@ -546,7 +559,7 @@
         <a:sym typeface="Arial"/>
       </a:defRPr>
     </a:lvl2pPr>
-    <a:lvl3pPr lvl="2" marR="0" rtl="0" algn="l">
+    <a:lvl3pPr marR="0" lvl="2" algn="l" rtl="0">
       <a:lnSpc>
         <a:spcPct val="100000"/>
       </a:lnSpc>
@@ -560,7 +573,7 @@
         <a:srgbClr val="000000"/>
       </a:buClr>
       <a:buFont typeface="Arial"/>
-      <a:defRPr b="0" i="0" spc="0" sz="1400" u="none" cap="none" strike="noStrike">
+      <a:defRPr sz="1400" b="0" i="0" u="none" strike="noStrike" cap="none" spc="0">
         <a:solidFill>
           <a:srgbClr val="000000"/>
         </a:solidFill>
@@ -570,7 +583,7 @@
         <a:sym typeface="Arial"/>
       </a:defRPr>
     </a:lvl3pPr>
-    <a:lvl4pPr lvl="3" marR="0" rtl="0" algn="l">
+    <a:lvl4pPr marR="0" lvl="3" algn="l" rtl="0">
       <a:lnSpc>
         <a:spcPct val="100000"/>
       </a:lnSpc>
@@ -584,7 +597,7 @@
         <a:srgbClr val="000000"/>
       </a:buClr>
       <a:buFont typeface="Arial"/>
-      <a:defRPr b="0" i="0" spc="0" sz="1400" u="none" cap="none" strike="noStrike">
+      <a:defRPr sz="1400" b="0" i="0" u="none" strike="noStrike" cap="none" spc="0">
         <a:solidFill>
           <a:srgbClr val="000000"/>
         </a:solidFill>
@@ -594,7 +607,7 @@
         <a:sym typeface="Arial"/>
       </a:defRPr>
     </a:lvl4pPr>
-    <a:lvl5pPr lvl="4" marR="0" rtl="0" algn="l">
+    <a:lvl5pPr marR="0" lvl="4" algn="l" rtl="0">
       <a:lnSpc>
         <a:spcPct val="100000"/>
       </a:lnSpc>
@@ -608,7 +621,7 @@
         <a:srgbClr val="000000"/>
       </a:buClr>
       <a:buFont typeface="Arial"/>
-      <a:defRPr b="0" i="0" spc="0" sz="1400" u="none" cap="none" strike="noStrike">
+      <a:defRPr sz="1400" b="0" i="0" u="none" strike="noStrike" cap="none" spc="0">
         <a:solidFill>
           <a:srgbClr val="000000"/>
         </a:solidFill>
@@ -618,7 +631,7 @@
         <a:sym typeface="Arial"/>
       </a:defRPr>
     </a:lvl5pPr>
-    <a:lvl6pPr lvl="5" marR="0" rtl="0" algn="l">
+    <a:lvl6pPr marR="0" lvl="5" algn="l" rtl="0">
       <a:lnSpc>
         <a:spcPct val="100000"/>
       </a:lnSpc>
@@ -632,7 +645,7 @@
         <a:srgbClr val="000000"/>
       </a:buClr>
       <a:buFont typeface="Arial"/>
-      <a:defRPr b="0" i="0" spc="0" sz="1400" u="none" cap="none" strike="noStrike">
+      <a:defRPr sz="1400" b="0" i="0" u="none" strike="noStrike" cap="none" spc="0">
         <a:solidFill>
           <a:srgbClr val="000000"/>
         </a:solidFill>
@@ -642,7 +655,7 @@
         <a:sym typeface="Arial"/>
       </a:defRPr>
     </a:lvl6pPr>
-    <a:lvl7pPr lvl="6" marR="0" rtl="0" algn="l">
+    <a:lvl7pPr marR="0" lvl="6" algn="l" rtl="0">
       <a:lnSpc>
         <a:spcPct val="100000"/>
       </a:lnSpc>
@@ -656,7 +669,7 @@
         <a:srgbClr val="000000"/>
       </a:buClr>
       <a:buFont typeface="Arial"/>
-      <a:defRPr b="0" i="0" spc="0" sz="1400" u="none" cap="none" strike="noStrike">
+      <a:defRPr sz="1400" b="0" i="0" u="none" strike="noStrike" cap="none" spc="0">
         <a:solidFill>
           <a:srgbClr val="000000"/>
         </a:solidFill>
@@ -666,7 +679,7 @@
         <a:sym typeface="Arial"/>
       </a:defRPr>
     </a:lvl7pPr>
-    <a:lvl8pPr lvl="7" marR="0" rtl="0" algn="l">
+    <a:lvl8pPr marR="0" lvl="7" algn="l" rtl="0">
       <a:lnSpc>
         <a:spcPct val="100000"/>
       </a:lnSpc>
@@ -680,7 +693,7 @@
         <a:srgbClr val="000000"/>
       </a:buClr>
       <a:buFont typeface="Arial"/>
-      <a:defRPr b="0" i="0" spc="0" sz="1400" u="none" cap="none" strike="noStrike">
+      <a:defRPr sz="1400" b="0" i="0" u="none" strike="noStrike" cap="none" spc="0">
         <a:solidFill>
           <a:srgbClr val="000000"/>
         </a:solidFill>
@@ -690,7 +703,7 @@
         <a:sym typeface="Arial"/>
       </a:defRPr>
     </a:lvl8pPr>
-    <a:lvl9pPr lvl="8" marR="0" rtl="0" algn="l">
+    <a:lvl9pPr marR="0" lvl="8" algn="l" rtl="0">
       <a:lnSpc>
         <a:spcPct val="100000"/>
       </a:lnSpc>
@@ -704,7 +717,7 @@
         <a:srgbClr val="000000"/>
       </a:buClr>
       <a:buFont typeface="Arial"/>
-      <a:defRPr b="0" i="0" spc="0" sz="1400" u="none" cap="none" strike="noStrike">
+      <a:defRPr sz="1400" b="0" i="0" u="none" strike="noStrike" cap="none" spc="0">
         <a:solidFill>
           <a:srgbClr val="000000"/>
         </a:solidFill>
@@ -719,11 +732,11 @@
 </file>
 
 <file path=ppt/notesSlides/notesSlide1.xml><?xml version="1.0" encoding="utf-8"?>
-<p:notes xmlns:a="http://schemas.openxmlformats.org/drawingml/2006/main" xmlns:r="http://schemas.openxmlformats.org/officeDocument/2006/relationships" xmlns:mc="http://schemas.openxmlformats.org/markup-compatibility/2006" xmlns:mv="urn:schemas-microsoft-com:mac:vml" xmlns:p="http://schemas.openxmlformats.org/presentationml/2006/main" xmlns:c="http://schemas.openxmlformats.org/drawingml/2006/chart" xmlns:dgm="http://schemas.openxmlformats.org/drawingml/2006/diagram" xmlns:o="urn:schemas-microsoft-com:office:office" xmlns:v="urn:schemas-microsoft-com:vml" xmlns:pvml="urn:schemas-microsoft-com:office:powerpoint" xmlns:com="http://schemas.openxmlformats.org/drawingml/2006/compatibility" xmlns:p14="http://schemas.microsoft.com/office/powerpoint/2010/main" xmlns:p15="http://schemas.microsoft.com/office/powerpoint/2012/main" xmlns:ahyp="http://schemas.microsoft.com/office/drawing/2018/hyperlinkcolor" showMasterPhAnim="0" showMasterSp="0">
+<p:notes xmlns:a="http://schemas.openxmlformats.org/drawingml/2006/main" xmlns:r="http://schemas.openxmlformats.org/officeDocument/2006/relationships" xmlns:p="http://schemas.openxmlformats.org/presentationml/2006/main" showMasterSp="0" showMasterPhAnim="0">
   <p:cSld>
     <p:spTree>
       <p:nvGrpSpPr>
-        <p:cNvPr id="50" name="Shape 50"/>
+        <p:cNvPr id="1" name="Shape 50"/>
         <p:cNvGrpSpPr/>
         <p:nvPr/>
       </p:nvGrpSpPr>
@@ -738,20 +751,26 @@
       <p:sp>
         <p:nvSpPr>
           <p:cNvPr id="51" name="Google Shape;51;p:notes"/>
-          <p:cNvSpPr/>
+          <p:cNvSpPr>
+            <a:spLocks noGrp="1" noRot="1" noChangeAspect="1"/>
+          </p:cNvSpPr>
           <p:nvPr>
-            <p:ph idx="2" type="sldImg"/>
+            <p:ph type="sldImg" idx="2"/>
           </p:nvPr>
         </p:nvSpPr>
         <p:spPr>
           <a:xfrm>
-            <a:off x="381300" y="685800"/>
-            <a:ext cx="6096075" cy="3429000"/>
+            <a:off x="381000" y="685800"/>
+            <a:ext cx="6096000" cy="3429000"/>
           </a:xfrm>
           <a:custGeom>
-            <a:rect b="b" l="l" r="r" t="t"/>
+            <a:avLst/>
+            <a:gdLst/>
+            <a:ahLst/>
+            <a:cxnLst/>
+            <a:rect l="l" t="t" r="r" b="b"/>
             <a:pathLst>
-              <a:path extrusionOk="0" h="120000" w="120000">
+              <a:path w="120000" h="120000" extrusionOk="0">
                 <a:moveTo>
                   <a:pt x="0" y="0"/>
                 </a:moveTo>
@@ -773,9 +792,11 @@
       <p:sp>
         <p:nvSpPr>
           <p:cNvPr id="52" name="Google Shape;52;p:notes"/>
-          <p:cNvSpPr txBox="1"/>
+          <p:cNvSpPr txBox="1">
+            <a:spLocks noGrp="1"/>
+          </p:cNvSpPr>
           <p:nvPr>
-            <p:ph idx="1" type="body"/>
+            <p:ph type="body" idx="1"/>
           </p:nvPr>
         </p:nvSpPr>
         <p:spPr>
@@ -788,12 +809,12 @@
           </a:prstGeom>
         </p:spPr>
         <p:txBody>
-          <a:bodyPr anchorCtr="0" anchor="t" bIns="91425" lIns="91425" spcFirstLastPara="1" rIns="91425" wrap="square" tIns="91425">
+          <a:bodyPr spcFirstLastPara="1" wrap="square" lIns="91425" tIns="91425" rIns="91425" bIns="91425" anchor="t" anchorCtr="0">
             <a:noAutofit/>
           </a:bodyPr>
           <a:lstStyle/>
           <a:p>
-            <a:pPr indent="0" lvl="0" marL="0" rtl="0" algn="l">
+            <a:pPr marL="0" lvl="0" indent="0" algn="l" rtl="0">
               <a:spcBef>
                 <a:spcPts val="0"/>
               </a:spcBef>
@@ -802,9 +823,6 @@
               </a:spcAft>
               <a:buNone/>
             </a:pPr>
-            <a:r>
-              <a:t/>
-            </a:r>
             <a:endParaRPr/>
           </a:p>
         </p:txBody>
@@ -818,11 +836,11 @@
 </file>
 
 <file path=ppt/notesSlides/notesSlide10.xml><?xml version="1.0" encoding="utf-8"?>
-<p:notes xmlns:a="http://schemas.openxmlformats.org/drawingml/2006/main" xmlns:r="http://schemas.openxmlformats.org/officeDocument/2006/relationships" xmlns:mc="http://schemas.openxmlformats.org/markup-compatibility/2006" xmlns:mv="urn:schemas-microsoft-com:mac:vml" xmlns:p="http://schemas.openxmlformats.org/presentationml/2006/main" xmlns:c="http://schemas.openxmlformats.org/drawingml/2006/chart" xmlns:dgm="http://schemas.openxmlformats.org/drawingml/2006/diagram" xmlns:o="urn:schemas-microsoft-com:office:office" xmlns:v="urn:schemas-microsoft-com:vml" xmlns:pvml="urn:schemas-microsoft-com:office:powerpoint" xmlns:com="http://schemas.openxmlformats.org/drawingml/2006/compatibility" xmlns:p14="http://schemas.microsoft.com/office/powerpoint/2010/main" xmlns:p15="http://schemas.microsoft.com/office/powerpoint/2012/main" xmlns:ahyp="http://schemas.microsoft.com/office/drawing/2018/hyperlinkcolor" showMasterPhAnim="0" showMasterSp="0">
+<p:notes xmlns:a="http://schemas.openxmlformats.org/drawingml/2006/main" xmlns:r="http://schemas.openxmlformats.org/officeDocument/2006/relationships" xmlns:p="http://schemas.openxmlformats.org/presentationml/2006/main" showMasterSp="0" showMasterPhAnim="0">
   <p:cSld>
     <p:spTree>
       <p:nvGrpSpPr>
-        <p:cNvPr id="120" name="Shape 120"/>
+        <p:cNvPr id="1" name="Shape 128"/>
         <p:cNvGrpSpPr/>
         <p:nvPr/>
       </p:nvGrpSpPr>
@@ -836,10 +854,12 @@
       </p:grpSpPr>
       <p:sp>
         <p:nvSpPr>
-          <p:cNvPr id="121" name="Google Shape;121;g3fb085bff3c_0_41:notes"/>
-          <p:cNvSpPr/>
+          <p:cNvPr id="129" name="Google Shape;129;g3fb085bff3c_0_46:notes"/>
+          <p:cNvSpPr>
+            <a:spLocks noGrp="1" noRot="1" noChangeAspect="1"/>
+          </p:cNvSpPr>
           <p:nvPr>
-            <p:ph idx="2" type="sldImg"/>
+            <p:ph type="sldImg" idx="2"/>
           </p:nvPr>
         </p:nvSpPr>
         <p:spPr>
@@ -848,9 +868,13 @@
             <a:ext cx="6096000" cy="3429000"/>
           </a:xfrm>
           <a:custGeom>
-            <a:rect b="b" l="l" r="r" t="t"/>
+            <a:avLst/>
+            <a:gdLst/>
+            <a:ahLst/>
+            <a:cxnLst/>
+            <a:rect l="l" t="t" r="r" b="b"/>
             <a:pathLst>
-              <a:path extrusionOk="0" h="120000" w="120000">
+              <a:path w="120000" h="120000" extrusionOk="0">
                 <a:moveTo>
                   <a:pt x="0" y="0"/>
                 </a:moveTo>
@@ -871,10 +895,12 @@
       </p:sp>
       <p:sp>
         <p:nvSpPr>
-          <p:cNvPr id="122" name="Google Shape;122;g3fb085bff3c_0_41:notes"/>
-          <p:cNvSpPr txBox="1"/>
+          <p:cNvPr id="130" name="Google Shape;130;g3fb085bff3c_0_46:notes"/>
+          <p:cNvSpPr txBox="1">
+            <a:spLocks noGrp="1"/>
+          </p:cNvSpPr>
           <p:nvPr>
-            <p:ph idx="1" type="body"/>
+            <p:ph type="body" idx="1"/>
           </p:nvPr>
         </p:nvSpPr>
         <p:spPr>
@@ -887,12 +913,12 @@
           </a:prstGeom>
         </p:spPr>
         <p:txBody>
-          <a:bodyPr anchorCtr="0" anchor="t" bIns="91425" lIns="91425" spcFirstLastPara="1" rIns="91425" wrap="square" tIns="91425">
+          <a:bodyPr spcFirstLastPara="1" wrap="square" lIns="91425" tIns="91425" rIns="91425" bIns="91425" anchor="t" anchorCtr="0">
             <a:noAutofit/>
           </a:bodyPr>
           <a:lstStyle/>
           <a:p>
-            <a:pPr indent="0" lvl="0" marL="0" rtl="0" algn="l">
+            <a:pPr marL="0" lvl="0" indent="0" algn="l" rtl="0">
               <a:spcBef>
                 <a:spcPts val="0"/>
               </a:spcBef>
@@ -901,9 +927,6 @@
               </a:spcAft>
               <a:buNone/>
             </a:pPr>
-            <a:r>
-              <a:t/>
-            </a:r>
             <a:endParaRPr/>
           </a:p>
         </p:txBody>
@@ -917,11 +940,11 @@
 </file>
 
 <file path=ppt/notesSlides/notesSlide11.xml><?xml version="1.0" encoding="utf-8"?>
-<p:notes xmlns:a="http://schemas.openxmlformats.org/drawingml/2006/main" xmlns:r="http://schemas.openxmlformats.org/officeDocument/2006/relationships" xmlns:mc="http://schemas.openxmlformats.org/markup-compatibility/2006" xmlns:mv="urn:schemas-microsoft-com:mac:vml" xmlns:p="http://schemas.openxmlformats.org/presentationml/2006/main" xmlns:c="http://schemas.openxmlformats.org/drawingml/2006/chart" xmlns:dgm="http://schemas.openxmlformats.org/drawingml/2006/diagram" xmlns:o="urn:schemas-microsoft-com:office:office" xmlns:v="urn:schemas-microsoft-com:vml" xmlns:pvml="urn:schemas-microsoft-com:office:powerpoint" xmlns:com="http://schemas.openxmlformats.org/drawingml/2006/compatibility" xmlns:p14="http://schemas.microsoft.com/office/powerpoint/2010/main" xmlns:p15="http://schemas.microsoft.com/office/powerpoint/2012/main" xmlns:ahyp="http://schemas.microsoft.com/office/drawing/2018/hyperlinkcolor" showMasterPhAnim="0" showMasterSp="0">
+<p:notes xmlns:a="http://schemas.openxmlformats.org/drawingml/2006/main" xmlns:r="http://schemas.openxmlformats.org/officeDocument/2006/relationships" xmlns:p="http://schemas.openxmlformats.org/presentationml/2006/main" showMasterSp="0" showMasterPhAnim="0">
   <p:cSld>
     <p:spTree>
       <p:nvGrpSpPr>
-        <p:cNvPr id="128" name="Shape 128"/>
+        <p:cNvPr id="1" name="Shape 136"/>
         <p:cNvGrpSpPr/>
         <p:nvPr/>
       </p:nvGrpSpPr>
@@ -935,10 +958,12 @@
       </p:grpSpPr>
       <p:sp>
         <p:nvSpPr>
-          <p:cNvPr id="129" name="Google Shape;129;g3fb085bff3c_0_46:notes"/>
-          <p:cNvSpPr/>
+          <p:cNvPr id="137" name="Google Shape;137;g3fb085bff3c_0_51:notes"/>
+          <p:cNvSpPr>
+            <a:spLocks noGrp="1" noRot="1" noChangeAspect="1"/>
+          </p:cNvSpPr>
           <p:nvPr>
-            <p:ph idx="2" type="sldImg"/>
+            <p:ph type="sldImg" idx="2"/>
           </p:nvPr>
         </p:nvSpPr>
         <p:spPr>
@@ -947,9 +972,13 @@
             <a:ext cx="6096000" cy="3429000"/>
           </a:xfrm>
           <a:custGeom>
-            <a:rect b="b" l="l" r="r" t="t"/>
+            <a:avLst/>
+            <a:gdLst/>
+            <a:ahLst/>
+            <a:cxnLst/>
+            <a:rect l="l" t="t" r="r" b="b"/>
             <a:pathLst>
-              <a:path extrusionOk="0" h="120000" w="120000">
+              <a:path w="120000" h="120000" extrusionOk="0">
                 <a:moveTo>
                   <a:pt x="0" y="0"/>
                 </a:moveTo>
@@ -970,10 +999,12 @@
       </p:sp>
       <p:sp>
         <p:nvSpPr>
-          <p:cNvPr id="130" name="Google Shape;130;g3fb085bff3c_0_46:notes"/>
-          <p:cNvSpPr txBox="1"/>
+          <p:cNvPr id="138" name="Google Shape;138;g3fb085bff3c_0_51:notes"/>
+          <p:cNvSpPr txBox="1">
+            <a:spLocks noGrp="1"/>
+          </p:cNvSpPr>
           <p:nvPr>
-            <p:ph idx="1" type="body"/>
+            <p:ph type="body" idx="1"/>
           </p:nvPr>
         </p:nvSpPr>
         <p:spPr>
@@ -986,12 +1017,12 @@
           </a:prstGeom>
         </p:spPr>
         <p:txBody>
-          <a:bodyPr anchorCtr="0" anchor="t" bIns="91425" lIns="91425" spcFirstLastPara="1" rIns="91425" wrap="square" tIns="91425">
+          <a:bodyPr spcFirstLastPara="1" wrap="square" lIns="91425" tIns="91425" rIns="91425" bIns="91425" anchor="t" anchorCtr="0">
             <a:noAutofit/>
           </a:bodyPr>
           <a:lstStyle/>
           <a:p>
-            <a:pPr indent="0" lvl="0" marL="0" rtl="0" algn="l">
+            <a:pPr marL="0" lvl="0" indent="0" algn="l" rtl="0">
               <a:spcBef>
                 <a:spcPts val="0"/>
               </a:spcBef>
@@ -1000,9 +1031,6 @@
               </a:spcAft>
               <a:buNone/>
             </a:pPr>
-            <a:r>
-              <a:t/>
-            </a:r>
             <a:endParaRPr/>
           </a:p>
         </p:txBody>
@@ -1016,11 +1044,11 @@
 </file>
 
 <file path=ppt/notesSlides/notesSlide12.xml><?xml version="1.0" encoding="utf-8"?>
-<p:notes xmlns:a="http://schemas.openxmlformats.org/drawingml/2006/main" xmlns:r="http://schemas.openxmlformats.org/officeDocument/2006/relationships" xmlns:mc="http://schemas.openxmlformats.org/markup-compatibility/2006" xmlns:mv="urn:schemas-microsoft-com:mac:vml" xmlns:p="http://schemas.openxmlformats.org/presentationml/2006/main" xmlns:c="http://schemas.openxmlformats.org/drawingml/2006/chart" xmlns:dgm="http://schemas.openxmlformats.org/drawingml/2006/diagram" xmlns:o="urn:schemas-microsoft-com:office:office" xmlns:v="urn:schemas-microsoft-com:vml" xmlns:pvml="urn:schemas-microsoft-com:office:powerpoint" xmlns:com="http://schemas.openxmlformats.org/drawingml/2006/compatibility" xmlns:p14="http://schemas.microsoft.com/office/powerpoint/2010/main" xmlns:p15="http://schemas.microsoft.com/office/powerpoint/2012/main" xmlns:ahyp="http://schemas.microsoft.com/office/drawing/2018/hyperlinkcolor" showMasterPhAnim="0" showMasterSp="0">
+<p:notes xmlns:a="http://schemas.openxmlformats.org/drawingml/2006/main" xmlns:r="http://schemas.openxmlformats.org/officeDocument/2006/relationships" xmlns:p="http://schemas.openxmlformats.org/presentationml/2006/main" showMasterSp="0" showMasterPhAnim="0">
   <p:cSld>
     <p:spTree>
       <p:nvGrpSpPr>
-        <p:cNvPr id="136" name="Shape 136"/>
+        <p:cNvPr id="1" name="Shape 144"/>
         <p:cNvGrpSpPr/>
         <p:nvPr/>
       </p:nvGrpSpPr>
@@ -1034,10 +1062,12 @@
       </p:grpSpPr>
       <p:sp>
         <p:nvSpPr>
-          <p:cNvPr id="137" name="Google Shape;137;g3fb085bff3c_0_51:notes"/>
-          <p:cNvSpPr/>
+          <p:cNvPr id="145" name="Google Shape;145;g3fb085bff3c_0_56:notes"/>
+          <p:cNvSpPr>
+            <a:spLocks noGrp="1" noRot="1" noChangeAspect="1"/>
+          </p:cNvSpPr>
           <p:nvPr>
-            <p:ph idx="2" type="sldImg"/>
+            <p:ph type="sldImg" idx="2"/>
           </p:nvPr>
         </p:nvSpPr>
         <p:spPr>
@@ -1046,9 +1076,13 @@
             <a:ext cx="6096000" cy="3429000"/>
           </a:xfrm>
           <a:custGeom>
-            <a:rect b="b" l="l" r="r" t="t"/>
+            <a:avLst/>
+            <a:gdLst/>
+            <a:ahLst/>
+            <a:cxnLst/>
+            <a:rect l="l" t="t" r="r" b="b"/>
             <a:pathLst>
-              <a:path extrusionOk="0" h="120000" w="120000">
+              <a:path w="120000" h="120000" extrusionOk="0">
                 <a:moveTo>
                   <a:pt x="0" y="0"/>
                 </a:moveTo>
@@ -1069,10 +1103,12 @@
       </p:sp>
       <p:sp>
         <p:nvSpPr>
-          <p:cNvPr id="138" name="Google Shape;138;g3fb085bff3c_0_51:notes"/>
-          <p:cNvSpPr txBox="1"/>
+          <p:cNvPr id="146" name="Google Shape;146;g3fb085bff3c_0_56:notes"/>
+          <p:cNvSpPr txBox="1">
+            <a:spLocks noGrp="1"/>
+          </p:cNvSpPr>
           <p:nvPr>
-            <p:ph idx="1" type="body"/>
+            <p:ph type="body" idx="1"/>
           </p:nvPr>
         </p:nvSpPr>
         <p:spPr>
@@ -1085,12 +1121,12 @@
           </a:prstGeom>
         </p:spPr>
         <p:txBody>
-          <a:bodyPr anchorCtr="0" anchor="t" bIns="91425" lIns="91425" spcFirstLastPara="1" rIns="91425" wrap="square" tIns="91425">
+          <a:bodyPr spcFirstLastPara="1" wrap="square" lIns="91425" tIns="91425" rIns="91425" bIns="91425" anchor="t" anchorCtr="0">
             <a:noAutofit/>
           </a:bodyPr>
           <a:lstStyle/>
           <a:p>
-            <a:pPr indent="0" lvl="0" marL="0" rtl="0" algn="l">
+            <a:pPr marL="0" lvl="0" indent="0" algn="l" rtl="0">
               <a:spcBef>
                 <a:spcPts val="0"/>
               </a:spcBef>
@@ -1099,9 +1135,6 @@
               </a:spcAft>
               <a:buNone/>
             </a:pPr>
-            <a:r>
-              <a:t/>
-            </a:r>
             <a:endParaRPr/>
           </a:p>
         </p:txBody>
@@ -1115,11 +1148,11 @@
 </file>
 
 <file path=ppt/notesSlides/notesSlide13.xml><?xml version="1.0" encoding="utf-8"?>
-<p:notes xmlns:a="http://schemas.openxmlformats.org/drawingml/2006/main" xmlns:r="http://schemas.openxmlformats.org/officeDocument/2006/relationships" xmlns:mc="http://schemas.openxmlformats.org/markup-compatibility/2006" xmlns:mv="urn:schemas-microsoft-com:mac:vml" xmlns:p="http://schemas.openxmlformats.org/presentationml/2006/main" xmlns:c="http://schemas.openxmlformats.org/drawingml/2006/chart" xmlns:dgm="http://schemas.openxmlformats.org/drawingml/2006/diagram" xmlns:o="urn:schemas-microsoft-com:office:office" xmlns:v="urn:schemas-microsoft-com:vml" xmlns:pvml="urn:schemas-microsoft-com:office:powerpoint" xmlns:com="http://schemas.openxmlformats.org/drawingml/2006/compatibility" xmlns:p14="http://schemas.microsoft.com/office/powerpoint/2010/main" xmlns:p15="http://schemas.microsoft.com/office/powerpoint/2012/main" xmlns:ahyp="http://schemas.microsoft.com/office/drawing/2018/hyperlinkcolor" showMasterPhAnim="0" showMasterSp="0">
+<p:notes xmlns:a="http://schemas.openxmlformats.org/drawingml/2006/main" xmlns:r="http://schemas.openxmlformats.org/officeDocument/2006/relationships" xmlns:p="http://schemas.openxmlformats.org/presentationml/2006/main" showMasterSp="0" showMasterPhAnim="0">
   <p:cSld>
     <p:spTree>
       <p:nvGrpSpPr>
-        <p:cNvPr id="144" name="Shape 144"/>
+        <p:cNvPr id="1" name="Shape 152"/>
         <p:cNvGrpSpPr/>
         <p:nvPr/>
       </p:nvGrpSpPr>
@@ -1133,21 +1166,27 @@
       </p:grpSpPr>
       <p:sp>
         <p:nvSpPr>
-          <p:cNvPr id="145" name="Google Shape;145;g3fb085bff3c_0_56:notes"/>
-          <p:cNvSpPr/>
+          <p:cNvPr id="153" name="Google Shape;153;g3fb085bff3c_0_61:notes"/>
+          <p:cNvSpPr>
+            <a:spLocks noGrp="1" noRot="1" noChangeAspect="1"/>
+          </p:cNvSpPr>
           <p:nvPr>
-            <p:ph idx="2" type="sldImg"/>
+            <p:ph type="sldImg" idx="2"/>
           </p:nvPr>
         </p:nvSpPr>
         <p:spPr>
           <a:xfrm>
-            <a:off x="381300" y="685800"/>
+            <a:off x="381000" y="685800"/>
             <a:ext cx="6096000" cy="3429000"/>
           </a:xfrm>
           <a:custGeom>
-            <a:rect b="b" l="l" r="r" t="t"/>
+            <a:avLst/>
+            <a:gdLst/>
+            <a:ahLst/>
+            <a:cxnLst/>
+            <a:rect l="l" t="t" r="r" b="b"/>
             <a:pathLst>
-              <a:path extrusionOk="0" h="120000" w="120000">
+              <a:path w="120000" h="120000" extrusionOk="0">
                 <a:moveTo>
                   <a:pt x="0" y="0"/>
                 </a:moveTo>
@@ -1168,10 +1207,12 @@
       </p:sp>
       <p:sp>
         <p:nvSpPr>
-          <p:cNvPr id="146" name="Google Shape;146;g3fb085bff3c_0_56:notes"/>
-          <p:cNvSpPr txBox="1"/>
+          <p:cNvPr id="154" name="Google Shape;154;g3fb085bff3c_0_61:notes"/>
+          <p:cNvSpPr txBox="1">
+            <a:spLocks noGrp="1"/>
+          </p:cNvSpPr>
           <p:nvPr>
-            <p:ph idx="1" type="body"/>
+            <p:ph type="body" idx="1"/>
           </p:nvPr>
         </p:nvSpPr>
         <p:spPr>
@@ -1184,12 +1225,12 @@
           </a:prstGeom>
         </p:spPr>
         <p:txBody>
-          <a:bodyPr anchorCtr="0" anchor="t" bIns="91425" lIns="91425" spcFirstLastPara="1" rIns="91425" wrap="square" tIns="91425">
+          <a:bodyPr spcFirstLastPara="1" wrap="square" lIns="91425" tIns="91425" rIns="91425" bIns="91425" anchor="t" anchorCtr="0">
             <a:noAutofit/>
           </a:bodyPr>
           <a:lstStyle/>
           <a:p>
-            <a:pPr indent="0" lvl="0" marL="0" rtl="0" algn="l">
+            <a:pPr marL="0" lvl="0" indent="0" algn="l" rtl="0">
               <a:spcBef>
                 <a:spcPts val="0"/>
               </a:spcBef>
@@ -1198,9 +1239,6 @@
               </a:spcAft>
               <a:buNone/>
             </a:pPr>
-            <a:r>
-              <a:t/>
-            </a:r>
             <a:endParaRPr/>
           </a:p>
         </p:txBody>
@@ -1214,11 +1252,11 @@
 </file>
 
 <file path=ppt/notesSlides/notesSlide14.xml><?xml version="1.0" encoding="utf-8"?>
-<p:notes xmlns:a="http://schemas.openxmlformats.org/drawingml/2006/main" xmlns:r="http://schemas.openxmlformats.org/officeDocument/2006/relationships" xmlns:mc="http://schemas.openxmlformats.org/markup-compatibility/2006" xmlns:mv="urn:schemas-microsoft-com:mac:vml" xmlns:p="http://schemas.openxmlformats.org/presentationml/2006/main" xmlns:c="http://schemas.openxmlformats.org/drawingml/2006/chart" xmlns:dgm="http://schemas.openxmlformats.org/drawingml/2006/diagram" xmlns:o="urn:schemas-microsoft-com:office:office" xmlns:v="urn:schemas-microsoft-com:vml" xmlns:pvml="urn:schemas-microsoft-com:office:powerpoint" xmlns:com="http://schemas.openxmlformats.org/drawingml/2006/compatibility" xmlns:p14="http://schemas.microsoft.com/office/powerpoint/2010/main" xmlns:p15="http://schemas.microsoft.com/office/powerpoint/2012/main" xmlns:ahyp="http://schemas.microsoft.com/office/drawing/2018/hyperlinkcolor" showMasterPhAnim="0" showMasterSp="0">
+<p:notes xmlns:a="http://schemas.openxmlformats.org/drawingml/2006/main" xmlns:r="http://schemas.openxmlformats.org/officeDocument/2006/relationships" xmlns:p="http://schemas.openxmlformats.org/presentationml/2006/main" showMasterSp="0" showMasterPhAnim="0">
   <p:cSld>
     <p:spTree>
       <p:nvGrpSpPr>
-        <p:cNvPr id="152" name="Shape 152"/>
+        <p:cNvPr id="1" name="Shape 167"/>
         <p:cNvGrpSpPr/>
         <p:nvPr/>
       </p:nvGrpSpPr>
@@ -1232,10 +1270,12 @@
       </p:grpSpPr>
       <p:sp>
         <p:nvSpPr>
-          <p:cNvPr id="153" name="Google Shape;153;g3fb085bff3c_0_61:notes"/>
-          <p:cNvSpPr/>
+          <p:cNvPr id="168" name="Google Shape;168;g3fb085bff3c_0_66:notes"/>
+          <p:cNvSpPr>
+            <a:spLocks noGrp="1" noRot="1" noChangeAspect="1"/>
+          </p:cNvSpPr>
           <p:nvPr>
-            <p:ph idx="2" type="sldImg"/>
+            <p:ph type="sldImg" idx="2"/>
           </p:nvPr>
         </p:nvSpPr>
         <p:spPr>
@@ -1244,9 +1284,13 @@
             <a:ext cx="6096000" cy="3429000"/>
           </a:xfrm>
           <a:custGeom>
-            <a:rect b="b" l="l" r="r" t="t"/>
+            <a:avLst/>
+            <a:gdLst/>
+            <a:ahLst/>
+            <a:cxnLst/>
+            <a:rect l="l" t="t" r="r" b="b"/>
             <a:pathLst>
-              <a:path extrusionOk="0" h="120000" w="120000">
+              <a:path w="120000" h="120000" extrusionOk="0">
                 <a:moveTo>
                   <a:pt x="0" y="0"/>
                 </a:moveTo>
@@ -1267,10 +1311,12 @@
       </p:sp>
       <p:sp>
         <p:nvSpPr>
-          <p:cNvPr id="154" name="Google Shape;154;g3fb085bff3c_0_61:notes"/>
-          <p:cNvSpPr txBox="1"/>
+          <p:cNvPr id="169" name="Google Shape;169;g3fb085bff3c_0_66:notes"/>
+          <p:cNvSpPr txBox="1">
+            <a:spLocks noGrp="1"/>
+          </p:cNvSpPr>
           <p:nvPr>
-            <p:ph idx="1" type="body"/>
+            <p:ph type="body" idx="1"/>
           </p:nvPr>
         </p:nvSpPr>
         <p:spPr>
@@ -1283,12 +1329,12 @@
           </a:prstGeom>
         </p:spPr>
         <p:txBody>
-          <a:bodyPr anchorCtr="0" anchor="t" bIns="91425" lIns="91425" spcFirstLastPara="1" rIns="91425" wrap="square" tIns="91425">
+          <a:bodyPr spcFirstLastPara="1" wrap="square" lIns="91425" tIns="91425" rIns="91425" bIns="91425" anchor="t" anchorCtr="0">
             <a:noAutofit/>
           </a:bodyPr>
           <a:lstStyle/>
           <a:p>
-            <a:pPr indent="0" lvl="0" marL="0" rtl="0" algn="l">
+            <a:pPr marL="0" lvl="0" indent="0" algn="l" rtl="0">
               <a:spcBef>
                 <a:spcPts val="0"/>
               </a:spcBef>
@@ -1297,9 +1343,6 @@
               </a:spcAft>
               <a:buNone/>
             </a:pPr>
-            <a:r>
-              <a:t/>
-            </a:r>
             <a:endParaRPr/>
           </a:p>
         </p:txBody>
@@ -1312,12 +1355,12 @@
 </p:notes>
 </file>
 
-<file path=ppt/notesSlides/notesSlide15.xml><?xml version="1.0" encoding="utf-8"?>
-<p:notes xmlns:a="http://schemas.openxmlformats.org/drawingml/2006/main" xmlns:r="http://schemas.openxmlformats.org/officeDocument/2006/relationships" xmlns:mc="http://schemas.openxmlformats.org/markup-compatibility/2006" xmlns:mv="urn:schemas-microsoft-com:mac:vml" xmlns:p="http://schemas.openxmlformats.org/presentationml/2006/main" xmlns:c="http://schemas.openxmlformats.org/drawingml/2006/chart" xmlns:dgm="http://schemas.openxmlformats.org/drawingml/2006/diagram" xmlns:o="urn:schemas-microsoft-com:office:office" xmlns:v="urn:schemas-microsoft-com:vml" xmlns:pvml="urn:schemas-microsoft-com:office:powerpoint" xmlns:com="http://schemas.openxmlformats.org/drawingml/2006/compatibility" xmlns:p14="http://schemas.microsoft.com/office/powerpoint/2010/main" xmlns:p15="http://schemas.microsoft.com/office/powerpoint/2012/main" xmlns:ahyp="http://schemas.microsoft.com/office/drawing/2018/hyperlinkcolor" showMasterPhAnim="0" showMasterSp="0">
+<file path=ppt/notesSlides/notesSlide2.xml><?xml version="1.0" encoding="utf-8"?>
+<p:notes xmlns:a="http://schemas.openxmlformats.org/drawingml/2006/main" xmlns:r="http://schemas.openxmlformats.org/officeDocument/2006/relationships" xmlns:p="http://schemas.openxmlformats.org/presentationml/2006/main" showMasterSp="0" showMasterPhAnim="0">
   <p:cSld>
     <p:spTree>
       <p:nvGrpSpPr>
-        <p:cNvPr id="160" name="Shape 160"/>
+        <p:cNvPr id="1" name="Shape 65"/>
         <p:cNvGrpSpPr/>
         <p:nvPr/>
       </p:nvGrpSpPr>
@@ -1331,10 +1374,12 @@
       </p:grpSpPr>
       <p:sp>
         <p:nvSpPr>
-          <p:cNvPr id="161" name="Google Shape;161;g3fb085bff3c_0_107:notes"/>
-          <p:cNvSpPr/>
+          <p:cNvPr id="66" name="Google Shape;66;g3fb085bff3c_0_4:notes"/>
+          <p:cNvSpPr>
+            <a:spLocks noGrp="1" noRot="1" noChangeAspect="1"/>
+          </p:cNvSpPr>
           <p:nvPr>
-            <p:ph idx="2" type="sldImg"/>
+            <p:ph type="sldImg" idx="2"/>
           </p:nvPr>
         </p:nvSpPr>
         <p:spPr>
@@ -1343,9 +1388,13 @@
             <a:ext cx="6096000" cy="3429000"/>
           </a:xfrm>
           <a:custGeom>
-            <a:rect b="b" l="l" r="r" t="t"/>
+            <a:avLst/>
+            <a:gdLst/>
+            <a:ahLst/>
+            <a:cxnLst/>
+            <a:rect l="l" t="t" r="r" b="b"/>
             <a:pathLst>
-              <a:path extrusionOk="0" h="120000" w="120000">
+              <a:path w="120000" h="120000" extrusionOk="0">
                 <a:moveTo>
                   <a:pt x="0" y="0"/>
                 </a:moveTo>
@@ -1366,10 +1415,12 @@
       </p:sp>
       <p:sp>
         <p:nvSpPr>
-          <p:cNvPr id="162" name="Google Shape;162;g3fb085bff3c_0_107:notes"/>
-          <p:cNvSpPr txBox="1"/>
+          <p:cNvPr id="67" name="Google Shape;67;g3fb085bff3c_0_4:notes"/>
+          <p:cNvSpPr txBox="1">
+            <a:spLocks noGrp="1"/>
+          </p:cNvSpPr>
           <p:nvPr>
-            <p:ph idx="1" type="body"/>
+            <p:ph type="body" idx="1"/>
           </p:nvPr>
         </p:nvSpPr>
         <p:spPr>
@@ -1382,12 +1433,12 @@
           </a:prstGeom>
         </p:spPr>
         <p:txBody>
-          <a:bodyPr anchorCtr="0" anchor="t" bIns="91425" lIns="91425" spcFirstLastPara="1" rIns="91425" wrap="square" tIns="91425">
+          <a:bodyPr spcFirstLastPara="1" wrap="square" lIns="91425" tIns="91425" rIns="91425" bIns="91425" anchor="t" anchorCtr="0">
             <a:noAutofit/>
           </a:bodyPr>
           <a:lstStyle/>
           <a:p>
-            <a:pPr indent="0" lvl="0" marL="0" rtl="0" algn="l">
+            <a:pPr marL="0" lvl="0" indent="0" algn="l" rtl="0">
               <a:spcBef>
                 <a:spcPts val="0"/>
               </a:spcBef>
@@ -1396,9 +1447,6 @@
               </a:spcAft>
               <a:buNone/>
             </a:pPr>
-            <a:r>
-              <a:t/>
-            </a:r>
             <a:endParaRPr/>
           </a:p>
         </p:txBody>
@@ -1411,12 +1459,12 @@
 </p:notes>
 </file>
 
-<file path=ppt/notesSlides/notesSlide16.xml><?xml version="1.0" encoding="utf-8"?>
-<p:notes xmlns:a="http://schemas.openxmlformats.org/drawingml/2006/main" xmlns:r="http://schemas.openxmlformats.org/officeDocument/2006/relationships" xmlns:mc="http://schemas.openxmlformats.org/markup-compatibility/2006" xmlns:mv="urn:schemas-microsoft-com:mac:vml" xmlns:p="http://schemas.openxmlformats.org/presentationml/2006/main" xmlns:c="http://schemas.openxmlformats.org/drawingml/2006/chart" xmlns:dgm="http://schemas.openxmlformats.org/drawingml/2006/diagram" xmlns:o="urn:schemas-microsoft-com:office:office" xmlns:v="urn:schemas-microsoft-com:vml" xmlns:pvml="urn:schemas-microsoft-com:office:powerpoint" xmlns:com="http://schemas.openxmlformats.org/drawingml/2006/compatibility" xmlns:p14="http://schemas.microsoft.com/office/powerpoint/2010/main" xmlns:p15="http://schemas.microsoft.com/office/powerpoint/2012/main" xmlns:ahyp="http://schemas.microsoft.com/office/drawing/2018/hyperlinkcolor" showMasterPhAnim="0" showMasterSp="0">
+<file path=ppt/notesSlides/notesSlide3.xml><?xml version="1.0" encoding="utf-8"?>
+<p:notes xmlns:a="http://schemas.openxmlformats.org/drawingml/2006/main" xmlns:r="http://schemas.openxmlformats.org/officeDocument/2006/relationships" xmlns:p="http://schemas.openxmlformats.org/presentationml/2006/main" showMasterSp="0" showMasterPhAnim="0">
   <p:cSld>
     <p:spTree>
       <p:nvGrpSpPr>
-        <p:cNvPr id="167" name="Shape 167"/>
+        <p:cNvPr id="1" name="Shape 72"/>
         <p:cNvGrpSpPr/>
         <p:nvPr/>
       </p:nvGrpSpPr>
@@ -1430,10 +1478,12 @@
       </p:grpSpPr>
       <p:sp>
         <p:nvSpPr>
-          <p:cNvPr id="168" name="Google Shape;168;g3fb085bff3c_0_66:notes"/>
-          <p:cNvSpPr/>
+          <p:cNvPr id="73" name="Google Shape;73;g3fb085bff3c_0_11:notes"/>
+          <p:cNvSpPr>
+            <a:spLocks noGrp="1" noRot="1" noChangeAspect="1"/>
+          </p:cNvSpPr>
           <p:nvPr>
-            <p:ph idx="2" type="sldImg"/>
+            <p:ph type="sldImg" idx="2"/>
           </p:nvPr>
         </p:nvSpPr>
         <p:spPr>
@@ -1442,9 +1492,13 @@
             <a:ext cx="6096000" cy="3429000"/>
           </a:xfrm>
           <a:custGeom>
-            <a:rect b="b" l="l" r="r" t="t"/>
+            <a:avLst/>
+            <a:gdLst/>
+            <a:ahLst/>
+            <a:cxnLst/>
+            <a:rect l="l" t="t" r="r" b="b"/>
             <a:pathLst>
-              <a:path extrusionOk="0" h="120000" w="120000">
+              <a:path w="120000" h="120000" extrusionOk="0">
                 <a:moveTo>
                   <a:pt x="0" y="0"/>
                 </a:moveTo>
@@ -1465,10 +1519,12 @@
       </p:sp>
       <p:sp>
         <p:nvSpPr>
-          <p:cNvPr id="169" name="Google Shape;169;g3fb085bff3c_0_66:notes"/>
-          <p:cNvSpPr txBox="1"/>
+          <p:cNvPr id="74" name="Google Shape;74;g3fb085bff3c_0_11:notes"/>
+          <p:cNvSpPr txBox="1">
+            <a:spLocks noGrp="1"/>
+          </p:cNvSpPr>
           <p:nvPr>
-            <p:ph idx="1" type="body"/>
+            <p:ph type="body" idx="1"/>
           </p:nvPr>
         </p:nvSpPr>
         <p:spPr>
@@ -1481,12 +1537,12 @@
           </a:prstGeom>
         </p:spPr>
         <p:txBody>
-          <a:bodyPr anchorCtr="0" anchor="t" bIns="91425" lIns="91425" spcFirstLastPara="1" rIns="91425" wrap="square" tIns="91425">
+          <a:bodyPr spcFirstLastPara="1" wrap="square" lIns="91425" tIns="91425" rIns="91425" bIns="91425" anchor="t" anchorCtr="0">
             <a:noAutofit/>
           </a:bodyPr>
           <a:lstStyle/>
           <a:p>
-            <a:pPr indent="0" lvl="0" marL="0" rtl="0" algn="l">
+            <a:pPr marL="0" lvl="0" indent="0" algn="l" rtl="0">
               <a:spcBef>
                 <a:spcPts val="0"/>
               </a:spcBef>
@@ -1495,9 +1551,6 @@
               </a:spcAft>
               <a:buNone/>
             </a:pPr>
-            <a:r>
-              <a:t/>
-            </a:r>
             <a:endParaRPr/>
           </a:p>
         </p:txBody>
@@ -1510,12 +1563,12 @@
 </p:notes>
 </file>
 
-<file path=ppt/notesSlides/notesSlide2.xml><?xml version="1.0" encoding="utf-8"?>
-<p:notes xmlns:a="http://schemas.openxmlformats.org/drawingml/2006/main" xmlns:r="http://schemas.openxmlformats.org/officeDocument/2006/relationships" xmlns:mc="http://schemas.openxmlformats.org/markup-compatibility/2006" xmlns:mv="urn:schemas-microsoft-com:mac:vml" xmlns:p="http://schemas.openxmlformats.org/presentationml/2006/main" xmlns:c="http://schemas.openxmlformats.org/drawingml/2006/chart" xmlns:dgm="http://schemas.openxmlformats.org/drawingml/2006/diagram" xmlns:o="urn:schemas-microsoft-com:office:office" xmlns:v="urn:schemas-microsoft-com:vml" xmlns:pvml="urn:schemas-microsoft-com:office:powerpoint" xmlns:com="http://schemas.openxmlformats.org/drawingml/2006/compatibility" xmlns:p14="http://schemas.microsoft.com/office/powerpoint/2010/main" xmlns:p15="http://schemas.microsoft.com/office/powerpoint/2012/main" xmlns:ahyp="http://schemas.microsoft.com/office/drawing/2018/hyperlinkcolor" showMasterPhAnim="0" showMasterSp="0">
+<file path=ppt/notesSlides/notesSlide4.xml><?xml version="1.0" encoding="utf-8"?>
+<p:notes xmlns:a="http://schemas.openxmlformats.org/drawingml/2006/main" xmlns:r="http://schemas.openxmlformats.org/officeDocument/2006/relationships" xmlns:p="http://schemas.openxmlformats.org/presentationml/2006/main" showMasterSp="0" showMasterPhAnim="0">
   <p:cSld>
     <p:spTree>
       <p:nvGrpSpPr>
-        <p:cNvPr id="57" name="Shape 57"/>
+        <p:cNvPr id="1" name="Shape 80"/>
         <p:cNvGrpSpPr/>
         <p:nvPr/>
       </p:nvGrpSpPr>
@@ -1529,10 +1582,12 @@
       </p:grpSpPr>
       <p:sp>
         <p:nvSpPr>
-          <p:cNvPr id="58" name="Google Shape;58;g3fb085bff3c_0_134:notes"/>
-          <p:cNvSpPr/>
+          <p:cNvPr id="81" name="Google Shape;81;g3fb085bff3c_0_16:notes"/>
+          <p:cNvSpPr>
+            <a:spLocks noGrp="1" noRot="1" noChangeAspect="1"/>
+          </p:cNvSpPr>
           <p:nvPr>
-            <p:ph idx="2" type="sldImg"/>
+            <p:ph type="sldImg" idx="2"/>
           </p:nvPr>
         </p:nvSpPr>
         <p:spPr>
@@ -1541,9 +1596,13 @@
             <a:ext cx="6096000" cy="3429000"/>
           </a:xfrm>
           <a:custGeom>
-            <a:rect b="b" l="l" r="r" t="t"/>
+            <a:avLst/>
+            <a:gdLst/>
+            <a:ahLst/>
+            <a:cxnLst/>
+            <a:rect l="l" t="t" r="r" b="b"/>
             <a:pathLst>
-              <a:path extrusionOk="0" h="120000" w="120000">
+              <a:path w="120000" h="120000" extrusionOk="0">
                 <a:moveTo>
                   <a:pt x="0" y="0"/>
                 </a:moveTo>
@@ -1564,10 +1623,12 @@
       </p:sp>
       <p:sp>
         <p:nvSpPr>
-          <p:cNvPr id="59" name="Google Shape;59;g3fb085bff3c_0_134:notes"/>
-          <p:cNvSpPr txBox="1"/>
+          <p:cNvPr id="82" name="Google Shape;82;g3fb085bff3c_0_16:notes"/>
+          <p:cNvSpPr txBox="1">
+            <a:spLocks noGrp="1"/>
+          </p:cNvSpPr>
           <p:nvPr>
-            <p:ph idx="1" type="body"/>
+            <p:ph type="body" idx="1"/>
           </p:nvPr>
         </p:nvSpPr>
         <p:spPr>
@@ -1580,12 +1641,12 @@
           </a:prstGeom>
         </p:spPr>
         <p:txBody>
-          <a:bodyPr anchorCtr="0" anchor="t" bIns="91425" lIns="91425" spcFirstLastPara="1" rIns="91425" wrap="square" tIns="91425">
+          <a:bodyPr spcFirstLastPara="1" wrap="square" lIns="91425" tIns="91425" rIns="91425" bIns="91425" anchor="t" anchorCtr="0">
             <a:noAutofit/>
           </a:bodyPr>
           <a:lstStyle/>
           <a:p>
-            <a:pPr indent="0" lvl="0" marL="0" rtl="0" algn="l">
+            <a:pPr marL="0" lvl="0" indent="0" algn="l" rtl="0">
               <a:spcBef>
                 <a:spcPts val="0"/>
               </a:spcBef>
@@ -1594,9 +1655,6 @@
               </a:spcAft>
               <a:buNone/>
             </a:pPr>
-            <a:r>
-              <a:t/>
-            </a:r>
             <a:endParaRPr/>
           </a:p>
         </p:txBody>
@@ -1609,12 +1667,12 @@
 </p:notes>
 </file>
 
-<file path=ppt/notesSlides/notesSlide3.xml><?xml version="1.0" encoding="utf-8"?>
-<p:notes xmlns:a="http://schemas.openxmlformats.org/drawingml/2006/main" xmlns:r="http://schemas.openxmlformats.org/officeDocument/2006/relationships" xmlns:mc="http://schemas.openxmlformats.org/markup-compatibility/2006" xmlns:mv="urn:schemas-microsoft-com:mac:vml" xmlns:p="http://schemas.openxmlformats.org/presentationml/2006/main" xmlns:c="http://schemas.openxmlformats.org/drawingml/2006/chart" xmlns:dgm="http://schemas.openxmlformats.org/drawingml/2006/diagram" xmlns:o="urn:schemas-microsoft-com:office:office" xmlns:v="urn:schemas-microsoft-com:vml" xmlns:pvml="urn:schemas-microsoft-com:office:powerpoint" xmlns:com="http://schemas.openxmlformats.org/drawingml/2006/compatibility" xmlns:p14="http://schemas.microsoft.com/office/powerpoint/2010/main" xmlns:p15="http://schemas.microsoft.com/office/powerpoint/2012/main" xmlns:ahyp="http://schemas.microsoft.com/office/drawing/2018/hyperlinkcolor" showMasterPhAnim="0" showMasterSp="0">
+<file path=ppt/notesSlides/notesSlide5.xml><?xml version="1.0" encoding="utf-8"?>
+<p:notes xmlns:a="http://schemas.openxmlformats.org/drawingml/2006/main" xmlns:r="http://schemas.openxmlformats.org/officeDocument/2006/relationships" xmlns:p="http://schemas.openxmlformats.org/presentationml/2006/main" showMasterSp="0" showMasterPhAnim="0">
   <p:cSld>
     <p:spTree>
       <p:nvGrpSpPr>
-        <p:cNvPr id="65" name="Shape 65"/>
+        <p:cNvPr id="1" name="Shape 88"/>
         <p:cNvGrpSpPr/>
         <p:nvPr/>
       </p:nvGrpSpPr>
@@ -1628,10 +1686,12 @@
       </p:grpSpPr>
       <p:sp>
         <p:nvSpPr>
-          <p:cNvPr id="66" name="Google Shape;66;g3fb085bff3c_0_4:notes"/>
-          <p:cNvSpPr/>
+          <p:cNvPr id="89" name="Google Shape;89;g3fb085bff3c_0_21:notes"/>
+          <p:cNvSpPr>
+            <a:spLocks noGrp="1" noRot="1" noChangeAspect="1"/>
+          </p:cNvSpPr>
           <p:nvPr>
-            <p:ph idx="2" type="sldImg"/>
+            <p:ph type="sldImg" idx="2"/>
           </p:nvPr>
         </p:nvSpPr>
         <p:spPr>
@@ -1640,9 +1700,13 @@
             <a:ext cx="6096000" cy="3429000"/>
           </a:xfrm>
           <a:custGeom>
-            <a:rect b="b" l="l" r="r" t="t"/>
+            <a:avLst/>
+            <a:gdLst/>
+            <a:ahLst/>
+            <a:cxnLst/>
+            <a:rect l="l" t="t" r="r" b="b"/>
             <a:pathLst>
-              <a:path extrusionOk="0" h="120000" w="120000">
+              <a:path w="120000" h="120000" extrusionOk="0">
                 <a:moveTo>
                   <a:pt x="0" y="0"/>
                 </a:moveTo>
@@ -1663,10 +1727,12 @@
       </p:sp>
       <p:sp>
         <p:nvSpPr>
-          <p:cNvPr id="67" name="Google Shape;67;g3fb085bff3c_0_4:notes"/>
-          <p:cNvSpPr txBox="1"/>
+          <p:cNvPr id="90" name="Google Shape;90;g3fb085bff3c_0_21:notes"/>
+          <p:cNvSpPr txBox="1">
+            <a:spLocks noGrp="1"/>
+          </p:cNvSpPr>
           <p:nvPr>
-            <p:ph idx="1" type="body"/>
+            <p:ph type="body" idx="1"/>
           </p:nvPr>
         </p:nvSpPr>
         <p:spPr>
@@ -1679,12 +1745,12 @@
           </a:prstGeom>
         </p:spPr>
         <p:txBody>
-          <a:bodyPr anchorCtr="0" anchor="t" bIns="91425" lIns="91425" spcFirstLastPara="1" rIns="91425" wrap="square" tIns="91425">
+          <a:bodyPr spcFirstLastPara="1" wrap="square" lIns="91425" tIns="91425" rIns="91425" bIns="91425" anchor="t" anchorCtr="0">
             <a:noAutofit/>
           </a:bodyPr>
           <a:lstStyle/>
           <a:p>
-            <a:pPr indent="0" lvl="0" marL="0" rtl="0" algn="l">
+            <a:pPr marL="0" lvl="0" indent="0" algn="l" rtl="0">
               <a:spcBef>
                 <a:spcPts val="0"/>
               </a:spcBef>
@@ -1693,9 +1759,6 @@
               </a:spcAft>
               <a:buNone/>
             </a:pPr>
-            <a:r>
-              <a:t/>
-            </a:r>
             <a:endParaRPr/>
           </a:p>
         </p:txBody>
@@ -1708,12 +1771,12 @@
 </p:notes>
 </file>
 
-<file path=ppt/notesSlides/notesSlide4.xml><?xml version="1.0" encoding="utf-8"?>
-<p:notes xmlns:a="http://schemas.openxmlformats.org/drawingml/2006/main" xmlns:r="http://schemas.openxmlformats.org/officeDocument/2006/relationships" xmlns:mc="http://schemas.openxmlformats.org/markup-compatibility/2006" xmlns:mv="urn:schemas-microsoft-com:mac:vml" xmlns:p="http://schemas.openxmlformats.org/presentationml/2006/main" xmlns:c="http://schemas.openxmlformats.org/drawingml/2006/chart" xmlns:dgm="http://schemas.openxmlformats.org/drawingml/2006/diagram" xmlns:o="urn:schemas-microsoft-com:office:office" xmlns:v="urn:schemas-microsoft-com:vml" xmlns:pvml="urn:schemas-microsoft-com:office:powerpoint" xmlns:com="http://schemas.openxmlformats.org/drawingml/2006/compatibility" xmlns:p14="http://schemas.microsoft.com/office/powerpoint/2010/main" xmlns:p15="http://schemas.microsoft.com/office/powerpoint/2012/main" xmlns:ahyp="http://schemas.microsoft.com/office/drawing/2018/hyperlinkcolor" showMasterPhAnim="0" showMasterSp="0">
+<file path=ppt/notesSlides/notesSlide6.xml><?xml version="1.0" encoding="utf-8"?>
+<p:notes xmlns:a="http://schemas.openxmlformats.org/drawingml/2006/main" xmlns:r="http://schemas.openxmlformats.org/officeDocument/2006/relationships" xmlns:p="http://schemas.openxmlformats.org/presentationml/2006/main" showMasterSp="0" showMasterPhAnim="0">
   <p:cSld>
     <p:spTree>
       <p:nvGrpSpPr>
-        <p:cNvPr id="72" name="Shape 72"/>
+        <p:cNvPr id="1" name="Shape 96"/>
         <p:cNvGrpSpPr/>
         <p:nvPr/>
       </p:nvGrpSpPr>
@@ -1727,10 +1790,12 @@
       </p:grpSpPr>
       <p:sp>
         <p:nvSpPr>
-          <p:cNvPr id="73" name="Google Shape;73;g3fb085bff3c_0_11:notes"/>
-          <p:cNvSpPr/>
+          <p:cNvPr id="97" name="Google Shape;97;g3fb085bff3c_0_26:notes"/>
+          <p:cNvSpPr>
+            <a:spLocks noGrp="1" noRot="1" noChangeAspect="1"/>
+          </p:cNvSpPr>
           <p:nvPr>
-            <p:ph idx="2" type="sldImg"/>
+            <p:ph type="sldImg" idx="2"/>
           </p:nvPr>
         </p:nvSpPr>
         <p:spPr>
@@ -1739,9 +1804,13 @@
             <a:ext cx="6096000" cy="3429000"/>
           </a:xfrm>
           <a:custGeom>
-            <a:rect b="b" l="l" r="r" t="t"/>
+            <a:avLst/>
+            <a:gdLst/>
+            <a:ahLst/>
+            <a:cxnLst/>
+            <a:rect l="l" t="t" r="r" b="b"/>
             <a:pathLst>
-              <a:path extrusionOk="0" h="120000" w="120000">
+              <a:path w="120000" h="120000" extrusionOk="0">
                 <a:moveTo>
                   <a:pt x="0" y="0"/>
                 </a:moveTo>
@@ -1762,10 +1831,12 @@
       </p:sp>
       <p:sp>
         <p:nvSpPr>
-          <p:cNvPr id="74" name="Google Shape;74;g3fb085bff3c_0_11:notes"/>
-          <p:cNvSpPr txBox="1"/>
+          <p:cNvPr id="98" name="Google Shape;98;g3fb085bff3c_0_26:notes"/>
+          <p:cNvSpPr txBox="1">
+            <a:spLocks noGrp="1"/>
+          </p:cNvSpPr>
           <p:nvPr>
-            <p:ph idx="1" type="body"/>
+            <p:ph type="body" idx="1"/>
           </p:nvPr>
         </p:nvSpPr>
         <p:spPr>
@@ -1778,12 +1849,12 @@
           </a:prstGeom>
         </p:spPr>
         <p:txBody>
-          <a:bodyPr anchorCtr="0" anchor="t" bIns="91425" lIns="91425" spcFirstLastPara="1" rIns="91425" wrap="square" tIns="91425">
+          <a:bodyPr spcFirstLastPara="1" wrap="square" lIns="91425" tIns="91425" rIns="91425" bIns="91425" anchor="t" anchorCtr="0">
             <a:noAutofit/>
           </a:bodyPr>
           <a:lstStyle/>
           <a:p>
-            <a:pPr indent="0" lvl="0" marL="0" rtl="0" algn="l">
+            <a:pPr marL="0" lvl="0" indent="0" algn="l" rtl="0">
               <a:spcBef>
                 <a:spcPts val="0"/>
               </a:spcBef>
@@ -1792,9 +1863,6 @@
               </a:spcAft>
               <a:buNone/>
             </a:pPr>
-            <a:r>
-              <a:t/>
-            </a:r>
             <a:endParaRPr/>
           </a:p>
         </p:txBody>
@@ -1807,12 +1875,12 @@
 </p:notes>
 </file>
 
-<file path=ppt/notesSlides/notesSlide5.xml><?xml version="1.0" encoding="utf-8"?>
-<p:notes xmlns:a="http://schemas.openxmlformats.org/drawingml/2006/main" xmlns:r="http://schemas.openxmlformats.org/officeDocument/2006/relationships" xmlns:mc="http://schemas.openxmlformats.org/markup-compatibility/2006" xmlns:mv="urn:schemas-microsoft-com:mac:vml" xmlns:p="http://schemas.openxmlformats.org/presentationml/2006/main" xmlns:c="http://schemas.openxmlformats.org/drawingml/2006/chart" xmlns:dgm="http://schemas.openxmlformats.org/drawingml/2006/diagram" xmlns:o="urn:schemas-microsoft-com:office:office" xmlns:v="urn:schemas-microsoft-com:vml" xmlns:pvml="urn:schemas-microsoft-com:office:powerpoint" xmlns:com="http://schemas.openxmlformats.org/drawingml/2006/compatibility" xmlns:p14="http://schemas.microsoft.com/office/powerpoint/2010/main" xmlns:p15="http://schemas.microsoft.com/office/powerpoint/2012/main" xmlns:ahyp="http://schemas.microsoft.com/office/drawing/2018/hyperlinkcolor" showMasterPhAnim="0" showMasterSp="0">
+<file path=ppt/notesSlides/notesSlide7.xml><?xml version="1.0" encoding="utf-8"?>
+<p:notes xmlns:a="http://schemas.openxmlformats.org/drawingml/2006/main" xmlns:r="http://schemas.openxmlformats.org/officeDocument/2006/relationships" xmlns:p="http://schemas.openxmlformats.org/presentationml/2006/main" showMasterSp="0" showMasterPhAnim="0">
   <p:cSld>
     <p:spTree>
       <p:nvGrpSpPr>
-        <p:cNvPr id="80" name="Shape 80"/>
+        <p:cNvPr id="1" name="Shape 104"/>
         <p:cNvGrpSpPr/>
         <p:nvPr/>
       </p:nvGrpSpPr>
@@ -1826,10 +1894,12 @@
       </p:grpSpPr>
       <p:sp>
         <p:nvSpPr>
-          <p:cNvPr id="81" name="Google Shape;81;g3fb085bff3c_0_16:notes"/>
-          <p:cNvSpPr/>
+          <p:cNvPr id="105" name="Google Shape;105;g3fb085bff3c_0_31:notes"/>
+          <p:cNvSpPr>
+            <a:spLocks noGrp="1" noRot="1" noChangeAspect="1"/>
+          </p:cNvSpPr>
           <p:nvPr>
-            <p:ph idx="2" type="sldImg"/>
+            <p:ph type="sldImg" idx="2"/>
           </p:nvPr>
         </p:nvSpPr>
         <p:spPr>
@@ -1838,9 +1908,13 @@
             <a:ext cx="6096000" cy="3429000"/>
           </a:xfrm>
           <a:custGeom>
-            <a:rect b="b" l="l" r="r" t="t"/>
+            <a:avLst/>
+            <a:gdLst/>
+            <a:ahLst/>
+            <a:cxnLst/>
+            <a:rect l="l" t="t" r="r" b="b"/>
             <a:pathLst>
-              <a:path extrusionOk="0" h="120000" w="120000">
+              <a:path w="120000" h="120000" extrusionOk="0">
                 <a:moveTo>
                   <a:pt x="0" y="0"/>
                 </a:moveTo>
@@ -1861,10 +1935,12 @@
       </p:sp>
       <p:sp>
         <p:nvSpPr>
-          <p:cNvPr id="82" name="Google Shape;82;g3fb085bff3c_0_16:notes"/>
-          <p:cNvSpPr txBox="1"/>
+          <p:cNvPr id="106" name="Google Shape;106;g3fb085bff3c_0_31:notes"/>
+          <p:cNvSpPr txBox="1">
+            <a:spLocks noGrp="1"/>
+          </p:cNvSpPr>
           <p:nvPr>
-            <p:ph idx="1" type="body"/>
+            <p:ph type="body" idx="1"/>
           </p:nvPr>
         </p:nvSpPr>
         <p:spPr>
@@ -1877,12 +1953,12 @@
           </a:prstGeom>
         </p:spPr>
         <p:txBody>
-          <a:bodyPr anchorCtr="0" anchor="t" bIns="91425" lIns="91425" spcFirstLastPara="1" rIns="91425" wrap="square" tIns="91425">
+          <a:bodyPr spcFirstLastPara="1" wrap="square" lIns="91425" tIns="91425" rIns="91425" bIns="91425" anchor="t" anchorCtr="0">
             <a:noAutofit/>
           </a:bodyPr>
           <a:lstStyle/>
           <a:p>
-            <a:pPr indent="0" lvl="0" marL="0" rtl="0" algn="l">
+            <a:pPr marL="0" lvl="0" indent="0" algn="l" rtl="0">
               <a:spcBef>
                 <a:spcPts val="0"/>
               </a:spcBef>
@@ -1891,9 +1967,6 @@
               </a:spcAft>
               <a:buNone/>
             </a:pPr>
-            <a:r>
-              <a:t/>
-            </a:r>
             <a:endParaRPr/>
           </a:p>
         </p:txBody>
@@ -1906,12 +1979,12 @@
 </p:notes>
 </file>
 
-<file path=ppt/notesSlides/notesSlide6.xml><?xml version="1.0" encoding="utf-8"?>
-<p:notes xmlns:a="http://schemas.openxmlformats.org/drawingml/2006/main" xmlns:r="http://schemas.openxmlformats.org/officeDocument/2006/relationships" xmlns:mc="http://schemas.openxmlformats.org/markup-compatibility/2006" xmlns:mv="urn:schemas-microsoft-com:mac:vml" xmlns:p="http://schemas.openxmlformats.org/presentationml/2006/main" xmlns:c="http://schemas.openxmlformats.org/drawingml/2006/chart" xmlns:dgm="http://schemas.openxmlformats.org/drawingml/2006/diagram" xmlns:o="urn:schemas-microsoft-com:office:office" xmlns:v="urn:schemas-microsoft-com:vml" xmlns:pvml="urn:schemas-microsoft-com:office:powerpoint" xmlns:com="http://schemas.openxmlformats.org/drawingml/2006/compatibility" xmlns:p14="http://schemas.microsoft.com/office/powerpoint/2010/main" xmlns:p15="http://schemas.microsoft.com/office/powerpoint/2012/main" xmlns:ahyp="http://schemas.microsoft.com/office/drawing/2018/hyperlinkcolor" showMasterPhAnim="0" showMasterSp="0">
+<file path=ppt/notesSlides/notesSlide8.xml><?xml version="1.0" encoding="utf-8"?>
+<p:notes xmlns:a="http://schemas.openxmlformats.org/drawingml/2006/main" xmlns:r="http://schemas.openxmlformats.org/officeDocument/2006/relationships" xmlns:p="http://schemas.openxmlformats.org/presentationml/2006/main" showMasterSp="0" showMasterPhAnim="0">
   <p:cSld>
     <p:spTree>
       <p:nvGrpSpPr>
-        <p:cNvPr id="88" name="Shape 88"/>
+        <p:cNvPr id="1" name="Shape 112"/>
         <p:cNvGrpSpPr/>
         <p:nvPr/>
       </p:nvGrpSpPr>
@@ -1925,10 +1998,12 @@
       </p:grpSpPr>
       <p:sp>
         <p:nvSpPr>
-          <p:cNvPr id="89" name="Google Shape;89;g3fb085bff3c_0_21:notes"/>
-          <p:cNvSpPr/>
+          <p:cNvPr id="113" name="Google Shape;113;g3fb085bff3c_0_36:notes"/>
+          <p:cNvSpPr>
+            <a:spLocks noGrp="1" noRot="1" noChangeAspect="1"/>
+          </p:cNvSpPr>
           <p:nvPr>
-            <p:ph idx="2" type="sldImg"/>
+            <p:ph type="sldImg" idx="2"/>
           </p:nvPr>
         </p:nvSpPr>
         <p:spPr>
@@ -1937,9 +2012,13 @@
             <a:ext cx="6096000" cy="3429000"/>
           </a:xfrm>
           <a:custGeom>
-            <a:rect b="b" l="l" r="r" t="t"/>
+            <a:avLst/>
+            <a:gdLst/>
+            <a:ahLst/>
+            <a:cxnLst/>
+            <a:rect l="l" t="t" r="r" b="b"/>
             <a:pathLst>
-              <a:path extrusionOk="0" h="120000" w="120000">
+              <a:path w="120000" h="120000" extrusionOk="0">
                 <a:moveTo>
                   <a:pt x="0" y="0"/>
                 </a:moveTo>
@@ -1960,10 +2039,12 @@
       </p:sp>
       <p:sp>
         <p:nvSpPr>
-          <p:cNvPr id="90" name="Google Shape;90;g3fb085bff3c_0_21:notes"/>
-          <p:cNvSpPr txBox="1"/>
+          <p:cNvPr id="114" name="Google Shape;114;g3fb085bff3c_0_36:notes"/>
+          <p:cNvSpPr txBox="1">
+            <a:spLocks noGrp="1"/>
+          </p:cNvSpPr>
           <p:nvPr>
-            <p:ph idx="1" type="body"/>
+            <p:ph type="body" idx="1"/>
           </p:nvPr>
         </p:nvSpPr>
         <p:spPr>
@@ -1976,12 +2057,12 @@
           </a:prstGeom>
         </p:spPr>
         <p:txBody>
-          <a:bodyPr anchorCtr="0" anchor="t" bIns="91425" lIns="91425" spcFirstLastPara="1" rIns="91425" wrap="square" tIns="91425">
+          <a:bodyPr spcFirstLastPara="1" wrap="square" lIns="91425" tIns="91425" rIns="91425" bIns="91425" anchor="t" anchorCtr="0">
             <a:noAutofit/>
           </a:bodyPr>
           <a:lstStyle/>
           <a:p>
-            <a:pPr indent="0" lvl="0" marL="0" rtl="0" algn="l">
+            <a:pPr marL="0" lvl="0" indent="0" algn="l" rtl="0">
               <a:spcBef>
                 <a:spcPts val="0"/>
               </a:spcBef>
@@ -1990,9 +2071,6 @@
               </a:spcAft>
               <a:buNone/>
             </a:pPr>
-            <a:r>
-              <a:t/>
-            </a:r>
             <a:endParaRPr/>
           </a:p>
         </p:txBody>
@@ -2005,12 +2083,12 @@
 </p:notes>
 </file>
 
-<file path=ppt/notesSlides/notesSlide7.xml><?xml version="1.0" encoding="utf-8"?>
-<p:notes xmlns:a="http://schemas.openxmlformats.org/drawingml/2006/main" xmlns:r="http://schemas.openxmlformats.org/officeDocument/2006/relationships" xmlns:mc="http://schemas.openxmlformats.org/markup-compatibility/2006" xmlns:mv="urn:schemas-microsoft-com:mac:vml" xmlns:p="http://schemas.openxmlformats.org/presentationml/2006/main" xmlns:c="http://schemas.openxmlformats.org/drawingml/2006/chart" xmlns:dgm="http://schemas.openxmlformats.org/drawingml/2006/diagram" xmlns:o="urn:schemas-microsoft-com:office:office" xmlns:v="urn:schemas-microsoft-com:vml" xmlns:pvml="urn:schemas-microsoft-com:office:powerpoint" xmlns:com="http://schemas.openxmlformats.org/drawingml/2006/compatibility" xmlns:p14="http://schemas.microsoft.com/office/powerpoint/2010/main" xmlns:p15="http://schemas.microsoft.com/office/powerpoint/2012/main" xmlns:ahyp="http://schemas.microsoft.com/office/drawing/2018/hyperlinkcolor" showMasterPhAnim="0" showMasterSp="0">
+<file path=ppt/notesSlides/notesSlide9.xml><?xml version="1.0" encoding="utf-8"?>
+<p:notes xmlns:a="http://schemas.openxmlformats.org/drawingml/2006/main" xmlns:r="http://schemas.openxmlformats.org/officeDocument/2006/relationships" xmlns:p="http://schemas.openxmlformats.org/presentationml/2006/main" showMasterSp="0" showMasterPhAnim="0">
   <p:cSld>
     <p:spTree>
       <p:nvGrpSpPr>
-        <p:cNvPr id="96" name="Shape 96"/>
+        <p:cNvPr id="1" name="Shape 120"/>
         <p:cNvGrpSpPr/>
         <p:nvPr/>
       </p:nvGrpSpPr>
@@ -2024,10 +2102,12 @@
       </p:grpSpPr>
       <p:sp>
         <p:nvSpPr>
-          <p:cNvPr id="97" name="Google Shape;97;g3fb085bff3c_0_26:notes"/>
-          <p:cNvSpPr/>
+          <p:cNvPr id="121" name="Google Shape;121;g3fb085bff3c_0_41:notes"/>
+          <p:cNvSpPr>
+            <a:spLocks noGrp="1" noRot="1" noChangeAspect="1"/>
+          </p:cNvSpPr>
           <p:nvPr>
-            <p:ph idx="2" type="sldImg"/>
+            <p:ph type="sldImg" idx="2"/>
           </p:nvPr>
         </p:nvSpPr>
         <p:spPr>
@@ -2036,9 +2116,13 @@
             <a:ext cx="6096000" cy="3429000"/>
           </a:xfrm>
           <a:custGeom>
-            <a:rect b="b" l="l" r="r" t="t"/>
+            <a:avLst/>
+            <a:gdLst/>
+            <a:ahLst/>
+            <a:cxnLst/>
+            <a:rect l="l" t="t" r="r" b="b"/>
             <a:pathLst>
-              <a:path extrusionOk="0" h="120000" w="120000">
+              <a:path w="120000" h="120000" extrusionOk="0">
                 <a:moveTo>
                   <a:pt x="0" y="0"/>
                 </a:moveTo>
@@ -2059,10 +2143,12 @@
       </p:sp>
       <p:sp>
         <p:nvSpPr>
-          <p:cNvPr id="98" name="Google Shape;98;g3fb085bff3c_0_26:notes"/>
-          <p:cNvSpPr txBox="1"/>
+          <p:cNvPr id="122" name="Google Shape;122;g3fb085bff3c_0_41:notes"/>
+          <p:cNvSpPr txBox="1">
+            <a:spLocks noGrp="1"/>
+          </p:cNvSpPr>
           <p:nvPr>
-            <p:ph idx="1" type="body"/>
+            <p:ph type="body" idx="1"/>
           </p:nvPr>
         </p:nvSpPr>
         <p:spPr>
@@ -2075,12 +2161,12 @@
           </a:prstGeom>
         </p:spPr>
         <p:txBody>
-          <a:bodyPr anchorCtr="0" anchor="t" bIns="91425" lIns="91425" spcFirstLastPara="1" rIns="91425" wrap="square" tIns="91425">
+          <a:bodyPr spcFirstLastPara="1" wrap="square" lIns="91425" tIns="91425" rIns="91425" bIns="91425" anchor="t" anchorCtr="0">
             <a:noAutofit/>
           </a:bodyPr>
           <a:lstStyle/>
           <a:p>
-            <a:pPr indent="0" lvl="0" marL="0" rtl="0" algn="l">
+            <a:pPr marL="0" lvl="0" indent="0" algn="l" rtl="0">
               <a:spcBef>
                 <a:spcPts val="0"/>
               </a:spcBef>
@@ -2089,207 +2175,6 @@
               </a:spcAft>
               <a:buNone/>
             </a:pPr>
-            <a:r>
-              <a:t/>
-            </a:r>
-            <a:endParaRPr/>
-          </a:p>
-        </p:txBody>
-      </p:sp>
-    </p:spTree>
-  </p:cSld>
-  <p:clrMapOvr>
-    <a:masterClrMapping/>
-  </p:clrMapOvr>
-</p:notes>
-</file>
-
-<file path=ppt/notesSlides/notesSlide8.xml><?xml version="1.0" encoding="utf-8"?>
-<p:notes xmlns:a="http://schemas.openxmlformats.org/drawingml/2006/main" xmlns:r="http://schemas.openxmlformats.org/officeDocument/2006/relationships" xmlns:mc="http://schemas.openxmlformats.org/markup-compatibility/2006" xmlns:mv="urn:schemas-microsoft-com:mac:vml" xmlns:p="http://schemas.openxmlformats.org/presentationml/2006/main" xmlns:c="http://schemas.openxmlformats.org/drawingml/2006/chart" xmlns:dgm="http://schemas.openxmlformats.org/drawingml/2006/diagram" xmlns:o="urn:schemas-microsoft-com:office:office" xmlns:v="urn:schemas-microsoft-com:vml" xmlns:pvml="urn:schemas-microsoft-com:office:powerpoint" xmlns:com="http://schemas.openxmlformats.org/drawingml/2006/compatibility" xmlns:p14="http://schemas.microsoft.com/office/powerpoint/2010/main" xmlns:p15="http://schemas.microsoft.com/office/powerpoint/2012/main" xmlns:ahyp="http://schemas.microsoft.com/office/drawing/2018/hyperlinkcolor" showMasterPhAnim="0" showMasterSp="0">
-  <p:cSld>
-    <p:spTree>
-      <p:nvGrpSpPr>
-        <p:cNvPr id="104" name="Shape 104"/>
-        <p:cNvGrpSpPr/>
-        <p:nvPr/>
-      </p:nvGrpSpPr>
-      <p:grpSpPr>
-        <a:xfrm>
-          <a:off x="0" y="0"/>
-          <a:ext cx="0" cy="0"/>
-          <a:chOff x="0" y="0"/>
-          <a:chExt cx="0" cy="0"/>
-        </a:xfrm>
-      </p:grpSpPr>
-      <p:sp>
-        <p:nvSpPr>
-          <p:cNvPr id="105" name="Google Shape;105;g3fb085bff3c_0_31:notes"/>
-          <p:cNvSpPr/>
-          <p:nvPr>
-            <p:ph idx="2" type="sldImg"/>
-          </p:nvPr>
-        </p:nvSpPr>
-        <p:spPr>
-          <a:xfrm>
-            <a:off x="381300" y="685800"/>
-            <a:ext cx="6096000" cy="3429000"/>
-          </a:xfrm>
-          <a:custGeom>
-            <a:rect b="b" l="l" r="r" t="t"/>
-            <a:pathLst>
-              <a:path extrusionOk="0" h="120000" w="120000">
-                <a:moveTo>
-                  <a:pt x="0" y="0"/>
-                </a:moveTo>
-                <a:lnTo>
-                  <a:pt x="120000" y="0"/>
-                </a:lnTo>
-                <a:lnTo>
-                  <a:pt x="120000" y="120000"/>
-                </a:lnTo>
-                <a:lnTo>
-                  <a:pt x="0" y="120000"/>
-                </a:lnTo>
-                <a:close/>
-              </a:path>
-            </a:pathLst>
-          </a:custGeom>
-        </p:spPr>
-      </p:sp>
-      <p:sp>
-        <p:nvSpPr>
-          <p:cNvPr id="106" name="Google Shape;106;g3fb085bff3c_0_31:notes"/>
-          <p:cNvSpPr txBox="1"/>
-          <p:nvPr>
-            <p:ph idx="1" type="body"/>
-          </p:nvPr>
-        </p:nvSpPr>
-        <p:spPr>
-          <a:xfrm>
-            <a:off x="685800" y="4343400"/>
-            <a:ext cx="5486400" cy="4114800"/>
-          </a:xfrm>
-          <a:prstGeom prst="rect">
-            <a:avLst/>
-          </a:prstGeom>
-        </p:spPr>
-        <p:txBody>
-          <a:bodyPr anchorCtr="0" anchor="t" bIns="91425" lIns="91425" spcFirstLastPara="1" rIns="91425" wrap="square" tIns="91425">
-            <a:noAutofit/>
-          </a:bodyPr>
-          <a:lstStyle/>
-          <a:p>
-            <a:pPr indent="0" lvl="0" marL="0" rtl="0" algn="l">
-              <a:spcBef>
-                <a:spcPts val="0"/>
-              </a:spcBef>
-              <a:spcAft>
-                <a:spcPts val="0"/>
-              </a:spcAft>
-              <a:buNone/>
-            </a:pPr>
-            <a:r>
-              <a:t/>
-            </a:r>
-            <a:endParaRPr/>
-          </a:p>
-        </p:txBody>
-      </p:sp>
-    </p:spTree>
-  </p:cSld>
-  <p:clrMapOvr>
-    <a:masterClrMapping/>
-  </p:clrMapOvr>
-</p:notes>
-</file>
-
-<file path=ppt/notesSlides/notesSlide9.xml><?xml version="1.0" encoding="utf-8"?>
-<p:notes xmlns:a="http://schemas.openxmlformats.org/drawingml/2006/main" xmlns:r="http://schemas.openxmlformats.org/officeDocument/2006/relationships" xmlns:mc="http://schemas.openxmlformats.org/markup-compatibility/2006" xmlns:mv="urn:schemas-microsoft-com:mac:vml" xmlns:p="http://schemas.openxmlformats.org/presentationml/2006/main" xmlns:c="http://schemas.openxmlformats.org/drawingml/2006/chart" xmlns:dgm="http://schemas.openxmlformats.org/drawingml/2006/diagram" xmlns:o="urn:schemas-microsoft-com:office:office" xmlns:v="urn:schemas-microsoft-com:vml" xmlns:pvml="urn:schemas-microsoft-com:office:powerpoint" xmlns:com="http://schemas.openxmlformats.org/drawingml/2006/compatibility" xmlns:p14="http://schemas.microsoft.com/office/powerpoint/2010/main" xmlns:p15="http://schemas.microsoft.com/office/powerpoint/2012/main" xmlns:ahyp="http://schemas.microsoft.com/office/drawing/2018/hyperlinkcolor" showMasterPhAnim="0" showMasterSp="0">
-  <p:cSld>
-    <p:spTree>
-      <p:nvGrpSpPr>
-        <p:cNvPr id="112" name="Shape 112"/>
-        <p:cNvGrpSpPr/>
-        <p:nvPr/>
-      </p:nvGrpSpPr>
-      <p:grpSpPr>
-        <a:xfrm>
-          <a:off x="0" y="0"/>
-          <a:ext cx="0" cy="0"/>
-          <a:chOff x="0" y="0"/>
-          <a:chExt cx="0" cy="0"/>
-        </a:xfrm>
-      </p:grpSpPr>
-      <p:sp>
-        <p:nvSpPr>
-          <p:cNvPr id="113" name="Google Shape;113;g3fb085bff3c_0_36:notes"/>
-          <p:cNvSpPr/>
-          <p:nvPr>
-            <p:ph idx="2" type="sldImg"/>
-          </p:nvPr>
-        </p:nvSpPr>
-        <p:spPr>
-          <a:xfrm>
-            <a:off x="381300" y="685800"/>
-            <a:ext cx="6096000" cy="3429000"/>
-          </a:xfrm>
-          <a:custGeom>
-            <a:rect b="b" l="l" r="r" t="t"/>
-            <a:pathLst>
-              <a:path extrusionOk="0" h="120000" w="120000">
-                <a:moveTo>
-                  <a:pt x="0" y="0"/>
-                </a:moveTo>
-                <a:lnTo>
-                  <a:pt x="120000" y="0"/>
-                </a:lnTo>
-                <a:lnTo>
-                  <a:pt x="120000" y="120000"/>
-                </a:lnTo>
-                <a:lnTo>
-                  <a:pt x="0" y="120000"/>
-                </a:lnTo>
-                <a:close/>
-              </a:path>
-            </a:pathLst>
-          </a:custGeom>
-        </p:spPr>
-      </p:sp>
-      <p:sp>
-        <p:nvSpPr>
-          <p:cNvPr id="114" name="Google Shape;114;g3fb085bff3c_0_36:notes"/>
-          <p:cNvSpPr txBox="1"/>
-          <p:nvPr>
-            <p:ph idx="1" type="body"/>
-          </p:nvPr>
-        </p:nvSpPr>
-        <p:spPr>
-          <a:xfrm>
-            <a:off x="685800" y="4343400"/>
-            <a:ext cx="5486400" cy="4114800"/>
-          </a:xfrm>
-          <a:prstGeom prst="rect">
-            <a:avLst/>
-          </a:prstGeom>
-        </p:spPr>
-        <p:txBody>
-          <a:bodyPr anchorCtr="0" anchor="t" bIns="91425" lIns="91425" spcFirstLastPara="1" rIns="91425" wrap="square" tIns="91425">
-            <a:noAutofit/>
-          </a:bodyPr>
-          <a:lstStyle/>
-          <a:p>
-            <a:pPr indent="0" lvl="0" marL="0" rtl="0" algn="l">
-              <a:spcBef>
-                <a:spcPts val="0"/>
-              </a:spcBef>
-              <a:spcAft>
-                <a:spcPts val="0"/>
-              </a:spcAft>
-              <a:buNone/>
-            </a:pPr>
-            <a:r>
-              <a:t/>
-            </a:r>
             <a:endParaRPr/>
           </a:p>
         </p:txBody>
@@ -2303,11 +2188,11 @@
 </file>
 
 <file path=ppt/slideLayouts/slideLayout1.xml><?xml version="1.0" encoding="utf-8"?>
-<p:sldLayout xmlns:a="http://schemas.openxmlformats.org/drawingml/2006/main" xmlns:r="http://schemas.openxmlformats.org/officeDocument/2006/relationships" xmlns:mc="http://schemas.openxmlformats.org/markup-compatibility/2006" xmlns:mv="urn:schemas-microsoft-com:mac:vml" xmlns:p="http://schemas.openxmlformats.org/presentationml/2006/main" xmlns:c="http://schemas.openxmlformats.org/drawingml/2006/chart" xmlns:dgm="http://schemas.openxmlformats.org/drawingml/2006/diagram" xmlns:o="urn:schemas-microsoft-com:office:office" xmlns:v="urn:schemas-microsoft-com:vml" xmlns:pvml="urn:schemas-microsoft-com:office:powerpoint" xmlns:com="http://schemas.openxmlformats.org/drawingml/2006/compatibility" xmlns:p14="http://schemas.microsoft.com/office/powerpoint/2010/main" xmlns:p15="http://schemas.microsoft.com/office/powerpoint/2012/main" xmlns:ahyp="http://schemas.microsoft.com/office/drawing/2018/hyperlinkcolor" matchingName="Title slide" type="title">
+<p:sldLayout xmlns:a="http://schemas.openxmlformats.org/drawingml/2006/main" xmlns:r="http://schemas.openxmlformats.org/officeDocument/2006/relationships" xmlns:p="http://schemas.openxmlformats.org/presentationml/2006/main" matchingName="Title slide" type="title">
   <p:cSld name="TITLE">
     <p:spTree>
       <p:nvGrpSpPr>
-        <p:cNvPr id="9" name="Shape 9"/>
+        <p:cNvPr id="1" name="Shape 9"/>
         <p:cNvGrpSpPr/>
         <p:nvPr/>
       </p:nvGrpSpPr>
@@ -2322,7 +2207,9 @@
       <p:sp>
         <p:nvSpPr>
           <p:cNvPr id="10" name="Google Shape;10;p2"/>
-          <p:cNvSpPr txBox="1"/>
+          <p:cNvSpPr txBox="1">
+            <a:spLocks noGrp="1"/>
+          </p:cNvSpPr>
           <p:nvPr>
             <p:ph type="ctrTitle"/>
           </p:nvPr>
@@ -2337,7 +2224,7 @@
           </a:prstGeom>
         </p:spPr>
         <p:txBody>
-          <a:bodyPr anchorCtr="0" anchor="b" bIns="91425" lIns="91425" spcFirstLastPara="1" rIns="91425" wrap="square" tIns="91425">
+          <a:bodyPr spcFirstLastPara="1" wrap="square" lIns="91425" tIns="91425" rIns="91425" bIns="91425" anchor="b" anchorCtr="0">
             <a:normAutofit/>
           </a:bodyPr>
           <a:lstStyle>
@@ -2441,15 +2328,19 @@
               <a:defRPr sz="5200"/>
             </a:lvl9pPr>
           </a:lstStyle>
-          <a:p/>
+          <a:p>
+            <a:endParaRPr/>
+          </a:p>
         </p:txBody>
       </p:sp>
       <p:sp>
         <p:nvSpPr>
           <p:cNvPr id="11" name="Google Shape;11;p2"/>
-          <p:cNvSpPr txBox="1"/>
+          <p:cNvSpPr txBox="1">
+            <a:spLocks noGrp="1"/>
+          </p:cNvSpPr>
           <p:nvPr>
-            <p:ph idx="1" type="subTitle"/>
+            <p:ph type="subTitle" idx="1"/>
           </p:nvPr>
         </p:nvSpPr>
         <p:spPr>
@@ -2462,7 +2353,7 @@
           </a:prstGeom>
         </p:spPr>
         <p:txBody>
-          <a:bodyPr anchorCtr="0" anchor="t" bIns="91425" lIns="91425" spcFirstLastPara="1" rIns="91425" wrap="square" tIns="91425">
+          <a:bodyPr spcFirstLastPara="1" wrap="square" lIns="91425" tIns="91425" rIns="91425" bIns="91425" anchor="t" anchorCtr="0">
             <a:normAutofit/>
           </a:bodyPr>
           <a:lstStyle>
@@ -2593,15 +2484,19 @@
               <a:defRPr sz="2800"/>
             </a:lvl9pPr>
           </a:lstStyle>
-          <a:p/>
+          <a:p>
+            <a:endParaRPr/>
+          </a:p>
         </p:txBody>
       </p:sp>
       <p:sp>
         <p:nvSpPr>
           <p:cNvPr id="12" name="Google Shape;12;p2"/>
-          <p:cNvSpPr txBox="1"/>
+          <p:cNvSpPr txBox="1">
+            <a:spLocks noGrp="1"/>
+          </p:cNvSpPr>
           <p:nvPr>
-            <p:ph idx="12" type="sldNum"/>
+            <p:ph type="sldNum" idx="12"/>
           </p:nvPr>
         </p:nvSpPr>
         <p:spPr>
@@ -2614,7 +2509,7 @@
           </a:prstGeom>
         </p:spPr>
         <p:txBody>
-          <a:bodyPr anchorCtr="0" anchor="ctr" bIns="91425" lIns="91425" spcFirstLastPara="1" rIns="91425" wrap="square" tIns="91425">
+          <a:bodyPr spcFirstLastPara="1" wrap="square" lIns="91425" tIns="91425" rIns="91425" bIns="91425" anchor="ctr" anchorCtr="0">
             <a:normAutofit/>
           </a:bodyPr>
           <a:lstStyle>
@@ -2656,7 +2551,7 @@
             </a:lvl9pPr>
           </a:lstStyle>
           <a:p>
-            <a:pPr indent="0" lvl="0" marL="0" rtl="0" algn="r">
+            <a:pPr marL="0" lvl="0" indent="0" algn="r" rtl="0">
               <a:spcBef>
                 <a:spcPts val="0"/>
               </a:spcBef>
@@ -2682,11 +2577,11 @@
 </file>
 
 <file path=ppt/slideLayouts/slideLayout10.xml><?xml version="1.0" encoding="utf-8"?>
-<p:sldLayout xmlns:a="http://schemas.openxmlformats.org/drawingml/2006/main" xmlns:r="http://schemas.openxmlformats.org/officeDocument/2006/relationships" xmlns:mc="http://schemas.openxmlformats.org/markup-compatibility/2006" xmlns:mv="urn:schemas-microsoft-com:mac:vml" xmlns:p="http://schemas.openxmlformats.org/presentationml/2006/main" xmlns:c="http://schemas.openxmlformats.org/drawingml/2006/chart" xmlns:dgm="http://schemas.openxmlformats.org/drawingml/2006/diagram" xmlns:o="urn:schemas-microsoft-com:office:office" xmlns:v="urn:schemas-microsoft-com:vml" xmlns:pvml="urn:schemas-microsoft-com:office:powerpoint" xmlns:com="http://schemas.openxmlformats.org/drawingml/2006/compatibility" xmlns:p14="http://schemas.microsoft.com/office/powerpoint/2010/main" xmlns:p15="http://schemas.microsoft.com/office/powerpoint/2012/main" xmlns:ahyp="http://schemas.microsoft.com/office/drawing/2018/hyperlinkcolor" matchingName="Big number">
+<p:sldLayout xmlns:a="http://schemas.openxmlformats.org/drawingml/2006/main" xmlns:r="http://schemas.openxmlformats.org/officeDocument/2006/relationships" xmlns:p="http://schemas.openxmlformats.org/presentationml/2006/main" matchingName="Big number">
   <p:cSld name="BIG_NUMBER">
     <p:spTree>
       <p:nvGrpSpPr>
-        <p:cNvPr id="44" name="Shape 44"/>
+        <p:cNvPr id="1" name="Shape 44"/>
         <p:cNvGrpSpPr/>
         <p:nvPr/>
       </p:nvGrpSpPr>
@@ -2701,9 +2596,11 @@
       <p:sp>
         <p:nvSpPr>
           <p:cNvPr id="45" name="Google Shape;45;p11"/>
-          <p:cNvSpPr txBox="1"/>
+          <p:cNvSpPr txBox="1">
+            <a:spLocks noGrp="1"/>
+          </p:cNvSpPr>
           <p:nvPr>
-            <p:ph hasCustomPrompt="1" type="title"/>
+            <p:ph type="title" hasCustomPrompt="1"/>
           </p:nvPr>
         </p:nvSpPr>
         <p:spPr>
@@ -2716,7 +2613,7 @@
           </a:prstGeom>
         </p:spPr>
         <p:txBody>
-          <a:bodyPr anchorCtr="0" anchor="b" bIns="91425" lIns="91425" spcFirstLastPara="1" rIns="91425" wrap="square" tIns="91425">
+          <a:bodyPr spcFirstLastPara="1" wrap="square" lIns="91425" tIns="91425" rIns="91425" bIns="91425" anchor="b" anchorCtr="0">
             <a:normAutofit/>
           </a:bodyPr>
           <a:lstStyle>
@@ -2830,9 +2727,11 @@
       <p:sp>
         <p:nvSpPr>
           <p:cNvPr id="46" name="Google Shape;46;p11"/>
-          <p:cNvSpPr txBox="1"/>
+          <p:cNvSpPr txBox="1">
+            <a:spLocks noGrp="1"/>
+          </p:cNvSpPr>
           <p:nvPr>
-            <p:ph idx="1" type="body"/>
+            <p:ph type="body" idx="1"/>
           </p:nvPr>
         </p:nvSpPr>
         <p:spPr>
@@ -2845,11 +2744,11 @@
           </a:prstGeom>
         </p:spPr>
         <p:txBody>
-          <a:bodyPr anchorCtr="0" anchor="t" bIns="91425" lIns="91425" spcFirstLastPara="1" rIns="91425" wrap="square" tIns="91425">
+          <a:bodyPr spcFirstLastPara="1" wrap="square" lIns="91425" tIns="91425" rIns="91425" bIns="91425" anchor="t" anchorCtr="0">
             <a:normAutofit/>
           </a:bodyPr>
           <a:lstStyle>
-            <a:lvl1pPr indent="-342900" lvl="0" marL="457200" algn="ctr">
+            <a:lvl1pPr marL="457200" lvl="0" indent="-342900" algn="ctr">
               <a:spcBef>
                 <a:spcPts val="0"/>
               </a:spcBef>
@@ -2860,7 +2759,7 @@
               <a:buChar char="●"/>
               <a:defRPr/>
             </a:lvl1pPr>
-            <a:lvl2pPr indent="-317500" lvl="1" marL="914400" algn="ctr">
+            <a:lvl2pPr marL="914400" lvl="1" indent="-317500" algn="ctr">
               <a:spcBef>
                 <a:spcPts val="0"/>
               </a:spcBef>
@@ -2871,7 +2770,7 @@
               <a:buChar char="○"/>
               <a:defRPr/>
             </a:lvl2pPr>
-            <a:lvl3pPr indent="-317500" lvl="2" marL="1371600" algn="ctr">
+            <a:lvl3pPr marL="1371600" lvl="2" indent="-317500" algn="ctr">
               <a:spcBef>
                 <a:spcPts val="0"/>
               </a:spcBef>
@@ -2882,7 +2781,7 @@
               <a:buChar char="■"/>
               <a:defRPr/>
             </a:lvl3pPr>
-            <a:lvl4pPr indent="-317500" lvl="3" marL="1828800" algn="ctr">
+            <a:lvl4pPr marL="1828800" lvl="3" indent="-317500" algn="ctr">
               <a:spcBef>
                 <a:spcPts val="0"/>
               </a:spcBef>
@@ -2893,7 +2792,7 @@
               <a:buChar char="●"/>
               <a:defRPr/>
             </a:lvl4pPr>
-            <a:lvl5pPr indent="-317500" lvl="4" marL="2286000" algn="ctr">
+            <a:lvl5pPr marL="2286000" lvl="4" indent="-317500" algn="ctr">
               <a:spcBef>
                 <a:spcPts val="0"/>
               </a:spcBef>
@@ -2904,7 +2803,7 @@
               <a:buChar char="○"/>
               <a:defRPr/>
             </a:lvl5pPr>
-            <a:lvl6pPr indent="-317500" lvl="5" marL="2743200" algn="ctr">
+            <a:lvl6pPr marL="2743200" lvl="5" indent="-317500" algn="ctr">
               <a:spcBef>
                 <a:spcPts val="0"/>
               </a:spcBef>
@@ -2915,7 +2814,7 @@
               <a:buChar char="■"/>
               <a:defRPr/>
             </a:lvl6pPr>
-            <a:lvl7pPr indent="-317500" lvl="6" marL="3200400" algn="ctr">
+            <a:lvl7pPr marL="3200400" lvl="6" indent="-317500" algn="ctr">
               <a:spcBef>
                 <a:spcPts val="0"/>
               </a:spcBef>
@@ -2926,7 +2825,7 @@
               <a:buChar char="●"/>
               <a:defRPr/>
             </a:lvl7pPr>
-            <a:lvl8pPr indent="-317500" lvl="7" marL="3657600" algn="ctr">
+            <a:lvl8pPr marL="3657600" lvl="7" indent="-317500" algn="ctr">
               <a:spcBef>
                 <a:spcPts val="0"/>
               </a:spcBef>
@@ -2937,7 +2836,7 @@
               <a:buChar char="○"/>
               <a:defRPr/>
             </a:lvl8pPr>
-            <a:lvl9pPr indent="-317500" lvl="8" marL="4114800" algn="ctr">
+            <a:lvl9pPr marL="4114800" lvl="8" indent="-317500" algn="ctr">
               <a:spcBef>
                 <a:spcPts val="0"/>
               </a:spcBef>
@@ -2949,15 +2848,19 @@
               <a:defRPr/>
             </a:lvl9pPr>
           </a:lstStyle>
-          <a:p/>
+          <a:p>
+            <a:endParaRPr/>
+          </a:p>
         </p:txBody>
       </p:sp>
       <p:sp>
         <p:nvSpPr>
           <p:cNvPr id="47" name="Google Shape;47;p11"/>
-          <p:cNvSpPr txBox="1"/>
+          <p:cNvSpPr txBox="1">
+            <a:spLocks noGrp="1"/>
+          </p:cNvSpPr>
           <p:nvPr>
-            <p:ph idx="12" type="sldNum"/>
+            <p:ph type="sldNum" idx="12"/>
           </p:nvPr>
         </p:nvSpPr>
         <p:spPr>
@@ -2970,7 +2873,7 @@
           </a:prstGeom>
         </p:spPr>
         <p:txBody>
-          <a:bodyPr anchorCtr="0" anchor="ctr" bIns="91425" lIns="91425" spcFirstLastPara="1" rIns="91425" wrap="square" tIns="91425">
+          <a:bodyPr spcFirstLastPara="1" wrap="square" lIns="91425" tIns="91425" rIns="91425" bIns="91425" anchor="ctr" anchorCtr="0">
             <a:normAutofit/>
           </a:bodyPr>
           <a:lstStyle>
@@ -3012,7 +2915,7 @@
             </a:lvl9pPr>
           </a:lstStyle>
           <a:p>
-            <a:pPr indent="0" lvl="0" marL="0" rtl="0" algn="r">
+            <a:pPr marL="0" lvl="0" indent="0" algn="r" rtl="0">
               <a:spcBef>
                 <a:spcPts val="0"/>
               </a:spcBef>
@@ -3038,11 +2941,11 @@
 </file>
 
 <file path=ppt/slideLayouts/slideLayout11.xml><?xml version="1.0" encoding="utf-8"?>
-<p:sldLayout xmlns:a="http://schemas.openxmlformats.org/drawingml/2006/main" xmlns:r="http://schemas.openxmlformats.org/officeDocument/2006/relationships" xmlns:mc="http://schemas.openxmlformats.org/markup-compatibility/2006" xmlns:mv="urn:schemas-microsoft-com:mac:vml" xmlns:p="http://schemas.openxmlformats.org/presentationml/2006/main" xmlns:c="http://schemas.openxmlformats.org/drawingml/2006/chart" xmlns:dgm="http://schemas.openxmlformats.org/drawingml/2006/diagram" xmlns:o="urn:schemas-microsoft-com:office:office" xmlns:v="urn:schemas-microsoft-com:vml" xmlns:pvml="urn:schemas-microsoft-com:office:powerpoint" xmlns:com="http://schemas.openxmlformats.org/drawingml/2006/compatibility" xmlns:p14="http://schemas.microsoft.com/office/powerpoint/2010/main" xmlns:p15="http://schemas.microsoft.com/office/powerpoint/2012/main" xmlns:ahyp="http://schemas.microsoft.com/office/drawing/2018/hyperlinkcolor" matchingName="Blank" type="blank">
+<p:sldLayout xmlns:a="http://schemas.openxmlformats.org/drawingml/2006/main" xmlns:r="http://schemas.openxmlformats.org/officeDocument/2006/relationships" xmlns:p="http://schemas.openxmlformats.org/presentationml/2006/main" matchingName="Blank" type="blank">
   <p:cSld name="BLANK">
     <p:spTree>
       <p:nvGrpSpPr>
-        <p:cNvPr id="48" name="Shape 48"/>
+        <p:cNvPr id="1" name="Shape 48"/>
         <p:cNvGrpSpPr/>
         <p:nvPr/>
       </p:nvGrpSpPr>
@@ -3057,9 +2960,11 @@
       <p:sp>
         <p:nvSpPr>
           <p:cNvPr id="49" name="Google Shape;49;p12"/>
-          <p:cNvSpPr txBox="1"/>
+          <p:cNvSpPr txBox="1">
+            <a:spLocks noGrp="1"/>
+          </p:cNvSpPr>
           <p:nvPr>
-            <p:ph idx="12" type="sldNum"/>
+            <p:ph type="sldNum" idx="12"/>
           </p:nvPr>
         </p:nvSpPr>
         <p:spPr>
@@ -3072,7 +2977,7 @@
           </a:prstGeom>
         </p:spPr>
         <p:txBody>
-          <a:bodyPr anchorCtr="0" anchor="ctr" bIns="91425" lIns="91425" spcFirstLastPara="1" rIns="91425" wrap="square" tIns="91425">
+          <a:bodyPr spcFirstLastPara="1" wrap="square" lIns="91425" tIns="91425" rIns="91425" bIns="91425" anchor="ctr" anchorCtr="0">
             <a:normAutofit/>
           </a:bodyPr>
           <a:lstStyle>
@@ -3114,7 +3019,7 @@
             </a:lvl9pPr>
           </a:lstStyle>
           <a:p>
-            <a:pPr indent="0" lvl="0" marL="0" rtl="0" algn="r">
+            <a:pPr marL="0" lvl="0" indent="0" algn="r" rtl="0">
               <a:spcBef>
                 <a:spcPts val="0"/>
               </a:spcBef>
@@ -3140,11 +3045,11 @@
 </file>
 
 <file path=ppt/slideLayouts/slideLayout2.xml><?xml version="1.0" encoding="utf-8"?>
-<p:sldLayout xmlns:a="http://schemas.openxmlformats.org/drawingml/2006/main" xmlns:r="http://schemas.openxmlformats.org/officeDocument/2006/relationships" xmlns:mc="http://schemas.openxmlformats.org/markup-compatibility/2006" xmlns:mv="urn:schemas-microsoft-com:mac:vml" xmlns:p="http://schemas.openxmlformats.org/presentationml/2006/main" xmlns:c="http://schemas.openxmlformats.org/drawingml/2006/chart" xmlns:dgm="http://schemas.openxmlformats.org/drawingml/2006/diagram" xmlns:o="urn:schemas-microsoft-com:office:office" xmlns:v="urn:schemas-microsoft-com:vml" xmlns:pvml="urn:schemas-microsoft-com:office:powerpoint" xmlns:com="http://schemas.openxmlformats.org/drawingml/2006/compatibility" xmlns:p14="http://schemas.microsoft.com/office/powerpoint/2010/main" xmlns:p15="http://schemas.microsoft.com/office/powerpoint/2012/main" xmlns:ahyp="http://schemas.microsoft.com/office/drawing/2018/hyperlinkcolor" matchingName="Section header" type="secHead">
+<p:sldLayout xmlns:a="http://schemas.openxmlformats.org/drawingml/2006/main" xmlns:r="http://schemas.openxmlformats.org/officeDocument/2006/relationships" xmlns:p="http://schemas.openxmlformats.org/presentationml/2006/main" matchingName="Section header" type="secHead">
   <p:cSld name="SECTION_HEADER">
     <p:spTree>
       <p:nvGrpSpPr>
-        <p:cNvPr id="13" name="Shape 13"/>
+        <p:cNvPr id="1" name="Shape 13"/>
         <p:cNvGrpSpPr/>
         <p:nvPr/>
       </p:nvGrpSpPr>
@@ -3159,7 +3064,9 @@
       <p:sp>
         <p:nvSpPr>
           <p:cNvPr id="14" name="Google Shape;14;p3"/>
-          <p:cNvSpPr txBox="1"/>
+          <p:cNvSpPr txBox="1">
+            <a:spLocks noGrp="1"/>
+          </p:cNvSpPr>
           <p:nvPr>
             <p:ph type="title"/>
           </p:nvPr>
@@ -3174,7 +3081,7 @@
           </a:prstGeom>
         </p:spPr>
         <p:txBody>
-          <a:bodyPr anchorCtr="0" anchor="ctr" bIns="91425" lIns="91425" spcFirstLastPara="1" rIns="91425" wrap="square" tIns="91425">
+          <a:bodyPr spcFirstLastPara="1" wrap="square" lIns="91425" tIns="91425" rIns="91425" bIns="91425" anchor="ctr" anchorCtr="0">
             <a:normAutofit/>
           </a:bodyPr>
           <a:lstStyle>
@@ -3278,15 +3185,19 @@
               <a:defRPr sz="3600"/>
             </a:lvl9pPr>
           </a:lstStyle>
-          <a:p/>
+          <a:p>
+            <a:endParaRPr/>
+          </a:p>
         </p:txBody>
       </p:sp>
       <p:sp>
         <p:nvSpPr>
           <p:cNvPr id="15" name="Google Shape;15;p3"/>
-          <p:cNvSpPr txBox="1"/>
+          <p:cNvSpPr txBox="1">
+            <a:spLocks noGrp="1"/>
+          </p:cNvSpPr>
           <p:nvPr>
-            <p:ph idx="12" type="sldNum"/>
+            <p:ph type="sldNum" idx="12"/>
           </p:nvPr>
         </p:nvSpPr>
         <p:spPr>
@@ -3299,7 +3210,7 @@
           </a:prstGeom>
         </p:spPr>
         <p:txBody>
-          <a:bodyPr anchorCtr="0" anchor="ctr" bIns="91425" lIns="91425" spcFirstLastPara="1" rIns="91425" wrap="square" tIns="91425">
+          <a:bodyPr spcFirstLastPara="1" wrap="square" lIns="91425" tIns="91425" rIns="91425" bIns="91425" anchor="ctr" anchorCtr="0">
             <a:normAutofit/>
           </a:bodyPr>
           <a:lstStyle>
@@ -3341,7 +3252,7 @@
             </a:lvl9pPr>
           </a:lstStyle>
           <a:p>
-            <a:pPr indent="0" lvl="0" marL="0" rtl="0" algn="r">
+            <a:pPr marL="0" lvl="0" indent="0" algn="r" rtl="0">
               <a:spcBef>
                 <a:spcPts val="0"/>
               </a:spcBef>
@@ -3367,11 +3278,11 @@
 </file>
 
 <file path=ppt/slideLayouts/slideLayout3.xml><?xml version="1.0" encoding="utf-8"?>
-<p:sldLayout xmlns:a="http://schemas.openxmlformats.org/drawingml/2006/main" xmlns:r="http://schemas.openxmlformats.org/officeDocument/2006/relationships" xmlns:mc="http://schemas.openxmlformats.org/markup-compatibility/2006" xmlns:mv="urn:schemas-microsoft-com:mac:vml" xmlns:p="http://schemas.openxmlformats.org/presentationml/2006/main" xmlns:c="http://schemas.openxmlformats.org/drawingml/2006/chart" xmlns:dgm="http://schemas.openxmlformats.org/drawingml/2006/diagram" xmlns:o="urn:schemas-microsoft-com:office:office" xmlns:v="urn:schemas-microsoft-com:vml" xmlns:pvml="urn:schemas-microsoft-com:office:powerpoint" xmlns:com="http://schemas.openxmlformats.org/drawingml/2006/compatibility" xmlns:p14="http://schemas.microsoft.com/office/powerpoint/2010/main" xmlns:p15="http://schemas.microsoft.com/office/powerpoint/2012/main" xmlns:ahyp="http://schemas.microsoft.com/office/drawing/2018/hyperlinkcolor" matchingName="Title and body" type="tx">
+<p:sldLayout xmlns:a="http://schemas.openxmlformats.org/drawingml/2006/main" xmlns:r="http://schemas.openxmlformats.org/officeDocument/2006/relationships" xmlns:p="http://schemas.openxmlformats.org/presentationml/2006/main" matchingName="Title and body" type="tx">
   <p:cSld name="TITLE_AND_BODY">
     <p:spTree>
       <p:nvGrpSpPr>
-        <p:cNvPr id="16" name="Shape 16"/>
+        <p:cNvPr id="1" name="Shape 16"/>
         <p:cNvGrpSpPr/>
         <p:nvPr/>
       </p:nvGrpSpPr>
@@ -3386,7 +3297,9 @@
       <p:sp>
         <p:nvSpPr>
           <p:cNvPr id="17" name="Google Shape;17;p4"/>
-          <p:cNvSpPr txBox="1"/>
+          <p:cNvSpPr txBox="1">
+            <a:spLocks noGrp="1"/>
+          </p:cNvSpPr>
           <p:nvPr>
             <p:ph type="title"/>
           </p:nvPr>
@@ -3401,7 +3314,7 @@
           </a:prstGeom>
         </p:spPr>
         <p:txBody>
-          <a:bodyPr anchorCtr="0" anchor="t" bIns="91425" lIns="91425" spcFirstLastPara="1" rIns="91425" wrap="square" tIns="91425">
+          <a:bodyPr spcFirstLastPara="1" wrap="square" lIns="91425" tIns="91425" rIns="91425" bIns="91425" anchor="t" anchorCtr="0">
             <a:normAutofit/>
           </a:bodyPr>
           <a:lstStyle>
@@ -3505,15 +3418,19 @@
               <a:defRPr/>
             </a:lvl9pPr>
           </a:lstStyle>
-          <a:p/>
+          <a:p>
+            <a:endParaRPr/>
+          </a:p>
         </p:txBody>
       </p:sp>
       <p:sp>
         <p:nvSpPr>
           <p:cNvPr id="18" name="Google Shape;18;p4"/>
-          <p:cNvSpPr txBox="1"/>
+          <p:cNvSpPr txBox="1">
+            <a:spLocks noGrp="1"/>
+          </p:cNvSpPr>
           <p:nvPr>
-            <p:ph idx="1" type="body"/>
+            <p:ph type="body" idx="1"/>
           </p:nvPr>
         </p:nvSpPr>
         <p:spPr>
@@ -3526,11 +3443,11 @@
           </a:prstGeom>
         </p:spPr>
         <p:txBody>
-          <a:bodyPr anchorCtr="0" anchor="t" bIns="91425" lIns="91425" spcFirstLastPara="1" rIns="91425" wrap="square" tIns="91425">
+          <a:bodyPr spcFirstLastPara="1" wrap="square" lIns="91425" tIns="91425" rIns="91425" bIns="91425" anchor="t" anchorCtr="0">
             <a:normAutofit/>
           </a:bodyPr>
           <a:lstStyle>
-            <a:lvl1pPr indent="-342900" lvl="0" marL="457200">
+            <a:lvl1pPr marL="457200" lvl="0" indent="-342900">
               <a:spcBef>
                 <a:spcPts val="0"/>
               </a:spcBef>
@@ -3541,7 +3458,7 @@
               <a:buChar char="●"/>
               <a:defRPr/>
             </a:lvl1pPr>
-            <a:lvl2pPr indent="-317500" lvl="1" marL="914400">
+            <a:lvl2pPr marL="914400" lvl="1" indent="-317500">
               <a:spcBef>
                 <a:spcPts val="0"/>
               </a:spcBef>
@@ -3552,7 +3469,7 @@
               <a:buChar char="○"/>
               <a:defRPr/>
             </a:lvl2pPr>
-            <a:lvl3pPr indent="-317500" lvl="2" marL="1371600">
+            <a:lvl3pPr marL="1371600" lvl="2" indent="-317500">
               <a:spcBef>
                 <a:spcPts val="0"/>
               </a:spcBef>
@@ -3563,7 +3480,7 @@
               <a:buChar char="■"/>
               <a:defRPr/>
             </a:lvl3pPr>
-            <a:lvl4pPr indent="-317500" lvl="3" marL="1828800">
+            <a:lvl4pPr marL="1828800" lvl="3" indent="-317500">
               <a:spcBef>
                 <a:spcPts val="0"/>
               </a:spcBef>
@@ -3574,7 +3491,7 @@
               <a:buChar char="●"/>
               <a:defRPr/>
             </a:lvl4pPr>
-            <a:lvl5pPr indent="-317500" lvl="4" marL="2286000">
+            <a:lvl5pPr marL="2286000" lvl="4" indent="-317500">
               <a:spcBef>
                 <a:spcPts val="0"/>
               </a:spcBef>
@@ -3585,7 +3502,7 @@
               <a:buChar char="○"/>
               <a:defRPr/>
             </a:lvl5pPr>
-            <a:lvl6pPr indent="-317500" lvl="5" marL="2743200">
+            <a:lvl6pPr marL="2743200" lvl="5" indent="-317500">
               <a:spcBef>
                 <a:spcPts val="0"/>
               </a:spcBef>
@@ -3596,7 +3513,7 @@
               <a:buChar char="■"/>
               <a:defRPr/>
             </a:lvl6pPr>
-            <a:lvl7pPr indent="-317500" lvl="6" marL="3200400">
+            <a:lvl7pPr marL="3200400" lvl="6" indent="-317500">
               <a:spcBef>
                 <a:spcPts val="0"/>
               </a:spcBef>
@@ -3607,7 +3524,7 @@
               <a:buChar char="●"/>
               <a:defRPr/>
             </a:lvl7pPr>
-            <a:lvl8pPr indent="-317500" lvl="7" marL="3657600">
+            <a:lvl8pPr marL="3657600" lvl="7" indent="-317500">
               <a:spcBef>
                 <a:spcPts val="0"/>
               </a:spcBef>
@@ -3618,7 +3535,7 @@
               <a:buChar char="○"/>
               <a:defRPr/>
             </a:lvl8pPr>
-            <a:lvl9pPr indent="-317500" lvl="8" marL="4114800">
+            <a:lvl9pPr marL="4114800" lvl="8" indent="-317500">
               <a:spcBef>
                 <a:spcPts val="0"/>
               </a:spcBef>
@@ -3630,15 +3547,19 @@
               <a:defRPr/>
             </a:lvl9pPr>
           </a:lstStyle>
-          <a:p/>
+          <a:p>
+            <a:endParaRPr/>
+          </a:p>
         </p:txBody>
       </p:sp>
       <p:sp>
         <p:nvSpPr>
           <p:cNvPr id="19" name="Google Shape;19;p4"/>
-          <p:cNvSpPr txBox="1"/>
+          <p:cNvSpPr txBox="1">
+            <a:spLocks noGrp="1"/>
+          </p:cNvSpPr>
           <p:nvPr>
-            <p:ph idx="12" type="sldNum"/>
+            <p:ph type="sldNum" idx="12"/>
           </p:nvPr>
         </p:nvSpPr>
         <p:spPr>
@@ -3651,7 +3572,7 @@
           </a:prstGeom>
         </p:spPr>
         <p:txBody>
-          <a:bodyPr anchorCtr="0" anchor="ctr" bIns="91425" lIns="91425" spcFirstLastPara="1" rIns="91425" wrap="square" tIns="91425">
+          <a:bodyPr spcFirstLastPara="1" wrap="square" lIns="91425" tIns="91425" rIns="91425" bIns="91425" anchor="ctr" anchorCtr="0">
             <a:normAutofit/>
           </a:bodyPr>
           <a:lstStyle>
@@ -3693,7 +3614,7 @@
             </a:lvl9pPr>
           </a:lstStyle>
           <a:p>
-            <a:pPr indent="0" lvl="0" marL="0" rtl="0" algn="r">
+            <a:pPr marL="0" lvl="0" indent="0" algn="r" rtl="0">
               <a:spcBef>
                 <a:spcPts val="0"/>
               </a:spcBef>
@@ -3719,11 +3640,11 @@
 </file>
 
 <file path=ppt/slideLayouts/slideLayout4.xml><?xml version="1.0" encoding="utf-8"?>
-<p:sldLayout xmlns:a="http://schemas.openxmlformats.org/drawingml/2006/main" xmlns:r="http://schemas.openxmlformats.org/officeDocument/2006/relationships" xmlns:mc="http://schemas.openxmlformats.org/markup-compatibility/2006" xmlns:mv="urn:schemas-microsoft-com:mac:vml" xmlns:p="http://schemas.openxmlformats.org/presentationml/2006/main" xmlns:c="http://schemas.openxmlformats.org/drawingml/2006/chart" xmlns:dgm="http://schemas.openxmlformats.org/drawingml/2006/diagram" xmlns:o="urn:schemas-microsoft-com:office:office" xmlns:v="urn:schemas-microsoft-com:vml" xmlns:pvml="urn:schemas-microsoft-com:office:powerpoint" xmlns:com="http://schemas.openxmlformats.org/drawingml/2006/compatibility" xmlns:p14="http://schemas.microsoft.com/office/powerpoint/2010/main" xmlns:p15="http://schemas.microsoft.com/office/powerpoint/2012/main" xmlns:ahyp="http://schemas.microsoft.com/office/drawing/2018/hyperlinkcolor" matchingName="Title and two columns" type="twoColTx">
+<p:sldLayout xmlns:a="http://schemas.openxmlformats.org/drawingml/2006/main" xmlns:r="http://schemas.openxmlformats.org/officeDocument/2006/relationships" xmlns:p="http://schemas.openxmlformats.org/presentationml/2006/main" matchingName="Title and two columns" type="twoColTx">
   <p:cSld name="TITLE_AND_TWO_COLUMNS">
     <p:spTree>
       <p:nvGrpSpPr>
-        <p:cNvPr id="20" name="Shape 20"/>
+        <p:cNvPr id="1" name="Shape 20"/>
         <p:cNvGrpSpPr/>
         <p:nvPr/>
       </p:nvGrpSpPr>
@@ -3738,7 +3659,9 @@
       <p:sp>
         <p:nvSpPr>
           <p:cNvPr id="21" name="Google Shape;21;p5"/>
-          <p:cNvSpPr txBox="1"/>
+          <p:cNvSpPr txBox="1">
+            <a:spLocks noGrp="1"/>
+          </p:cNvSpPr>
           <p:nvPr>
             <p:ph type="title"/>
           </p:nvPr>
@@ -3753,7 +3676,7 @@
           </a:prstGeom>
         </p:spPr>
         <p:txBody>
-          <a:bodyPr anchorCtr="0" anchor="t" bIns="91425" lIns="91425" spcFirstLastPara="1" rIns="91425" wrap="square" tIns="91425">
+          <a:bodyPr spcFirstLastPara="1" wrap="square" lIns="91425" tIns="91425" rIns="91425" bIns="91425" anchor="t" anchorCtr="0">
             <a:normAutofit/>
           </a:bodyPr>
           <a:lstStyle>
@@ -3857,15 +3780,19 @@
               <a:defRPr/>
             </a:lvl9pPr>
           </a:lstStyle>
-          <a:p/>
+          <a:p>
+            <a:endParaRPr/>
+          </a:p>
         </p:txBody>
       </p:sp>
       <p:sp>
         <p:nvSpPr>
           <p:cNvPr id="22" name="Google Shape;22;p5"/>
-          <p:cNvSpPr txBox="1"/>
+          <p:cNvSpPr txBox="1">
+            <a:spLocks noGrp="1"/>
+          </p:cNvSpPr>
           <p:nvPr>
-            <p:ph idx="1" type="body"/>
+            <p:ph type="body" idx="1"/>
           </p:nvPr>
         </p:nvSpPr>
         <p:spPr>
@@ -3878,11 +3805,11 @@
           </a:prstGeom>
         </p:spPr>
         <p:txBody>
-          <a:bodyPr anchorCtr="0" anchor="t" bIns="91425" lIns="91425" spcFirstLastPara="1" rIns="91425" wrap="square" tIns="91425">
+          <a:bodyPr spcFirstLastPara="1" wrap="square" lIns="91425" tIns="91425" rIns="91425" bIns="91425" anchor="t" anchorCtr="0">
             <a:normAutofit/>
           </a:bodyPr>
           <a:lstStyle>
-            <a:lvl1pPr indent="-317500" lvl="0" marL="457200">
+            <a:lvl1pPr marL="457200" lvl="0" indent="-317500">
               <a:spcBef>
                 <a:spcPts val="0"/>
               </a:spcBef>
@@ -3893,7 +3820,7 @@
               <a:buChar char="●"/>
               <a:defRPr sz="1400"/>
             </a:lvl1pPr>
-            <a:lvl2pPr indent="-304800" lvl="1" marL="914400">
+            <a:lvl2pPr marL="914400" lvl="1" indent="-304800">
               <a:spcBef>
                 <a:spcPts val="0"/>
               </a:spcBef>
@@ -3904,7 +3831,7 @@
               <a:buChar char="○"/>
               <a:defRPr sz="1200"/>
             </a:lvl2pPr>
-            <a:lvl3pPr indent="-304800" lvl="2" marL="1371600">
+            <a:lvl3pPr marL="1371600" lvl="2" indent="-304800">
               <a:spcBef>
                 <a:spcPts val="0"/>
               </a:spcBef>
@@ -3915,7 +3842,7 @@
               <a:buChar char="■"/>
               <a:defRPr sz="1200"/>
             </a:lvl3pPr>
-            <a:lvl4pPr indent="-304800" lvl="3" marL="1828800">
+            <a:lvl4pPr marL="1828800" lvl="3" indent="-304800">
               <a:spcBef>
                 <a:spcPts val="0"/>
               </a:spcBef>
@@ -3926,7 +3853,7 @@
               <a:buChar char="●"/>
               <a:defRPr sz="1200"/>
             </a:lvl4pPr>
-            <a:lvl5pPr indent="-304800" lvl="4" marL="2286000">
+            <a:lvl5pPr marL="2286000" lvl="4" indent="-304800">
               <a:spcBef>
                 <a:spcPts val="0"/>
               </a:spcBef>
@@ -3937,7 +3864,7 @@
               <a:buChar char="○"/>
               <a:defRPr sz="1200"/>
             </a:lvl5pPr>
-            <a:lvl6pPr indent="-304800" lvl="5" marL="2743200">
+            <a:lvl6pPr marL="2743200" lvl="5" indent="-304800">
               <a:spcBef>
                 <a:spcPts val="0"/>
               </a:spcBef>
@@ -3948,7 +3875,7 @@
               <a:buChar char="■"/>
               <a:defRPr sz="1200"/>
             </a:lvl6pPr>
-            <a:lvl7pPr indent="-304800" lvl="6" marL="3200400">
+            <a:lvl7pPr marL="3200400" lvl="6" indent="-304800">
               <a:spcBef>
                 <a:spcPts val="0"/>
               </a:spcBef>
@@ -3959,7 +3886,7 @@
               <a:buChar char="●"/>
               <a:defRPr sz="1200"/>
             </a:lvl7pPr>
-            <a:lvl8pPr indent="-304800" lvl="7" marL="3657600">
+            <a:lvl8pPr marL="3657600" lvl="7" indent="-304800">
               <a:spcBef>
                 <a:spcPts val="0"/>
               </a:spcBef>
@@ -3970,7 +3897,7 @@
               <a:buChar char="○"/>
               <a:defRPr sz="1200"/>
             </a:lvl8pPr>
-            <a:lvl9pPr indent="-304800" lvl="8" marL="4114800">
+            <a:lvl9pPr marL="4114800" lvl="8" indent="-304800">
               <a:spcBef>
                 <a:spcPts val="0"/>
               </a:spcBef>
@@ -3982,15 +3909,19 @@
               <a:defRPr sz="1200"/>
             </a:lvl9pPr>
           </a:lstStyle>
-          <a:p/>
+          <a:p>
+            <a:endParaRPr/>
+          </a:p>
         </p:txBody>
       </p:sp>
       <p:sp>
         <p:nvSpPr>
           <p:cNvPr id="23" name="Google Shape;23;p5"/>
-          <p:cNvSpPr txBox="1"/>
+          <p:cNvSpPr txBox="1">
+            <a:spLocks noGrp="1"/>
+          </p:cNvSpPr>
           <p:nvPr>
-            <p:ph idx="2" type="body"/>
+            <p:ph type="body" idx="2"/>
           </p:nvPr>
         </p:nvSpPr>
         <p:spPr>
@@ -4003,11 +3934,11 @@
           </a:prstGeom>
         </p:spPr>
         <p:txBody>
-          <a:bodyPr anchorCtr="0" anchor="t" bIns="91425" lIns="91425" spcFirstLastPara="1" rIns="91425" wrap="square" tIns="91425">
+          <a:bodyPr spcFirstLastPara="1" wrap="square" lIns="91425" tIns="91425" rIns="91425" bIns="91425" anchor="t" anchorCtr="0">
             <a:normAutofit/>
           </a:bodyPr>
           <a:lstStyle>
-            <a:lvl1pPr indent="-317500" lvl="0" marL="457200">
+            <a:lvl1pPr marL="457200" lvl="0" indent="-317500">
               <a:spcBef>
                 <a:spcPts val="0"/>
               </a:spcBef>
@@ -4018,7 +3949,7 @@
               <a:buChar char="●"/>
               <a:defRPr sz="1400"/>
             </a:lvl1pPr>
-            <a:lvl2pPr indent="-304800" lvl="1" marL="914400">
+            <a:lvl2pPr marL="914400" lvl="1" indent="-304800">
               <a:spcBef>
                 <a:spcPts val="0"/>
               </a:spcBef>
@@ -4029,7 +3960,7 @@
               <a:buChar char="○"/>
               <a:defRPr sz="1200"/>
             </a:lvl2pPr>
-            <a:lvl3pPr indent="-304800" lvl="2" marL="1371600">
+            <a:lvl3pPr marL="1371600" lvl="2" indent="-304800">
               <a:spcBef>
                 <a:spcPts val="0"/>
               </a:spcBef>
@@ -4040,7 +3971,7 @@
               <a:buChar char="■"/>
               <a:defRPr sz="1200"/>
             </a:lvl3pPr>
-            <a:lvl4pPr indent="-304800" lvl="3" marL="1828800">
+            <a:lvl4pPr marL="1828800" lvl="3" indent="-304800">
               <a:spcBef>
                 <a:spcPts val="0"/>
               </a:spcBef>
@@ -4051,7 +3982,7 @@
               <a:buChar char="●"/>
               <a:defRPr sz="1200"/>
             </a:lvl4pPr>
-            <a:lvl5pPr indent="-304800" lvl="4" marL="2286000">
+            <a:lvl5pPr marL="2286000" lvl="4" indent="-304800">
               <a:spcBef>
                 <a:spcPts val="0"/>
               </a:spcBef>
@@ -4062,7 +3993,7 @@
               <a:buChar char="○"/>
               <a:defRPr sz="1200"/>
             </a:lvl5pPr>
-            <a:lvl6pPr indent="-304800" lvl="5" marL="2743200">
+            <a:lvl6pPr marL="2743200" lvl="5" indent="-304800">
               <a:spcBef>
                 <a:spcPts val="0"/>
               </a:spcBef>
@@ -4073,7 +4004,7 @@
               <a:buChar char="■"/>
               <a:defRPr sz="1200"/>
             </a:lvl6pPr>
-            <a:lvl7pPr indent="-304800" lvl="6" marL="3200400">
+            <a:lvl7pPr marL="3200400" lvl="6" indent="-304800">
               <a:spcBef>
                 <a:spcPts val="0"/>
               </a:spcBef>
@@ -4084,7 +4015,7 @@
               <a:buChar char="●"/>
               <a:defRPr sz="1200"/>
             </a:lvl7pPr>
-            <a:lvl8pPr indent="-304800" lvl="7" marL="3657600">
+            <a:lvl8pPr marL="3657600" lvl="7" indent="-304800">
               <a:spcBef>
                 <a:spcPts val="0"/>
               </a:spcBef>
@@ -4095,7 +4026,7 @@
               <a:buChar char="○"/>
               <a:defRPr sz="1200"/>
             </a:lvl8pPr>
-            <a:lvl9pPr indent="-304800" lvl="8" marL="4114800">
+            <a:lvl9pPr marL="4114800" lvl="8" indent="-304800">
               <a:spcBef>
                 <a:spcPts val="0"/>
               </a:spcBef>
@@ -4107,15 +4038,19 @@
               <a:defRPr sz="1200"/>
             </a:lvl9pPr>
           </a:lstStyle>
-          <a:p/>
+          <a:p>
+            <a:endParaRPr/>
+          </a:p>
         </p:txBody>
       </p:sp>
       <p:sp>
         <p:nvSpPr>
           <p:cNvPr id="24" name="Google Shape;24;p5"/>
-          <p:cNvSpPr txBox="1"/>
+          <p:cNvSpPr txBox="1">
+            <a:spLocks noGrp="1"/>
+          </p:cNvSpPr>
           <p:nvPr>
-            <p:ph idx="12" type="sldNum"/>
+            <p:ph type="sldNum" idx="12"/>
           </p:nvPr>
         </p:nvSpPr>
         <p:spPr>
@@ -4128,7 +4063,7 @@
           </a:prstGeom>
         </p:spPr>
         <p:txBody>
-          <a:bodyPr anchorCtr="0" anchor="ctr" bIns="91425" lIns="91425" spcFirstLastPara="1" rIns="91425" wrap="square" tIns="91425">
+          <a:bodyPr spcFirstLastPara="1" wrap="square" lIns="91425" tIns="91425" rIns="91425" bIns="91425" anchor="ctr" anchorCtr="0">
             <a:normAutofit/>
           </a:bodyPr>
           <a:lstStyle>
@@ -4170,7 +4105,7 @@
             </a:lvl9pPr>
           </a:lstStyle>
           <a:p>
-            <a:pPr indent="0" lvl="0" marL="0" rtl="0" algn="r">
+            <a:pPr marL="0" lvl="0" indent="0" algn="r" rtl="0">
               <a:spcBef>
                 <a:spcPts val="0"/>
               </a:spcBef>
@@ -4196,11 +4131,11 @@
 </file>
 
 <file path=ppt/slideLayouts/slideLayout5.xml><?xml version="1.0" encoding="utf-8"?>
-<p:sldLayout xmlns:a="http://schemas.openxmlformats.org/drawingml/2006/main" xmlns:r="http://schemas.openxmlformats.org/officeDocument/2006/relationships" xmlns:mc="http://schemas.openxmlformats.org/markup-compatibility/2006" xmlns:mv="urn:schemas-microsoft-com:mac:vml" xmlns:p="http://schemas.openxmlformats.org/presentationml/2006/main" xmlns:c="http://schemas.openxmlformats.org/drawingml/2006/chart" xmlns:dgm="http://schemas.openxmlformats.org/drawingml/2006/diagram" xmlns:o="urn:schemas-microsoft-com:office:office" xmlns:v="urn:schemas-microsoft-com:vml" xmlns:pvml="urn:schemas-microsoft-com:office:powerpoint" xmlns:com="http://schemas.openxmlformats.org/drawingml/2006/compatibility" xmlns:p14="http://schemas.microsoft.com/office/powerpoint/2010/main" xmlns:p15="http://schemas.microsoft.com/office/powerpoint/2012/main" xmlns:ahyp="http://schemas.microsoft.com/office/drawing/2018/hyperlinkcolor" matchingName="Title only" type="titleOnly">
+<p:sldLayout xmlns:a="http://schemas.openxmlformats.org/drawingml/2006/main" xmlns:r="http://schemas.openxmlformats.org/officeDocument/2006/relationships" xmlns:p="http://schemas.openxmlformats.org/presentationml/2006/main" matchingName="Title only" type="titleOnly">
   <p:cSld name="TITLE_ONLY">
     <p:spTree>
       <p:nvGrpSpPr>
-        <p:cNvPr id="25" name="Shape 25"/>
+        <p:cNvPr id="1" name="Shape 25"/>
         <p:cNvGrpSpPr/>
         <p:nvPr/>
       </p:nvGrpSpPr>
@@ -4215,7 +4150,9 @@
       <p:sp>
         <p:nvSpPr>
           <p:cNvPr id="26" name="Google Shape;26;p6"/>
-          <p:cNvSpPr txBox="1"/>
+          <p:cNvSpPr txBox="1">
+            <a:spLocks noGrp="1"/>
+          </p:cNvSpPr>
           <p:nvPr>
             <p:ph type="title"/>
           </p:nvPr>
@@ -4230,7 +4167,7 @@
           </a:prstGeom>
         </p:spPr>
         <p:txBody>
-          <a:bodyPr anchorCtr="0" anchor="t" bIns="91425" lIns="91425" spcFirstLastPara="1" rIns="91425" wrap="square" tIns="91425">
+          <a:bodyPr spcFirstLastPara="1" wrap="square" lIns="91425" tIns="91425" rIns="91425" bIns="91425" anchor="t" anchorCtr="0">
             <a:normAutofit/>
           </a:bodyPr>
           <a:lstStyle>
@@ -4334,15 +4271,19 @@
               <a:defRPr/>
             </a:lvl9pPr>
           </a:lstStyle>
-          <a:p/>
+          <a:p>
+            <a:endParaRPr/>
+          </a:p>
         </p:txBody>
       </p:sp>
       <p:sp>
         <p:nvSpPr>
           <p:cNvPr id="27" name="Google Shape;27;p6"/>
-          <p:cNvSpPr txBox="1"/>
+          <p:cNvSpPr txBox="1">
+            <a:spLocks noGrp="1"/>
+          </p:cNvSpPr>
           <p:nvPr>
-            <p:ph idx="12" type="sldNum"/>
+            <p:ph type="sldNum" idx="12"/>
           </p:nvPr>
         </p:nvSpPr>
         <p:spPr>
@@ -4355,7 +4296,7 @@
           </a:prstGeom>
         </p:spPr>
         <p:txBody>
-          <a:bodyPr anchorCtr="0" anchor="ctr" bIns="91425" lIns="91425" spcFirstLastPara="1" rIns="91425" wrap="square" tIns="91425">
+          <a:bodyPr spcFirstLastPara="1" wrap="square" lIns="91425" tIns="91425" rIns="91425" bIns="91425" anchor="ctr" anchorCtr="0">
             <a:normAutofit/>
           </a:bodyPr>
           <a:lstStyle>
@@ -4397,7 +4338,7 @@
             </a:lvl9pPr>
           </a:lstStyle>
           <a:p>
-            <a:pPr indent="0" lvl="0" marL="0" rtl="0" algn="r">
+            <a:pPr marL="0" lvl="0" indent="0" algn="r" rtl="0">
               <a:spcBef>
                 <a:spcPts val="0"/>
               </a:spcBef>
@@ -4423,11 +4364,11 @@
 </file>
 
 <file path=ppt/slideLayouts/slideLayout6.xml><?xml version="1.0" encoding="utf-8"?>
-<p:sldLayout xmlns:a="http://schemas.openxmlformats.org/drawingml/2006/main" xmlns:r="http://schemas.openxmlformats.org/officeDocument/2006/relationships" xmlns:mc="http://schemas.openxmlformats.org/markup-compatibility/2006" xmlns:mv="urn:schemas-microsoft-com:mac:vml" xmlns:p="http://schemas.openxmlformats.org/presentationml/2006/main" xmlns:c="http://schemas.openxmlformats.org/drawingml/2006/chart" xmlns:dgm="http://schemas.openxmlformats.org/drawingml/2006/diagram" xmlns:o="urn:schemas-microsoft-com:office:office" xmlns:v="urn:schemas-microsoft-com:vml" xmlns:pvml="urn:schemas-microsoft-com:office:powerpoint" xmlns:com="http://schemas.openxmlformats.org/drawingml/2006/compatibility" xmlns:p14="http://schemas.microsoft.com/office/powerpoint/2010/main" xmlns:p15="http://schemas.microsoft.com/office/powerpoint/2012/main" xmlns:ahyp="http://schemas.microsoft.com/office/drawing/2018/hyperlinkcolor" matchingName="One column text">
+<p:sldLayout xmlns:a="http://schemas.openxmlformats.org/drawingml/2006/main" xmlns:r="http://schemas.openxmlformats.org/officeDocument/2006/relationships" xmlns:p="http://schemas.openxmlformats.org/presentationml/2006/main" matchingName="One column text">
   <p:cSld name="ONE_COLUMN_TEXT">
     <p:spTree>
       <p:nvGrpSpPr>
-        <p:cNvPr id="28" name="Shape 28"/>
+        <p:cNvPr id="1" name="Shape 28"/>
         <p:cNvGrpSpPr/>
         <p:nvPr/>
       </p:nvGrpSpPr>
@@ -4442,7 +4383,9 @@
       <p:sp>
         <p:nvSpPr>
           <p:cNvPr id="29" name="Google Shape;29;p7"/>
-          <p:cNvSpPr txBox="1"/>
+          <p:cNvSpPr txBox="1">
+            <a:spLocks noGrp="1"/>
+          </p:cNvSpPr>
           <p:nvPr>
             <p:ph type="title"/>
           </p:nvPr>
@@ -4457,7 +4400,7 @@
           </a:prstGeom>
         </p:spPr>
         <p:txBody>
-          <a:bodyPr anchorCtr="0" anchor="b" bIns="91425" lIns="91425" spcFirstLastPara="1" rIns="91425" wrap="square" tIns="91425">
+          <a:bodyPr spcFirstLastPara="1" wrap="square" lIns="91425" tIns="91425" rIns="91425" bIns="91425" anchor="b" anchorCtr="0">
             <a:normAutofit/>
           </a:bodyPr>
           <a:lstStyle>
@@ -4561,15 +4504,19 @@
               <a:defRPr sz="2400"/>
             </a:lvl9pPr>
           </a:lstStyle>
-          <a:p/>
+          <a:p>
+            <a:endParaRPr/>
+          </a:p>
         </p:txBody>
       </p:sp>
       <p:sp>
         <p:nvSpPr>
           <p:cNvPr id="30" name="Google Shape;30;p7"/>
-          <p:cNvSpPr txBox="1"/>
+          <p:cNvSpPr txBox="1">
+            <a:spLocks noGrp="1"/>
+          </p:cNvSpPr>
           <p:nvPr>
-            <p:ph idx="1" type="body"/>
+            <p:ph type="body" idx="1"/>
           </p:nvPr>
         </p:nvSpPr>
         <p:spPr>
@@ -4582,11 +4529,11 @@
           </a:prstGeom>
         </p:spPr>
         <p:txBody>
-          <a:bodyPr anchorCtr="0" anchor="t" bIns="91425" lIns="91425" spcFirstLastPara="1" rIns="91425" wrap="square" tIns="91425">
+          <a:bodyPr spcFirstLastPara="1" wrap="square" lIns="91425" tIns="91425" rIns="91425" bIns="91425" anchor="t" anchorCtr="0">
             <a:normAutofit/>
           </a:bodyPr>
           <a:lstStyle>
-            <a:lvl1pPr indent="-304800" lvl="0" marL="457200">
+            <a:lvl1pPr marL="457200" lvl="0" indent="-304800">
               <a:spcBef>
                 <a:spcPts val="0"/>
               </a:spcBef>
@@ -4597,7 +4544,7 @@
               <a:buChar char="●"/>
               <a:defRPr sz="1200"/>
             </a:lvl1pPr>
-            <a:lvl2pPr indent="-304800" lvl="1" marL="914400">
+            <a:lvl2pPr marL="914400" lvl="1" indent="-304800">
               <a:spcBef>
                 <a:spcPts val="0"/>
               </a:spcBef>
@@ -4608,7 +4555,7 @@
               <a:buChar char="○"/>
               <a:defRPr sz="1200"/>
             </a:lvl2pPr>
-            <a:lvl3pPr indent="-304800" lvl="2" marL="1371600">
+            <a:lvl3pPr marL="1371600" lvl="2" indent="-304800">
               <a:spcBef>
                 <a:spcPts val="0"/>
               </a:spcBef>
@@ -4619,7 +4566,7 @@
               <a:buChar char="■"/>
               <a:defRPr sz="1200"/>
             </a:lvl3pPr>
-            <a:lvl4pPr indent="-304800" lvl="3" marL="1828800">
+            <a:lvl4pPr marL="1828800" lvl="3" indent="-304800">
               <a:spcBef>
                 <a:spcPts val="0"/>
               </a:spcBef>
@@ -4630,7 +4577,7 @@
               <a:buChar char="●"/>
               <a:defRPr sz="1200"/>
             </a:lvl4pPr>
-            <a:lvl5pPr indent="-304800" lvl="4" marL="2286000">
+            <a:lvl5pPr marL="2286000" lvl="4" indent="-304800">
               <a:spcBef>
                 <a:spcPts val="0"/>
               </a:spcBef>
@@ -4641,7 +4588,7 @@
               <a:buChar char="○"/>
               <a:defRPr sz="1200"/>
             </a:lvl5pPr>
-            <a:lvl6pPr indent="-304800" lvl="5" marL="2743200">
+            <a:lvl6pPr marL="2743200" lvl="5" indent="-304800">
               <a:spcBef>
                 <a:spcPts val="0"/>
               </a:spcBef>
@@ -4652,7 +4599,7 @@
               <a:buChar char="■"/>
               <a:defRPr sz="1200"/>
             </a:lvl6pPr>
-            <a:lvl7pPr indent="-304800" lvl="6" marL="3200400">
+            <a:lvl7pPr marL="3200400" lvl="6" indent="-304800">
               <a:spcBef>
                 <a:spcPts val="0"/>
               </a:spcBef>
@@ -4663,7 +4610,7 @@
               <a:buChar char="●"/>
               <a:defRPr sz="1200"/>
             </a:lvl7pPr>
-            <a:lvl8pPr indent="-304800" lvl="7" marL="3657600">
+            <a:lvl8pPr marL="3657600" lvl="7" indent="-304800">
               <a:spcBef>
                 <a:spcPts val="0"/>
               </a:spcBef>
@@ -4674,7 +4621,7 @@
               <a:buChar char="○"/>
               <a:defRPr sz="1200"/>
             </a:lvl8pPr>
-            <a:lvl9pPr indent="-304800" lvl="8" marL="4114800">
+            <a:lvl9pPr marL="4114800" lvl="8" indent="-304800">
               <a:spcBef>
                 <a:spcPts val="0"/>
               </a:spcBef>
@@ -4686,15 +4633,19 @@
               <a:defRPr sz="1200"/>
             </a:lvl9pPr>
           </a:lstStyle>
-          <a:p/>
+          <a:p>
+            <a:endParaRPr/>
+          </a:p>
         </p:txBody>
       </p:sp>
       <p:sp>
         <p:nvSpPr>
           <p:cNvPr id="31" name="Google Shape;31;p7"/>
-          <p:cNvSpPr txBox="1"/>
+          <p:cNvSpPr txBox="1">
+            <a:spLocks noGrp="1"/>
+          </p:cNvSpPr>
           <p:nvPr>
-            <p:ph idx="12" type="sldNum"/>
+            <p:ph type="sldNum" idx="12"/>
           </p:nvPr>
         </p:nvSpPr>
         <p:spPr>
@@ -4707,7 +4658,7 @@
           </a:prstGeom>
         </p:spPr>
         <p:txBody>
-          <a:bodyPr anchorCtr="0" anchor="ctr" bIns="91425" lIns="91425" spcFirstLastPara="1" rIns="91425" wrap="square" tIns="91425">
+          <a:bodyPr spcFirstLastPara="1" wrap="square" lIns="91425" tIns="91425" rIns="91425" bIns="91425" anchor="ctr" anchorCtr="0">
             <a:normAutofit/>
           </a:bodyPr>
           <a:lstStyle>
@@ -4749,7 +4700,7 @@
             </a:lvl9pPr>
           </a:lstStyle>
           <a:p>
-            <a:pPr indent="0" lvl="0" marL="0" rtl="0" algn="r">
+            <a:pPr marL="0" lvl="0" indent="0" algn="r" rtl="0">
               <a:spcBef>
                 <a:spcPts val="0"/>
               </a:spcBef>
@@ -4775,11 +4726,11 @@
 </file>
 
 <file path=ppt/slideLayouts/slideLayout7.xml><?xml version="1.0" encoding="utf-8"?>
-<p:sldLayout xmlns:a="http://schemas.openxmlformats.org/drawingml/2006/main" xmlns:r="http://schemas.openxmlformats.org/officeDocument/2006/relationships" xmlns:mc="http://schemas.openxmlformats.org/markup-compatibility/2006" xmlns:mv="urn:schemas-microsoft-com:mac:vml" xmlns:p="http://schemas.openxmlformats.org/presentationml/2006/main" xmlns:c="http://schemas.openxmlformats.org/drawingml/2006/chart" xmlns:dgm="http://schemas.openxmlformats.org/drawingml/2006/diagram" xmlns:o="urn:schemas-microsoft-com:office:office" xmlns:v="urn:schemas-microsoft-com:vml" xmlns:pvml="urn:schemas-microsoft-com:office:powerpoint" xmlns:com="http://schemas.openxmlformats.org/drawingml/2006/compatibility" xmlns:p14="http://schemas.microsoft.com/office/powerpoint/2010/main" xmlns:p15="http://schemas.microsoft.com/office/powerpoint/2012/main" xmlns:ahyp="http://schemas.microsoft.com/office/drawing/2018/hyperlinkcolor" matchingName="Main point">
+<p:sldLayout xmlns:a="http://schemas.openxmlformats.org/drawingml/2006/main" xmlns:r="http://schemas.openxmlformats.org/officeDocument/2006/relationships" xmlns:p="http://schemas.openxmlformats.org/presentationml/2006/main" matchingName="Main point">
   <p:cSld name="MAIN_POINT">
     <p:spTree>
       <p:nvGrpSpPr>
-        <p:cNvPr id="32" name="Shape 32"/>
+        <p:cNvPr id="1" name="Shape 32"/>
         <p:cNvGrpSpPr/>
         <p:nvPr/>
       </p:nvGrpSpPr>
@@ -4794,7 +4745,9 @@
       <p:sp>
         <p:nvSpPr>
           <p:cNvPr id="33" name="Google Shape;33;p8"/>
-          <p:cNvSpPr txBox="1"/>
+          <p:cNvSpPr txBox="1">
+            <a:spLocks noGrp="1"/>
+          </p:cNvSpPr>
           <p:nvPr>
             <p:ph type="title"/>
           </p:nvPr>
@@ -4809,7 +4762,7 @@
           </a:prstGeom>
         </p:spPr>
         <p:txBody>
-          <a:bodyPr anchorCtr="0" anchor="ctr" bIns="91425" lIns="91425" spcFirstLastPara="1" rIns="91425" wrap="square" tIns="91425">
+          <a:bodyPr spcFirstLastPara="1" wrap="square" lIns="91425" tIns="91425" rIns="91425" bIns="91425" anchor="ctr" anchorCtr="0">
             <a:normAutofit/>
           </a:bodyPr>
           <a:lstStyle>
@@ -4913,15 +4866,19 @@
               <a:defRPr sz="4800"/>
             </a:lvl9pPr>
           </a:lstStyle>
-          <a:p/>
+          <a:p>
+            <a:endParaRPr/>
+          </a:p>
         </p:txBody>
       </p:sp>
       <p:sp>
         <p:nvSpPr>
           <p:cNvPr id="34" name="Google Shape;34;p8"/>
-          <p:cNvSpPr txBox="1"/>
+          <p:cNvSpPr txBox="1">
+            <a:spLocks noGrp="1"/>
+          </p:cNvSpPr>
           <p:nvPr>
-            <p:ph idx="12" type="sldNum"/>
+            <p:ph type="sldNum" idx="12"/>
           </p:nvPr>
         </p:nvSpPr>
         <p:spPr>
@@ -4934,7 +4891,7 @@
           </a:prstGeom>
         </p:spPr>
         <p:txBody>
-          <a:bodyPr anchorCtr="0" anchor="ctr" bIns="91425" lIns="91425" spcFirstLastPara="1" rIns="91425" wrap="square" tIns="91425">
+          <a:bodyPr spcFirstLastPara="1" wrap="square" lIns="91425" tIns="91425" rIns="91425" bIns="91425" anchor="ctr" anchorCtr="0">
             <a:normAutofit/>
           </a:bodyPr>
           <a:lstStyle>
@@ -4976,7 +4933,7 @@
             </a:lvl9pPr>
           </a:lstStyle>
           <a:p>
-            <a:pPr indent="0" lvl="0" marL="0" rtl="0" algn="r">
+            <a:pPr marL="0" lvl="0" indent="0" algn="r" rtl="0">
               <a:spcBef>
                 <a:spcPts val="0"/>
               </a:spcBef>
@@ -5002,11 +4959,11 @@
 </file>
 
 <file path=ppt/slideLayouts/slideLayout8.xml><?xml version="1.0" encoding="utf-8"?>
-<p:sldLayout xmlns:a="http://schemas.openxmlformats.org/drawingml/2006/main" xmlns:r="http://schemas.openxmlformats.org/officeDocument/2006/relationships" xmlns:mc="http://schemas.openxmlformats.org/markup-compatibility/2006" xmlns:mv="urn:schemas-microsoft-com:mac:vml" xmlns:p="http://schemas.openxmlformats.org/presentationml/2006/main" xmlns:c="http://schemas.openxmlformats.org/drawingml/2006/chart" xmlns:dgm="http://schemas.openxmlformats.org/drawingml/2006/diagram" xmlns:o="urn:schemas-microsoft-com:office:office" xmlns:v="urn:schemas-microsoft-com:vml" xmlns:pvml="urn:schemas-microsoft-com:office:powerpoint" xmlns:com="http://schemas.openxmlformats.org/drawingml/2006/compatibility" xmlns:p14="http://schemas.microsoft.com/office/powerpoint/2010/main" xmlns:p15="http://schemas.microsoft.com/office/powerpoint/2012/main" xmlns:ahyp="http://schemas.microsoft.com/office/drawing/2018/hyperlinkcolor" matchingName="Section title and description">
+<p:sldLayout xmlns:a="http://schemas.openxmlformats.org/drawingml/2006/main" xmlns:r="http://schemas.openxmlformats.org/officeDocument/2006/relationships" xmlns:p="http://schemas.openxmlformats.org/presentationml/2006/main" matchingName="Section title and description">
   <p:cSld name="SECTION_TITLE_AND_DESCRIPTION">
     <p:spTree>
       <p:nvGrpSpPr>
-        <p:cNvPr id="35" name="Shape 35"/>
+        <p:cNvPr id="1" name="Shape 35"/>
         <p:cNvGrpSpPr/>
         <p:nvPr/>
       </p:nvGrpSpPr>
@@ -5040,12 +4997,12 @@
           </a:ln>
         </p:spPr>
         <p:txBody>
-          <a:bodyPr anchorCtr="0" anchor="ctr" bIns="91425" lIns="91425" spcFirstLastPara="1" rIns="91425" wrap="square" tIns="91425">
+          <a:bodyPr spcFirstLastPara="1" wrap="square" lIns="91425" tIns="91425" rIns="91425" bIns="91425" anchor="ctr" anchorCtr="0">
             <a:noAutofit/>
           </a:bodyPr>
           <a:lstStyle/>
           <a:p>
-            <a:pPr indent="0" lvl="0" marL="0" rtl="0" algn="l">
+            <a:pPr marL="0" lvl="0" indent="0" algn="l" rtl="0">
               <a:spcBef>
                 <a:spcPts val="0"/>
               </a:spcBef>
@@ -5054,9 +5011,6 @@
               </a:spcAft>
               <a:buNone/>
             </a:pPr>
-            <a:r>
-              <a:t/>
-            </a:r>
             <a:endParaRPr/>
           </a:p>
         </p:txBody>
@@ -5064,7 +5018,9 @@
       <p:sp>
         <p:nvSpPr>
           <p:cNvPr id="37" name="Google Shape;37;p9"/>
-          <p:cNvSpPr txBox="1"/>
+          <p:cNvSpPr txBox="1">
+            <a:spLocks noGrp="1"/>
+          </p:cNvSpPr>
           <p:nvPr>
             <p:ph type="title"/>
           </p:nvPr>
@@ -5079,7 +5035,7 @@
           </a:prstGeom>
         </p:spPr>
         <p:txBody>
-          <a:bodyPr anchorCtr="0" anchor="b" bIns="91425" lIns="91425" spcFirstLastPara="1" rIns="91425" wrap="square" tIns="91425">
+          <a:bodyPr spcFirstLastPara="1" wrap="square" lIns="91425" tIns="91425" rIns="91425" bIns="91425" anchor="b" anchorCtr="0">
             <a:normAutofit/>
           </a:bodyPr>
           <a:lstStyle>
@@ -5183,15 +5139,19 @@
               <a:defRPr sz="4200"/>
             </a:lvl9pPr>
           </a:lstStyle>
-          <a:p/>
+          <a:p>
+            <a:endParaRPr/>
+          </a:p>
         </p:txBody>
       </p:sp>
       <p:sp>
         <p:nvSpPr>
           <p:cNvPr id="38" name="Google Shape;38;p9"/>
-          <p:cNvSpPr txBox="1"/>
+          <p:cNvSpPr txBox="1">
+            <a:spLocks noGrp="1"/>
+          </p:cNvSpPr>
           <p:nvPr>
-            <p:ph idx="1" type="subTitle"/>
+            <p:ph type="subTitle" idx="1"/>
           </p:nvPr>
         </p:nvSpPr>
         <p:spPr>
@@ -5204,7 +5164,7 @@
           </a:prstGeom>
         </p:spPr>
         <p:txBody>
-          <a:bodyPr anchorCtr="0" anchor="t" bIns="91425" lIns="91425" spcFirstLastPara="1" rIns="91425" wrap="square" tIns="91425">
+          <a:bodyPr spcFirstLastPara="1" wrap="square" lIns="91425" tIns="91425" rIns="91425" bIns="91425" anchor="t" anchorCtr="0">
             <a:normAutofit/>
           </a:bodyPr>
           <a:lstStyle>
@@ -5335,15 +5295,19 @@
               <a:defRPr sz="2100"/>
             </a:lvl9pPr>
           </a:lstStyle>
-          <a:p/>
+          <a:p>
+            <a:endParaRPr/>
+          </a:p>
         </p:txBody>
       </p:sp>
       <p:sp>
         <p:nvSpPr>
           <p:cNvPr id="39" name="Google Shape;39;p9"/>
-          <p:cNvSpPr txBox="1"/>
+          <p:cNvSpPr txBox="1">
+            <a:spLocks noGrp="1"/>
+          </p:cNvSpPr>
           <p:nvPr>
-            <p:ph idx="2" type="body"/>
+            <p:ph type="body" idx="2"/>
           </p:nvPr>
         </p:nvSpPr>
         <p:spPr>
@@ -5356,11 +5320,11 @@
           </a:prstGeom>
         </p:spPr>
         <p:txBody>
-          <a:bodyPr anchorCtr="0" anchor="ctr" bIns="91425" lIns="91425" spcFirstLastPara="1" rIns="91425" wrap="square" tIns="91425">
+          <a:bodyPr spcFirstLastPara="1" wrap="square" lIns="91425" tIns="91425" rIns="91425" bIns="91425" anchor="ctr" anchorCtr="0">
             <a:normAutofit/>
           </a:bodyPr>
           <a:lstStyle>
-            <a:lvl1pPr indent="-342900" lvl="0" marL="457200">
+            <a:lvl1pPr marL="457200" lvl="0" indent="-342900">
               <a:spcBef>
                 <a:spcPts val="0"/>
               </a:spcBef>
@@ -5371,7 +5335,7 @@
               <a:buChar char="●"/>
               <a:defRPr/>
             </a:lvl1pPr>
-            <a:lvl2pPr indent="-317500" lvl="1" marL="914400">
+            <a:lvl2pPr marL="914400" lvl="1" indent="-317500">
               <a:spcBef>
                 <a:spcPts val="0"/>
               </a:spcBef>
@@ -5382,7 +5346,7 @@
               <a:buChar char="○"/>
               <a:defRPr/>
             </a:lvl2pPr>
-            <a:lvl3pPr indent="-317500" lvl="2" marL="1371600">
+            <a:lvl3pPr marL="1371600" lvl="2" indent="-317500">
               <a:spcBef>
                 <a:spcPts val="0"/>
               </a:spcBef>
@@ -5393,7 +5357,7 @@
               <a:buChar char="■"/>
               <a:defRPr/>
             </a:lvl3pPr>
-            <a:lvl4pPr indent="-317500" lvl="3" marL="1828800">
+            <a:lvl4pPr marL="1828800" lvl="3" indent="-317500">
               <a:spcBef>
                 <a:spcPts val="0"/>
               </a:spcBef>
@@ -5404,7 +5368,7 @@
               <a:buChar char="●"/>
               <a:defRPr/>
             </a:lvl4pPr>
-            <a:lvl5pPr indent="-317500" lvl="4" marL="2286000">
+            <a:lvl5pPr marL="2286000" lvl="4" indent="-317500">
               <a:spcBef>
                 <a:spcPts val="0"/>
               </a:spcBef>
@@ -5415,7 +5379,7 @@
               <a:buChar char="○"/>
               <a:defRPr/>
             </a:lvl5pPr>
-            <a:lvl6pPr indent="-317500" lvl="5" marL="2743200">
+            <a:lvl6pPr marL="2743200" lvl="5" indent="-317500">
               <a:spcBef>
                 <a:spcPts val="0"/>
               </a:spcBef>
@@ -5426,7 +5390,7 @@
               <a:buChar char="■"/>
               <a:defRPr/>
             </a:lvl6pPr>
-            <a:lvl7pPr indent="-317500" lvl="6" marL="3200400">
+            <a:lvl7pPr marL="3200400" lvl="6" indent="-317500">
               <a:spcBef>
                 <a:spcPts val="0"/>
               </a:spcBef>
@@ -5437,7 +5401,7 @@
               <a:buChar char="●"/>
               <a:defRPr/>
             </a:lvl7pPr>
-            <a:lvl8pPr indent="-317500" lvl="7" marL="3657600">
+            <a:lvl8pPr marL="3657600" lvl="7" indent="-317500">
               <a:spcBef>
                 <a:spcPts val="0"/>
               </a:spcBef>
@@ -5448,7 +5412,7 @@
               <a:buChar char="○"/>
               <a:defRPr/>
             </a:lvl8pPr>
-            <a:lvl9pPr indent="-317500" lvl="8" marL="4114800">
+            <a:lvl9pPr marL="4114800" lvl="8" indent="-317500">
               <a:spcBef>
                 <a:spcPts val="0"/>
               </a:spcBef>
@@ -5460,15 +5424,19 @@
               <a:defRPr/>
             </a:lvl9pPr>
           </a:lstStyle>
-          <a:p/>
+          <a:p>
+            <a:endParaRPr/>
+          </a:p>
         </p:txBody>
       </p:sp>
       <p:sp>
         <p:nvSpPr>
           <p:cNvPr id="40" name="Google Shape;40;p9"/>
-          <p:cNvSpPr txBox="1"/>
+          <p:cNvSpPr txBox="1">
+            <a:spLocks noGrp="1"/>
+          </p:cNvSpPr>
           <p:nvPr>
-            <p:ph idx="12" type="sldNum"/>
+            <p:ph type="sldNum" idx="12"/>
           </p:nvPr>
         </p:nvSpPr>
         <p:spPr>
@@ -5481,7 +5449,7 @@
           </a:prstGeom>
         </p:spPr>
         <p:txBody>
-          <a:bodyPr anchorCtr="0" anchor="ctr" bIns="91425" lIns="91425" spcFirstLastPara="1" rIns="91425" wrap="square" tIns="91425">
+          <a:bodyPr spcFirstLastPara="1" wrap="square" lIns="91425" tIns="91425" rIns="91425" bIns="91425" anchor="ctr" anchorCtr="0">
             <a:normAutofit/>
           </a:bodyPr>
           <a:lstStyle>
@@ -5523,7 +5491,7 @@
             </a:lvl9pPr>
           </a:lstStyle>
           <a:p>
-            <a:pPr indent="0" lvl="0" marL="0" rtl="0" algn="r">
+            <a:pPr marL="0" lvl="0" indent="0" algn="r" rtl="0">
               <a:spcBef>
                 <a:spcPts val="0"/>
               </a:spcBef>
@@ -5549,11 +5517,11 @@
 </file>
 
 <file path=ppt/slideLayouts/slideLayout9.xml><?xml version="1.0" encoding="utf-8"?>
-<p:sldLayout xmlns:a="http://schemas.openxmlformats.org/drawingml/2006/main" xmlns:r="http://schemas.openxmlformats.org/officeDocument/2006/relationships" xmlns:mc="http://schemas.openxmlformats.org/markup-compatibility/2006" xmlns:mv="urn:schemas-microsoft-com:mac:vml" xmlns:p="http://schemas.openxmlformats.org/presentationml/2006/main" xmlns:c="http://schemas.openxmlformats.org/drawingml/2006/chart" xmlns:dgm="http://schemas.openxmlformats.org/drawingml/2006/diagram" xmlns:o="urn:schemas-microsoft-com:office:office" xmlns:v="urn:schemas-microsoft-com:vml" xmlns:pvml="urn:schemas-microsoft-com:office:powerpoint" xmlns:com="http://schemas.openxmlformats.org/drawingml/2006/compatibility" xmlns:p14="http://schemas.microsoft.com/office/powerpoint/2010/main" xmlns:p15="http://schemas.microsoft.com/office/powerpoint/2012/main" xmlns:ahyp="http://schemas.microsoft.com/office/drawing/2018/hyperlinkcolor" matchingName="Caption">
+<p:sldLayout xmlns:a="http://schemas.openxmlformats.org/drawingml/2006/main" xmlns:r="http://schemas.openxmlformats.org/officeDocument/2006/relationships" xmlns:p="http://schemas.openxmlformats.org/presentationml/2006/main" matchingName="Caption">
   <p:cSld name="CAPTION_ONLY">
     <p:spTree>
       <p:nvGrpSpPr>
-        <p:cNvPr id="41" name="Shape 41"/>
+        <p:cNvPr id="1" name="Shape 41"/>
         <p:cNvGrpSpPr/>
         <p:nvPr/>
       </p:nvGrpSpPr>
@@ -5568,9 +5536,11 @@
       <p:sp>
         <p:nvSpPr>
           <p:cNvPr id="42" name="Google Shape;42;p10"/>
-          <p:cNvSpPr txBox="1"/>
+          <p:cNvSpPr txBox="1">
+            <a:spLocks noGrp="1"/>
+          </p:cNvSpPr>
           <p:nvPr>
-            <p:ph idx="1" type="body"/>
+            <p:ph type="body" idx="1"/>
           </p:nvPr>
         </p:nvSpPr>
         <p:spPr>
@@ -5583,11 +5553,11 @@
           </a:prstGeom>
         </p:spPr>
         <p:txBody>
-          <a:bodyPr anchorCtr="0" anchor="ctr" bIns="91425" lIns="91425" spcFirstLastPara="1" rIns="91425" wrap="square" tIns="91425">
+          <a:bodyPr spcFirstLastPara="1" wrap="square" lIns="91425" tIns="91425" rIns="91425" bIns="91425" anchor="ctr" anchorCtr="0">
             <a:normAutofit/>
           </a:bodyPr>
           <a:lstStyle>
-            <a:lvl1pPr indent="-228600" lvl="0" marL="457200">
+            <a:lvl1pPr marL="457200" lvl="0" indent="-228600">
               <a:lnSpc>
                 <a:spcPct val="100000"/>
               </a:lnSpc>
@@ -5602,15 +5572,19 @@
               <a:defRPr/>
             </a:lvl1pPr>
           </a:lstStyle>
-          <a:p/>
+          <a:p>
+            <a:endParaRPr/>
+          </a:p>
         </p:txBody>
       </p:sp>
       <p:sp>
         <p:nvSpPr>
           <p:cNvPr id="43" name="Google Shape;43;p10"/>
-          <p:cNvSpPr txBox="1"/>
+          <p:cNvSpPr txBox="1">
+            <a:spLocks noGrp="1"/>
+          </p:cNvSpPr>
           <p:nvPr>
-            <p:ph idx="12" type="sldNum"/>
+            <p:ph type="sldNum" idx="12"/>
           </p:nvPr>
         </p:nvSpPr>
         <p:spPr>
@@ -5623,7 +5597,7 @@
           </a:prstGeom>
         </p:spPr>
         <p:txBody>
-          <a:bodyPr anchorCtr="0" anchor="ctr" bIns="91425" lIns="91425" spcFirstLastPara="1" rIns="91425" wrap="square" tIns="91425">
+          <a:bodyPr spcFirstLastPara="1" wrap="square" lIns="91425" tIns="91425" rIns="91425" bIns="91425" anchor="ctr" anchorCtr="0">
             <a:normAutofit/>
           </a:bodyPr>
           <a:lstStyle>
@@ -5665,7 +5639,7 @@
             </a:lvl9pPr>
           </a:lstStyle>
           <a:p>
-            <a:pPr indent="0" lvl="0" marL="0" rtl="0" algn="r">
+            <a:pPr marL="0" lvl="0" indent="0" algn="r" rtl="0">
               <a:spcBef>
                 <a:spcPts val="0"/>
               </a:spcBef>
@@ -5691,18 +5665,19 @@
 </file>
 
 <file path=ppt/slideMasters/slideMaster1.xml><?xml version="1.0" encoding="utf-8"?>
-<p:sldMaster xmlns:a="http://schemas.openxmlformats.org/drawingml/2006/main" xmlns:r="http://schemas.openxmlformats.org/officeDocument/2006/relationships" xmlns:mc="http://schemas.openxmlformats.org/markup-compatibility/2006" xmlns:mv="urn:schemas-microsoft-com:mac:vml" xmlns:p="http://schemas.openxmlformats.org/presentationml/2006/main" xmlns:c="http://schemas.openxmlformats.org/drawingml/2006/chart" xmlns:dgm="http://schemas.openxmlformats.org/drawingml/2006/diagram" xmlns:o="urn:schemas-microsoft-com:office:office" xmlns:v="urn:schemas-microsoft-com:vml" xmlns:pvml="urn:schemas-microsoft-com:office:powerpoint" xmlns:com="http://schemas.openxmlformats.org/drawingml/2006/compatibility" xmlns:p14="http://schemas.microsoft.com/office/powerpoint/2010/main" xmlns:p15="http://schemas.microsoft.com/office/powerpoint/2012/main" xmlns:ahyp="http://schemas.microsoft.com/office/drawing/2018/hyperlinkcolor">
+<p:sldMaster xmlns:a="http://schemas.openxmlformats.org/drawingml/2006/main" xmlns:r="http://schemas.openxmlformats.org/officeDocument/2006/relationships" xmlns:p="http://schemas.openxmlformats.org/presentationml/2006/main">
   <p:cSld name="simple-light-2">
     <p:bg>
       <p:bgPr>
         <a:solidFill>
           <a:schemeClr val="lt1"/>
         </a:solidFill>
+        <a:effectLst/>
       </p:bgPr>
     </p:bg>
     <p:spTree>
       <p:nvGrpSpPr>
-        <p:cNvPr id="5" name="Shape 5"/>
+        <p:cNvPr id="1" name="Shape 5"/>
         <p:cNvGrpSpPr/>
         <p:nvPr/>
       </p:nvGrpSpPr>
@@ -5717,7 +5692,9 @@
       <p:sp>
         <p:nvSpPr>
           <p:cNvPr id="6" name="Google Shape;6;p1"/>
-          <p:cNvSpPr txBox="1"/>
+          <p:cNvSpPr txBox="1">
+            <a:spLocks noGrp="1"/>
+          </p:cNvSpPr>
           <p:nvPr>
             <p:ph type="title"/>
           </p:nvPr>
@@ -5736,7 +5713,7 @@
           </a:ln>
         </p:spPr>
         <p:txBody>
-          <a:bodyPr anchorCtr="0" anchor="t" bIns="91425" lIns="91425" spcFirstLastPara="1" rIns="91425" wrap="square" tIns="91425">
+          <a:bodyPr spcFirstLastPara="1" wrap="square" lIns="91425" tIns="91425" rIns="91425" bIns="91425" anchor="t" anchorCtr="0">
             <a:normAutofit/>
           </a:bodyPr>
           <a:lstStyle>
@@ -5903,15 +5880,19 @@
               </a:defRPr>
             </a:lvl9pPr>
           </a:lstStyle>
-          <a:p/>
+          <a:p>
+            <a:endParaRPr/>
+          </a:p>
         </p:txBody>
       </p:sp>
       <p:sp>
         <p:nvSpPr>
           <p:cNvPr id="7" name="Google Shape;7;p1"/>
-          <p:cNvSpPr txBox="1"/>
+          <p:cNvSpPr txBox="1">
+            <a:spLocks noGrp="1"/>
+          </p:cNvSpPr>
           <p:nvPr>
-            <p:ph idx="1" type="body"/>
+            <p:ph type="body" idx="1"/>
           </p:nvPr>
         </p:nvSpPr>
         <p:spPr>
@@ -5928,11 +5909,11 @@
           </a:ln>
         </p:spPr>
         <p:txBody>
-          <a:bodyPr anchorCtr="0" anchor="t" bIns="91425" lIns="91425" spcFirstLastPara="1" rIns="91425" wrap="square" tIns="91425">
+          <a:bodyPr spcFirstLastPara="1" wrap="square" lIns="91425" tIns="91425" rIns="91425" bIns="91425" anchor="t" anchorCtr="0">
             <a:normAutofit/>
           </a:bodyPr>
           <a:lstStyle>
-            <a:lvl1pPr indent="-342900" lvl="0" marL="457200">
+            <a:lvl1pPr marL="457200" lvl="0" indent="-342900">
               <a:lnSpc>
                 <a:spcPct val="115000"/>
               </a:lnSpc>
@@ -5953,7 +5934,7 @@
                 </a:solidFill>
               </a:defRPr>
             </a:lvl1pPr>
-            <a:lvl2pPr indent="-317500" lvl="1" marL="914400">
+            <a:lvl2pPr marL="914400" lvl="1" indent="-317500">
               <a:lnSpc>
                 <a:spcPct val="115000"/>
               </a:lnSpc>
@@ -5974,7 +5955,7 @@
                 </a:solidFill>
               </a:defRPr>
             </a:lvl2pPr>
-            <a:lvl3pPr indent="-317500" lvl="2" marL="1371600">
+            <a:lvl3pPr marL="1371600" lvl="2" indent="-317500">
               <a:lnSpc>
                 <a:spcPct val="115000"/>
               </a:lnSpc>
@@ -5995,7 +5976,7 @@
                 </a:solidFill>
               </a:defRPr>
             </a:lvl3pPr>
-            <a:lvl4pPr indent="-317500" lvl="3" marL="1828800">
+            <a:lvl4pPr marL="1828800" lvl="3" indent="-317500">
               <a:lnSpc>
                 <a:spcPct val="115000"/>
               </a:lnSpc>
@@ -6016,7 +5997,7 @@
                 </a:solidFill>
               </a:defRPr>
             </a:lvl4pPr>
-            <a:lvl5pPr indent="-317500" lvl="4" marL="2286000">
+            <a:lvl5pPr marL="2286000" lvl="4" indent="-317500">
               <a:lnSpc>
                 <a:spcPct val="115000"/>
               </a:lnSpc>
@@ -6037,7 +6018,7 @@
                 </a:solidFill>
               </a:defRPr>
             </a:lvl5pPr>
-            <a:lvl6pPr indent="-317500" lvl="5" marL="2743200">
+            <a:lvl6pPr marL="2743200" lvl="5" indent="-317500">
               <a:lnSpc>
                 <a:spcPct val="115000"/>
               </a:lnSpc>
@@ -6058,7 +6039,7 @@
                 </a:solidFill>
               </a:defRPr>
             </a:lvl6pPr>
-            <a:lvl7pPr indent="-317500" lvl="6" marL="3200400">
+            <a:lvl7pPr marL="3200400" lvl="6" indent="-317500">
               <a:lnSpc>
                 <a:spcPct val="115000"/>
               </a:lnSpc>
@@ -6079,7 +6060,7 @@
                 </a:solidFill>
               </a:defRPr>
             </a:lvl7pPr>
-            <a:lvl8pPr indent="-317500" lvl="7" marL="3657600">
+            <a:lvl8pPr marL="3657600" lvl="7" indent="-317500">
               <a:lnSpc>
                 <a:spcPct val="115000"/>
               </a:lnSpc>
@@ -6100,7 +6081,7 @@
                 </a:solidFill>
               </a:defRPr>
             </a:lvl8pPr>
-            <a:lvl9pPr indent="-317500" lvl="8" marL="4114800">
+            <a:lvl9pPr marL="4114800" lvl="8" indent="-317500">
               <a:lnSpc>
                 <a:spcPct val="115000"/>
               </a:lnSpc>
@@ -6122,15 +6103,19 @@
               </a:defRPr>
             </a:lvl9pPr>
           </a:lstStyle>
-          <a:p/>
+          <a:p>
+            <a:endParaRPr/>
+          </a:p>
         </p:txBody>
       </p:sp>
       <p:sp>
         <p:nvSpPr>
           <p:cNvPr id="8" name="Google Shape;8;p1"/>
-          <p:cNvSpPr txBox="1"/>
+          <p:cNvSpPr txBox="1">
+            <a:spLocks noGrp="1"/>
+          </p:cNvSpPr>
           <p:nvPr>
-            <p:ph idx="12" type="sldNum"/>
+            <p:ph type="sldNum" idx="12"/>
           </p:nvPr>
         </p:nvSpPr>
         <p:spPr>
@@ -6147,7 +6132,7 @@
           </a:ln>
         </p:spPr>
         <p:txBody>
-          <a:bodyPr anchorCtr="0" anchor="ctr" bIns="91425" lIns="91425" spcFirstLastPara="1" rIns="91425" wrap="square" tIns="91425">
+          <a:bodyPr spcFirstLastPara="1" wrap="square" lIns="91425" tIns="91425" rIns="91425" bIns="91425" anchor="ctr" anchorCtr="0">
             <a:normAutofit/>
           </a:bodyPr>
           <a:lstStyle>
@@ -6225,7 +6210,7 @@
             </a:lvl9pPr>
           </a:lstStyle>
           <a:p>
-            <a:pPr indent="0" lvl="0" marL="0" rtl="0" algn="r">
+            <a:pPr marL="0" lvl="0" indent="0" algn="r" rtl="0">
               <a:spcBef>
                 <a:spcPts val="0"/>
               </a:spcBef>
@@ -6244,7 +6229,7 @@
       </p:sp>
     </p:spTree>
   </p:cSld>
-  <p:clrMap accent1="accent1" accent2="accent2" accent3="accent3" accent4="accent4" accent5="accent5" accent6="accent6" bg1="lt1" bg2="dk2" tx1="dk1" tx2="lt2" folHlink="folHlink" hlink="hlink"/>
+  <p:clrMap bg1="lt1" tx1="dk1" bg2="dk2" tx2="lt2" accent1="accent1" accent2="accent2" accent3="accent3" accent4="accent4" accent5="accent5" accent6="accent6" hlink="hlink" folHlink="folHlink"/>
   <p:sldLayoutIdLst>
     <p:sldLayoutId id="2147483648" r:id="rId1"/>
     <p:sldLayoutId id="2147483649" r:id="rId2"/>
@@ -6258,10 +6243,10 @@
     <p:sldLayoutId id="2147483657" r:id="rId10"/>
     <p:sldLayoutId id="2147483658" r:id="rId11"/>
   </p:sldLayoutIdLst>
-  <p:hf dt="0" ftr="0" hdr="0" sldNum="0"/>
+  <p:hf sldNum="0" hdr="0" ftr="0" dt="0"/>
   <p:txStyles>
     <p:titleStyle>
-      <a:defPPr lvl="0" marR="0" rtl="0" algn="l">
+      <a:defPPr marR="0" lvl="0" algn="l" rtl="0">
         <a:lnSpc>
           <a:spcPct val="100000"/>
         </a:lnSpc>
@@ -6272,7 +6257,7 @@
           <a:spcPts val="0"/>
         </a:spcAft>
       </a:defPPr>
-      <a:lvl1pPr lvl="0" marR="0" rtl="0" algn="l">
+      <a:lvl1pPr marR="0" lvl="0" algn="l" rtl="0">
         <a:lnSpc>
           <a:spcPct val="100000"/>
         </a:lnSpc>
@@ -6286,7 +6271,7 @@
           <a:srgbClr val="000000"/>
         </a:buClr>
         <a:buFont typeface="Arial"/>
-        <a:defRPr b="0" i="0" spc="0" sz="1400" u="none" cap="none" strike="noStrike">
+        <a:defRPr sz="1400" b="0" i="0" u="none" strike="noStrike" cap="none" spc="0">
           <a:solidFill>
             <a:srgbClr val="000000"/>
           </a:solidFill>
@@ -6296,7 +6281,7 @@
           <a:sym typeface="Arial"/>
         </a:defRPr>
       </a:lvl1pPr>
-      <a:lvl2pPr lvl="1" marR="0" rtl="0" algn="l">
+      <a:lvl2pPr marR="0" lvl="1" algn="l" rtl="0">
         <a:lnSpc>
           <a:spcPct val="100000"/>
         </a:lnSpc>
@@ -6310,7 +6295,7 @@
           <a:srgbClr val="000000"/>
         </a:buClr>
         <a:buFont typeface="Arial"/>
-        <a:defRPr b="0" i="0" spc="0" sz="1400" u="none" cap="none" strike="noStrike">
+        <a:defRPr sz="1400" b="0" i="0" u="none" strike="noStrike" cap="none" spc="0">
           <a:solidFill>
             <a:srgbClr val="000000"/>
           </a:solidFill>
@@ -6320,7 +6305,7 @@
           <a:sym typeface="Arial"/>
         </a:defRPr>
       </a:lvl2pPr>
-      <a:lvl3pPr lvl="2" marR="0" rtl="0" algn="l">
+      <a:lvl3pPr marR="0" lvl="2" algn="l" rtl="0">
         <a:lnSpc>
           <a:spcPct val="100000"/>
         </a:lnSpc>
@@ -6334,7 +6319,7 @@
           <a:srgbClr val="000000"/>
         </a:buClr>
         <a:buFont typeface="Arial"/>
-        <a:defRPr b="0" i="0" spc="0" sz="1400" u="none" cap="none" strike="noStrike">
+        <a:defRPr sz="1400" b="0" i="0" u="none" strike="noStrike" cap="none" spc="0">
           <a:solidFill>
             <a:srgbClr val="000000"/>
           </a:solidFill>
@@ -6344,7 +6329,7 @@
           <a:sym typeface="Arial"/>
         </a:defRPr>
       </a:lvl3pPr>
-      <a:lvl4pPr lvl="3" marR="0" rtl="0" algn="l">
+      <a:lvl4pPr marR="0" lvl="3" algn="l" rtl="0">
         <a:lnSpc>
           <a:spcPct val="100000"/>
         </a:lnSpc>
@@ -6358,7 +6343,7 @@
           <a:srgbClr val="000000"/>
         </a:buClr>
         <a:buFont typeface="Arial"/>
-        <a:defRPr b="0" i="0" spc="0" sz="1400" u="none" cap="none" strike="noStrike">
+        <a:defRPr sz="1400" b="0" i="0" u="none" strike="noStrike" cap="none" spc="0">
           <a:solidFill>
             <a:srgbClr val="000000"/>
           </a:solidFill>
@@ -6368,7 +6353,7 @@
           <a:sym typeface="Arial"/>
         </a:defRPr>
       </a:lvl4pPr>
-      <a:lvl5pPr lvl="4" marR="0" rtl="0" algn="l">
+      <a:lvl5pPr marR="0" lvl="4" algn="l" rtl="0">
         <a:lnSpc>
           <a:spcPct val="100000"/>
         </a:lnSpc>
@@ -6382,7 +6367,7 @@
           <a:srgbClr val="000000"/>
         </a:buClr>
         <a:buFont typeface="Arial"/>
-        <a:defRPr b="0" i="0" spc="0" sz="1400" u="none" cap="none" strike="noStrike">
+        <a:defRPr sz="1400" b="0" i="0" u="none" strike="noStrike" cap="none" spc="0">
           <a:solidFill>
             <a:srgbClr val="000000"/>
           </a:solidFill>
@@ -6392,7 +6377,7 @@
           <a:sym typeface="Arial"/>
         </a:defRPr>
       </a:lvl5pPr>
-      <a:lvl6pPr lvl="5" marR="0" rtl="0" algn="l">
+      <a:lvl6pPr marR="0" lvl="5" algn="l" rtl="0">
         <a:lnSpc>
           <a:spcPct val="100000"/>
         </a:lnSpc>
@@ -6406,7 +6391,7 @@
           <a:srgbClr val="000000"/>
         </a:buClr>
         <a:buFont typeface="Arial"/>
-        <a:defRPr b="0" i="0" spc="0" sz="1400" u="none" cap="none" strike="noStrike">
+        <a:defRPr sz="1400" b="0" i="0" u="none" strike="noStrike" cap="none" spc="0">
           <a:solidFill>
             <a:srgbClr val="000000"/>
           </a:solidFill>
@@ -6416,7 +6401,7 @@
           <a:sym typeface="Arial"/>
         </a:defRPr>
       </a:lvl6pPr>
-      <a:lvl7pPr lvl="6" marR="0" rtl="0" algn="l">
+      <a:lvl7pPr marR="0" lvl="6" algn="l" rtl="0">
         <a:lnSpc>
           <a:spcPct val="100000"/>
         </a:lnSpc>
@@ -6430,7 +6415,7 @@
           <a:srgbClr val="000000"/>
         </a:buClr>
         <a:buFont typeface="Arial"/>
-        <a:defRPr b="0" i="0" spc="0" sz="1400" u="none" cap="none" strike="noStrike">
+        <a:defRPr sz="1400" b="0" i="0" u="none" strike="noStrike" cap="none" spc="0">
           <a:solidFill>
             <a:srgbClr val="000000"/>
           </a:solidFill>
@@ -6440,7 +6425,7 @@
           <a:sym typeface="Arial"/>
         </a:defRPr>
       </a:lvl7pPr>
-      <a:lvl8pPr lvl="7" marR="0" rtl="0" algn="l">
+      <a:lvl8pPr marR="0" lvl="7" algn="l" rtl="0">
         <a:lnSpc>
           <a:spcPct val="100000"/>
         </a:lnSpc>
@@ -6454,7 +6439,7 @@
           <a:srgbClr val="000000"/>
         </a:buClr>
         <a:buFont typeface="Arial"/>
-        <a:defRPr b="0" i="0" spc="0" sz="1400" u="none" cap="none" strike="noStrike">
+        <a:defRPr sz="1400" b="0" i="0" u="none" strike="noStrike" cap="none" spc="0">
           <a:solidFill>
             <a:srgbClr val="000000"/>
           </a:solidFill>
@@ -6464,7 +6449,7 @@
           <a:sym typeface="Arial"/>
         </a:defRPr>
       </a:lvl8pPr>
-      <a:lvl9pPr lvl="8" marR="0" rtl="0" algn="l">
+      <a:lvl9pPr marR="0" lvl="8" algn="l" rtl="0">
         <a:lnSpc>
           <a:spcPct val="100000"/>
         </a:lnSpc>
@@ -6478,7 +6463,7 @@
           <a:srgbClr val="000000"/>
         </a:buClr>
         <a:buFont typeface="Arial"/>
-        <a:defRPr b="0" i="0" spc="0" sz="1400" u="none" cap="none" strike="noStrike">
+        <a:defRPr sz="1400" b="0" i="0" u="none" strike="noStrike" cap="none" spc="0">
           <a:solidFill>
             <a:srgbClr val="000000"/>
           </a:solidFill>
@@ -6490,7 +6475,7 @@
       </a:lvl9pPr>
     </p:titleStyle>
     <p:bodyStyle>
-      <a:defPPr lvl="0" marR="0" rtl="0" algn="l">
+      <a:defPPr marR="0" lvl="0" algn="l" rtl="0">
         <a:lnSpc>
           <a:spcPct val="100000"/>
         </a:lnSpc>
@@ -6501,7 +6486,7 @@
           <a:spcPts val="0"/>
         </a:spcAft>
       </a:defPPr>
-      <a:lvl1pPr lvl="0" marR="0" rtl="0" algn="l">
+      <a:lvl1pPr marR="0" lvl="0" algn="l" rtl="0">
         <a:lnSpc>
           <a:spcPct val="100000"/>
         </a:lnSpc>
@@ -6515,7 +6500,7 @@
           <a:srgbClr val="000000"/>
         </a:buClr>
         <a:buFont typeface="Arial"/>
-        <a:defRPr b="0" i="0" spc="0" sz="1400" u="none" cap="none" strike="noStrike">
+        <a:defRPr sz="1400" b="0" i="0" u="none" strike="noStrike" cap="none" spc="0">
           <a:solidFill>
             <a:srgbClr val="000000"/>
           </a:solidFill>
@@ -6525,7 +6510,7 @@
           <a:sym typeface="Arial"/>
         </a:defRPr>
       </a:lvl1pPr>
-      <a:lvl2pPr lvl="1" marR="0" rtl="0" algn="l">
+      <a:lvl2pPr marR="0" lvl="1" algn="l" rtl="0">
         <a:lnSpc>
           <a:spcPct val="100000"/>
         </a:lnSpc>
@@ -6539,7 +6524,7 @@
           <a:srgbClr val="000000"/>
         </a:buClr>
         <a:buFont typeface="Arial"/>
-        <a:defRPr b="0" i="0" spc="0" sz="1400" u="none" cap="none" strike="noStrike">
+        <a:defRPr sz="1400" b="0" i="0" u="none" strike="noStrike" cap="none" spc="0">
           <a:solidFill>
             <a:srgbClr val="000000"/>
           </a:solidFill>
@@ -6549,7 +6534,7 @@
           <a:sym typeface="Arial"/>
         </a:defRPr>
       </a:lvl2pPr>
-      <a:lvl3pPr lvl="2" marR="0" rtl="0" algn="l">
+      <a:lvl3pPr marR="0" lvl="2" algn="l" rtl="0">
         <a:lnSpc>
           <a:spcPct val="100000"/>
         </a:lnSpc>
@@ -6563,7 +6548,7 @@
           <a:srgbClr val="000000"/>
         </a:buClr>
         <a:buFont typeface="Arial"/>
-        <a:defRPr b="0" i="0" spc="0" sz="1400" u="none" cap="none" strike="noStrike">
+        <a:defRPr sz="1400" b="0" i="0" u="none" strike="noStrike" cap="none" spc="0">
           <a:solidFill>
             <a:srgbClr val="000000"/>
           </a:solidFill>
@@ -6573,7 +6558,7 @@
           <a:sym typeface="Arial"/>
         </a:defRPr>
       </a:lvl3pPr>
-      <a:lvl4pPr lvl="3" marR="0" rtl="0" algn="l">
+      <a:lvl4pPr marR="0" lvl="3" algn="l" rtl="0">
         <a:lnSpc>
           <a:spcPct val="100000"/>
         </a:lnSpc>
@@ -6587,7 +6572,7 @@
           <a:srgbClr val="000000"/>
         </a:buClr>
         <a:buFont typeface="Arial"/>
-        <a:defRPr b="0" i="0" spc="0" sz="1400" u="none" cap="none" strike="noStrike">
+        <a:defRPr sz="1400" b="0" i="0" u="none" strike="noStrike" cap="none" spc="0">
           <a:solidFill>
             <a:srgbClr val="000000"/>
           </a:solidFill>
@@ -6597,7 +6582,7 @@
           <a:sym typeface="Arial"/>
         </a:defRPr>
       </a:lvl4pPr>
-      <a:lvl5pPr lvl="4" marR="0" rtl="0" algn="l">
+      <a:lvl5pPr marR="0" lvl="4" algn="l" rtl="0">
         <a:lnSpc>
           <a:spcPct val="100000"/>
         </a:lnSpc>
@@ -6611,7 +6596,7 @@
           <a:srgbClr val="000000"/>
         </a:buClr>
         <a:buFont typeface="Arial"/>
-        <a:defRPr b="0" i="0" spc="0" sz="1400" u="none" cap="none" strike="noStrike">
+        <a:defRPr sz="1400" b="0" i="0" u="none" strike="noStrike" cap="none" spc="0">
           <a:solidFill>
             <a:srgbClr val="000000"/>
           </a:solidFill>
@@ -6621,7 +6606,7 @@
           <a:sym typeface="Arial"/>
         </a:defRPr>
       </a:lvl5pPr>
-      <a:lvl6pPr lvl="5" marR="0" rtl="0" algn="l">
+      <a:lvl6pPr marR="0" lvl="5" algn="l" rtl="0">
         <a:lnSpc>
           <a:spcPct val="100000"/>
         </a:lnSpc>
@@ -6635,7 +6620,7 @@
           <a:srgbClr val="000000"/>
         </a:buClr>
         <a:buFont typeface="Arial"/>
-        <a:defRPr b="0" i="0" spc="0" sz="1400" u="none" cap="none" strike="noStrike">
+        <a:defRPr sz="1400" b="0" i="0" u="none" strike="noStrike" cap="none" spc="0">
           <a:solidFill>
             <a:srgbClr val="000000"/>
           </a:solidFill>
@@ -6645,7 +6630,7 @@
           <a:sym typeface="Arial"/>
         </a:defRPr>
       </a:lvl6pPr>
-      <a:lvl7pPr lvl="6" marR="0" rtl="0" algn="l">
+      <a:lvl7pPr marR="0" lvl="6" algn="l" rtl="0">
         <a:lnSpc>
           <a:spcPct val="100000"/>
         </a:lnSpc>
@@ -6659,7 +6644,7 @@
           <a:srgbClr val="000000"/>
         </a:buClr>
         <a:buFont typeface="Arial"/>
-        <a:defRPr b="0" i="0" spc="0" sz="1400" u="none" cap="none" strike="noStrike">
+        <a:defRPr sz="1400" b="0" i="0" u="none" strike="noStrike" cap="none" spc="0">
           <a:solidFill>
             <a:srgbClr val="000000"/>
           </a:solidFill>
@@ -6669,7 +6654,7 @@
           <a:sym typeface="Arial"/>
         </a:defRPr>
       </a:lvl7pPr>
-      <a:lvl8pPr lvl="7" marR="0" rtl="0" algn="l">
+      <a:lvl8pPr marR="0" lvl="7" algn="l" rtl="0">
         <a:lnSpc>
           <a:spcPct val="100000"/>
         </a:lnSpc>
@@ -6683,7 +6668,7 @@
           <a:srgbClr val="000000"/>
         </a:buClr>
         <a:buFont typeface="Arial"/>
-        <a:defRPr b="0" i="0" spc="0" sz="1400" u="none" cap="none" strike="noStrike">
+        <a:defRPr sz="1400" b="0" i="0" u="none" strike="noStrike" cap="none" spc="0">
           <a:solidFill>
             <a:srgbClr val="000000"/>
           </a:solidFill>
@@ -6693,7 +6678,7 @@
           <a:sym typeface="Arial"/>
         </a:defRPr>
       </a:lvl8pPr>
-      <a:lvl9pPr lvl="8" marR="0" rtl="0" algn="l">
+      <a:lvl9pPr marR="0" lvl="8" algn="l" rtl="0">
         <a:lnSpc>
           <a:spcPct val="100000"/>
         </a:lnSpc>
@@ -6707,7 +6692,7 @@
           <a:srgbClr val="000000"/>
         </a:buClr>
         <a:buFont typeface="Arial"/>
-        <a:defRPr b="0" i="0" spc="0" sz="1400" u="none" cap="none" strike="noStrike">
+        <a:defRPr sz="1400" b="0" i="0" u="none" strike="noStrike" cap="none" spc="0">
           <a:solidFill>
             <a:srgbClr val="000000"/>
           </a:solidFill>
@@ -6719,7 +6704,7 @@
       </a:lvl9pPr>
     </p:bodyStyle>
     <p:otherStyle>
-      <a:defPPr lvl="0" marR="0" rtl="0" algn="l">
+      <a:defPPr marR="0" lvl="0" algn="l" rtl="0">
         <a:lnSpc>
           <a:spcPct val="100000"/>
         </a:lnSpc>
@@ -6730,7 +6715,7 @@
           <a:spcPts val="0"/>
         </a:spcAft>
       </a:defPPr>
-      <a:lvl1pPr lvl="0" marR="0" rtl="0" algn="l">
+      <a:lvl1pPr marR="0" lvl="0" algn="l" rtl="0">
         <a:lnSpc>
           <a:spcPct val="100000"/>
         </a:lnSpc>
@@ -6744,7 +6729,7 @@
           <a:srgbClr val="000000"/>
         </a:buClr>
         <a:buFont typeface="Arial"/>
-        <a:defRPr b="0" i="0" spc="0" sz="1400" u="none" cap="none" strike="noStrike">
+        <a:defRPr sz="1400" b="0" i="0" u="none" strike="noStrike" cap="none" spc="0">
           <a:solidFill>
             <a:srgbClr val="000000"/>
           </a:solidFill>
@@ -6754,7 +6739,7 @@
           <a:sym typeface="Arial"/>
         </a:defRPr>
       </a:lvl1pPr>
-      <a:lvl2pPr lvl="1" marR="0" rtl="0" algn="l">
+      <a:lvl2pPr marR="0" lvl="1" algn="l" rtl="0">
         <a:lnSpc>
           <a:spcPct val="100000"/>
         </a:lnSpc>
@@ -6768,7 +6753,7 @@
           <a:srgbClr val="000000"/>
         </a:buClr>
         <a:buFont typeface="Arial"/>
-        <a:defRPr b="0" i="0" spc="0" sz="1400" u="none" cap="none" strike="noStrike">
+        <a:defRPr sz="1400" b="0" i="0" u="none" strike="noStrike" cap="none" spc="0">
           <a:solidFill>
             <a:srgbClr val="000000"/>
           </a:solidFill>
@@ -6778,7 +6763,7 @@
           <a:sym typeface="Arial"/>
         </a:defRPr>
       </a:lvl2pPr>
-      <a:lvl3pPr lvl="2" marR="0" rtl="0" algn="l">
+      <a:lvl3pPr marR="0" lvl="2" algn="l" rtl="0">
         <a:lnSpc>
           <a:spcPct val="100000"/>
         </a:lnSpc>
@@ -6792,7 +6777,7 @@
           <a:srgbClr val="000000"/>
         </a:buClr>
         <a:buFont typeface="Arial"/>
-        <a:defRPr b="0" i="0" spc="0" sz="1400" u="none" cap="none" strike="noStrike">
+        <a:defRPr sz="1400" b="0" i="0" u="none" strike="noStrike" cap="none" spc="0">
           <a:solidFill>
             <a:srgbClr val="000000"/>
           </a:solidFill>
@@ -6802,7 +6787,7 @@
           <a:sym typeface="Arial"/>
         </a:defRPr>
       </a:lvl3pPr>
-      <a:lvl4pPr lvl="3" marR="0" rtl="0" algn="l">
+      <a:lvl4pPr marR="0" lvl="3" algn="l" rtl="0">
         <a:lnSpc>
           <a:spcPct val="100000"/>
         </a:lnSpc>
@@ -6816,7 +6801,7 @@
           <a:srgbClr val="000000"/>
         </a:buClr>
         <a:buFont typeface="Arial"/>
-        <a:defRPr b="0" i="0" spc="0" sz="1400" u="none" cap="none" strike="noStrike">
+        <a:defRPr sz="1400" b="0" i="0" u="none" strike="noStrike" cap="none" spc="0">
           <a:solidFill>
             <a:srgbClr val="000000"/>
           </a:solidFill>
@@ -6826,7 +6811,7 @@
           <a:sym typeface="Arial"/>
         </a:defRPr>
       </a:lvl4pPr>
-      <a:lvl5pPr lvl="4" marR="0" rtl="0" algn="l">
+      <a:lvl5pPr marR="0" lvl="4" algn="l" rtl="0">
         <a:lnSpc>
           <a:spcPct val="100000"/>
         </a:lnSpc>
@@ -6840,7 +6825,7 @@
           <a:srgbClr val="000000"/>
         </a:buClr>
         <a:buFont typeface="Arial"/>
-        <a:defRPr b="0" i="0" spc="0" sz="1400" u="none" cap="none" strike="noStrike">
+        <a:defRPr sz="1400" b="0" i="0" u="none" strike="noStrike" cap="none" spc="0">
           <a:solidFill>
             <a:srgbClr val="000000"/>
           </a:solidFill>
@@ -6850,7 +6835,7 @@
           <a:sym typeface="Arial"/>
         </a:defRPr>
       </a:lvl5pPr>
-      <a:lvl6pPr lvl="5" marR="0" rtl="0" algn="l">
+      <a:lvl6pPr marR="0" lvl="5" algn="l" rtl="0">
         <a:lnSpc>
           <a:spcPct val="100000"/>
         </a:lnSpc>
@@ -6864,7 +6849,7 @@
           <a:srgbClr val="000000"/>
         </a:buClr>
         <a:buFont typeface="Arial"/>
-        <a:defRPr b="0" i="0" spc="0" sz="1400" u="none" cap="none" strike="noStrike">
+        <a:defRPr sz="1400" b="0" i="0" u="none" strike="noStrike" cap="none" spc="0">
           <a:solidFill>
             <a:srgbClr val="000000"/>
           </a:solidFill>
@@ -6874,7 +6859,7 @@
           <a:sym typeface="Arial"/>
         </a:defRPr>
       </a:lvl6pPr>
-      <a:lvl7pPr lvl="6" marR="0" rtl="0" algn="l">
+      <a:lvl7pPr marR="0" lvl="6" algn="l" rtl="0">
         <a:lnSpc>
           <a:spcPct val="100000"/>
         </a:lnSpc>
@@ -6888,7 +6873,7 @@
           <a:srgbClr val="000000"/>
         </a:buClr>
         <a:buFont typeface="Arial"/>
-        <a:defRPr b="0" i="0" spc="0" sz="1400" u="none" cap="none" strike="noStrike">
+        <a:defRPr sz="1400" b="0" i="0" u="none" strike="noStrike" cap="none" spc="0">
           <a:solidFill>
             <a:srgbClr val="000000"/>
           </a:solidFill>
@@ -6898,7 +6883,7 @@
           <a:sym typeface="Arial"/>
         </a:defRPr>
       </a:lvl7pPr>
-      <a:lvl8pPr lvl="7" marR="0" rtl="0" algn="l">
+      <a:lvl8pPr marR="0" lvl="7" algn="l" rtl="0">
         <a:lnSpc>
           <a:spcPct val="100000"/>
         </a:lnSpc>
@@ -6912,7 +6897,7 @@
           <a:srgbClr val="000000"/>
         </a:buClr>
         <a:buFont typeface="Arial"/>
-        <a:defRPr b="0" i="0" spc="0" sz="1400" u="none" cap="none" strike="noStrike">
+        <a:defRPr sz="1400" b="0" i="0" u="none" strike="noStrike" cap="none" spc="0">
           <a:solidFill>
             <a:srgbClr val="000000"/>
           </a:solidFill>
@@ -6922,7 +6907,7 @@
           <a:sym typeface="Arial"/>
         </a:defRPr>
       </a:lvl8pPr>
-      <a:lvl9pPr lvl="8" marR="0" rtl="0" algn="l">
+      <a:lvl9pPr marR="0" lvl="8" algn="l" rtl="0">
         <a:lnSpc>
           <a:spcPct val="100000"/>
         </a:lnSpc>
@@ -6936,7 +6921,7 @@
           <a:srgbClr val="000000"/>
         </a:buClr>
         <a:buFont typeface="Arial"/>
-        <a:defRPr b="0" i="0" spc="0" sz="1400" u="none" cap="none" strike="noStrike">
+        <a:defRPr sz="1400" b="0" i="0" u="none" strike="noStrike" cap="none" spc="0">
           <a:solidFill>
             <a:srgbClr val="000000"/>
           </a:solidFill>
@@ -6952,11 +6937,11 @@
 </file>
 
 <file path=ppt/slides/slide1.xml><?xml version="1.0" encoding="utf-8"?>
-<p:sld xmlns:a="http://schemas.openxmlformats.org/drawingml/2006/main" xmlns:r="http://schemas.openxmlformats.org/officeDocument/2006/relationships" xmlns:mc="http://schemas.openxmlformats.org/markup-compatibility/2006" xmlns:mv="urn:schemas-microsoft-com:mac:vml" xmlns:p="http://schemas.openxmlformats.org/presentationml/2006/main" xmlns:c="http://schemas.openxmlformats.org/drawingml/2006/chart" xmlns:dgm="http://schemas.openxmlformats.org/drawingml/2006/diagram" xmlns:o="urn:schemas-microsoft-com:office:office" xmlns:v="urn:schemas-microsoft-com:vml" xmlns:pvml="urn:schemas-microsoft-com:office:powerpoint" xmlns:com="http://schemas.openxmlformats.org/drawingml/2006/compatibility" xmlns:p14="http://schemas.microsoft.com/office/powerpoint/2010/main" xmlns:p15="http://schemas.microsoft.com/office/powerpoint/2012/main" xmlns:ahyp="http://schemas.microsoft.com/office/drawing/2018/hyperlinkcolor">
+<p:sld xmlns:a="http://schemas.openxmlformats.org/drawingml/2006/main" xmlns:r="http://schemas.openxmlformats.org/officeDocument/2006/relationships" xmlns:p="http://schemas.openxmlformats.org/presentationml/2006/main">
   <p:cSld>
     <p:spTree>
       <p:nvGrpSpPr>
-        <p:cNvPr id="53" name="Shape 53"/>
+        <p:cNvPr id="1" name="Shape 53"/>
         <p:cNvGrpSpPr/>
         <p:nvPr/>
       </p:nvGrpSpPr>
@@ -6988,12 +6973,12 @@
           </a:ln>
         </p:spPr>
         <p:txBody>
-          <a:bodyPr anchorCtr="0" anchor="t" bIns="91425" lIns="91425" spcFirstLastPara="1" rIns="91425" wrap="square" tIns="91425">
+          <a:bodyPr spcFirstLastPara="1" wrap="square" lIns="91425" tIns="91425" rIns="91425" bIns="91425" anchor="t" anchorCtr="0">
             <a:noAutofit/>
           </a:bodyPr>
           <a:lstStyle/>
           <a:p>
-            <a:pPr indent="0" lvl="0" marL="0" rtl="0" algn="l">
+            <a:pPr marL="0" lvl="0" indent="0" algn="l" rtl="0">
               <a:spcBef>
                 <a:spcPts val="0"/>
               </a:spcBef>
@@ -7003,7 +6988,7 @@
               <a:buNone/>
             </a:pPr>
             <a:r>
-              <a:rPr lang="en-GB" sz="2100">
+              <a:rPr lang="en-GB" sz="2100" dirty="0">
                 <a:latin typeface="Google Sans Flex SemiBold"/>
                 <a:ea typeface="Google Sans Flex SemiBold"/>
                 <a:cs typeface="Google Sans Flex SemiBold"/>
@@ -7011,27 +6996,7 @@
               </a:rPr>
               <a:t>Team Details</a:t>
             </a:r>
-            <a:endParaRPr sz="2100">
-              <a:latin typeface="Google Sans Flex SemiBold"/>
-              <a:ea typeface="Google Sans Flex SemiBold"/>
-              <a:cs typeface="Google Sans Flex SemiBold"/>
-              <a:sym typeface="Google Sans Flex SemiBold"/>
-            </a:endParaRPr>
-          </a:p>
-          <a:p>
-            <a:pPr indent="0" lvl="0" marL="0" rtl="0" algn="l">
-              <a:spcBef>
-                <a:spcPts val="0"/>
-              </a:spcBef>
-              <a:spcAft>
-                <a:spcPts val="0"/>
-              </a:spcAft>
-              <a:buNone/>
-            </a:pPr>
-            <a:r>
-              <a:t/>
-            </a:r>
-            <a:endParaRPr sz="1800">
+            <a:endParaRPr sz="1800" dirty="0">
               <a:latin typeface="Google Sans Flex Medium"/>
               <a:ea typeface="Google Sans Flex Medium"/>
               <a:cs typeface="Google Sans Flex Medium"/>
@@ -7039,7 +7004,7 @@
             </a:endParaRPr>
           </a:p>
           <a:p>
-            <a:pPr indent="-342900" lvl="1" marL="914400" rtl="0" algn="l">
+            <a:pPr marL="914400" lvl="1" indent="-342900" algn="l" rtl="0">
               <a:spcBef>
                 <a:spcPts val="0"/>
               </a:spcBef>
@@ -7051,7 +7016,7 @@
               <a:buAutoNum type="alphaLcPeriod"/>
             </a:pPr>
             <a:r>
-              <a:rPr lang="en-GB" sz="1800">
+              <a:rPr lang="en-GB" sz="1800" dirty="0">
                 <a:latin typeface="Google Sans Flex"/>
                 <a:ea typeface="Google Sans Flex"/>
                 <a:cs typeface="Google Sans Flex"/>
@@ -7060,12 +7025,12 @@
               <a:t>Team name: </a:t>
             </a:r>
             <a:r>
-              <a:rPr b="0">
+              <a:rPr b="0" dirty="0">
                 <a:latin typeface="Calibri"/>
               </a:rPr>
               <a:t>  Kairos AI</a:t>
             </a:r>
-            <a:endParaRPr sz="1800">
+            <a:endParaRPr sz="1800" dirty="0">
               <a:latin typeface="Google Sans Flex"/>
               <a:ea typeface="Google Sans Flex"/>
               <a:cs typeface="Google Sans Flex"/>
@@ -7073,7 +7038,7 @@
             </a:endParaRPr>
           </a:p>
           <a:p>
-            <a:pPr indent="-342900" lvl="1" marL="914400" rtl="0" algn="l">
+            <a:pPr marL="914400" lvl="1" indent="-342900" algn="l" rtl="0">
               <a:spcBef>
                 <a:spcPts val="0"/>
               </a:spcBef>
@@ -7085,7 +7050,7 @@
               <a:buAutoNum type="alphaLcPeriod"/>
             </a:pPr>
             <a:r>
-              <a:rPr lang="en-GB" sz="1800">
+              <a:rPr lang="en-GB" sz="1800" dirty="0">
                 <a:latin typeface="Google Sans Flex"/>
                 <a:ea typeface="Google Sans Flex"/>
                 <a:cs typeface="Google Sans Flex"/>
@@ -7094,12 +7059,12 @@
               <a:t>Team leader name: </a:t>
             </a:r>
             <a:r>
-              <a:rPr b="0">
+              <a:rPr b="0" dirty="0">
                 <a:latin typeface="Calibri"/>
               </a:rPr>
               <a:t>  Puneet Pahuja</a:t>
             </a:r>
-            <a:endParaRPr sz="1800">
+            <a:endParaRPr sz="1800" dirty="0">
               <a:latin typeface="Google Sans Flex"/>
               <a:ea typeface="Google Sans Flex"/>
               <a:cs typeface="Google Sans Flex"/>
@@ -7107,7 +7072,7 @@
             </a:endParaRPr>
           </a:p>
           <a:p>
-            <a:pPr indent="-342900" lvl="1" marL="914400" rtl="0" algn="l">
+            <a:pPr marL="914400" lvl="1" indent="-342900" algn="l" rtl="0">
               <a:spcBef>
                 <a:spcPts val="0"/>
               </a:spcBef>
@@ -7119,7 +7084,7 @@
               <a:buAutoNum type="alphaLcPeriod"/>
             </a:pPr>
             <a:r>
-              <a:rPr lang="en-GB" sz="1800">
+              <a:rPr lang="en-GB" sz="1800" dirty="0">
                 <a:latin typeface="Google Sans Flex"/>
                 <a:ea typeface="Google Sans Flex"/>
                 <a:cs typeface="Google Sans Flex"/>
@@ -7128,12 +7093,28 @@
               <a:t>Problem Statement: </a:t>
             </a:r>
             <a:r>
-              <a:rPr b="0">
+              <a:rPr b="0" dirty="0">
                 <a:latin typeface="Calibri"/>
               </a:rPr>
               <a:t>  Manufacturing - Intelligent Operations &amp; Industrial Efficiency: autonomous remote fault diagnosis &amp; self-healing for power devices to cut downtime</a:t>
             </a:r>
-            <a:endParaRPr sz="1800">
+            <a:endParaRPr lang="en-US" b="0" dirty="0">
+              <a:latin typeface="Calibri"/>
+            </a:endParaRPr>
+          </a:p>
+          <a:p>
+            <a:pPr marL="914400" lvl="1" indent="-342900" algn="l" rtl="0">
+              <a:spcBef>
+                <a:spcPts val="0"/>
+              </a:spcBef>
+              <a:spcAft>
+                <a:spcPts val="0"/>
+              </a:spcAft>
+              <a:buSzPts val="1800"/>
+              <a:buFont typeface="Google Sans Flex"/>
+              <a:buAutoNum type="alphaLcPeriod"/>
+            </a:pPr>
+            <a:endParaRPr sz="1800" dirty="0">
               <a:latin typeface="Google Sans Flex"/>
               <a:ea typeface="Google Sans Flex"/>
               <a:cs typeface="Google Sans Flex"/>
@@ -7141,7 +7122,7 @@
             </a:endParaRPr>
           </a:p>
           <a:p>
-            <a:pPr indent="0" lvl="0" marL="0" rtl="0" algn="l">
+            <a:pPr marL="0" lvl="0" indent="0" algn="l" rtl="0">
               <a:spcBef>
                 <a:spcPts val="0"/>
               </a:spcBef>
@@ -7151,32 +7132,12 @@
               <a:buNone/>
             </a:pPr>
             <a:r>
-              <a:t/>
-            </a:r>
-            <a:endParaRPr sz="1800">
-              <a:latin typeface="Google Sans Flex Medium"/>
-              <a:ea typeface="Google Sans Flex Medium"/>
-              <a:cs typeface="Google Sans Flex Medium"/>
-              <a:sym typeface="Google Sans Flex Medium"/>
-            </a:endParaRPr>
-          </a:p>
-          <a:p>
-            <a:pPr indent="0" lvl="0" marL="0" rtl="0" algn="l">
-              <a:spcBef>
-                <a:spcPts val="0"/>
-              </a:spcBef>
-              <a:spcAft>
-                <a:spcPts val="0"/>
-              </a:spcAft>
-              <a:buNone/>
-            </a:pPr>
-            <a:r>
-              <a:rPr>
+              <a:rPr dirty="0">
                 <a:latin typeface="Calibri"/>
               </a:rPr>
               <a:t>Team members:  Khushboo Verma, Anurag Verma</a:t>
             </a:r>
-            <a:endParaRPr sz="1800">
+            <a:endParaRPr sz="1800" dirty="0">
               <a:latin typeface="Google Sans Flex Medium"/>
               <a:ea typeface="Google Sans Flex Medium"/>
               <a:cs typeface="Google Sans Flex Medium"/>
@@ -7223,7 +7184,7 @@
           <a:blip r:embed="rId4">
             <a:alphaModFix/>
           </a:blip>
-          <a:srcRect b="98001" l="0" r="0" t="0"/>
+          <a:srcRect b="98001"/>
           <a:stretch/>
         </p:blipFill>
         <p:spPr>
@@ -7249,305 +7210,11 @@
 </file>
 
 <file path=ppt/slides/slide10.xml><?xml version="1.0" encoding="utf-8"?>
-<p:sld xmlns:a="http://schemas.openxmlformats.org/drawingml/2006/main" xmlns:r="http://schemas.openxmlformats.org/officeDocument/2006/relationships" xmlns:mc="http://schemas.openxmlformats.org/markup-compatibility/2006" xmlns:mv="urn:schemas-microsoft-com:mac:vml" xmlns:p="http://schemas.openxmlformats.org/presentationml/2006/main" xmlns:c="http://schemas.openxmlformats.org/drawingml/2006/chart" xmlns:dgm="http://schemas.openxmlformats.org/drawingml/2006/diagram" xmlns:o="urn:schemas-microsoft-com:office:office" xmlns:v="urn:schemas-microsoft-com:vml" xmlns:pvml="urn:schemas-microsoft-com:office:powerpoint" xmlns:com="http://schemas.openxmlformats.org/drawingml/2006/compatibility" xmlns:p14="http://schemas.microsoft.com/office/powerpoint/2010/main" xmlns:p15="http://schemas.microsoft.com/office/powerpoint/2012/main" xmlns:ahyp="http://schemas.microsoft.com/office/drawing/2018/hyperlinkcolor">
+<p:sld xmlns:a="http://schemas.openxmlformats.org/drawingml/2006/main" xmlns:r="http://schemas.openxmlformats.org/officeDocument/2006/relationships" xmlns:p="http://schemas.openxmlformats.org/presentationml/2006/main">
   <p:cSld>
     <p:spTree>
       <p:nvGrpSpPr>
-        <p:cNvPr id="123" name="Shape 123"/>
-        <p:cNvGrpSpPr/>
-        <p:nvPr/>
-      </p:nvGrpSpPr>
-      <p:grpSpPr>
-        <a:xfrm>
-          <a:off x="0" y="0"/>
-          <a:ext cx="0" cy="0"/>
-          <a:chOff x="0" y="0"/>
-          <a:chExt cx="0" cy="0"/>
-        </a:xfrm>
-      </p:grpSpPr>
-      <p:pic>
-        <p:nvPicPr>
-          <p:cNvPr id="124" name="Google Shape;124;p22" title="Frame 144.png"/>
-          <p:cNvPicPr preferRelativeResize="0"/>
-          <p:nvPr/>
-        </p:nvPicPr>
-        <p:blipFill rotWithShape="1">
-          <a:blip r:embed="rId3">
-            <a:alphaModFix/>
-          </a:blip>
-          <a:srcRect b="98001" l="0" r="0" t="0"/>
-          <a:stretch/>
-        </p:blipFill>
-        <p:spPr>
-          <a:xfrm>
-            <a:off x="0" y="5093562"/>
-            <a:ext cx="9144000" cy="54275"/>
-          </a:xfrm>
-          <a:prstGeom prst="rect">
-            <a:avLst/>
-          </a:prstGeom>
-          <a:noFill/>
-          <a:ln>
-            <a:noFill/>
-          </a:ln>
-        </p:spPr>
-      </p:pic>
-      <p:pic>
-        <p:nvPicPr>
-          <p:cNvPr id="125" name="Google Shape;125;p22" title="Group 427319979.png"/>
-          <p:cNvPicPr preferRelativeResize="0"/>
-          <p:nvPr/>
-        </p:nvPicPr>
-        <p:blipFill>
-          <a:blip r:embed="rId4">
-            <a:alphaModFix/>
-          </a:blip>
-          <a:stretch>
-            <a:fillRect/>
-          </a:stretch>
-        </p:blipFill>
-        <p:spPr>
-          <a:xfrm>
-            <a:off x="0" y="1"/>
-            <a:ext cx="9144000" cy="507359"/>
-          </a:xfrm>
-          <a:prstGeom prst="rect">
-            <a:avLst/>
-          </a:prstGeom>
-          <a:noFill/>
-          <a:ln>
-            <a:noFill/>
-          </a:ln>
-        </p:spPr>
-      </p:pic>
-      <p:sp>
-        <p:nvSpPr>
-          <p:cNvPr id="126" name="Google Shape;126;p22"/>
-          <p:cNvSpPr/>
-          <p:nvPr/>
-        </p:nvSpPr>
-        <p:spPr>
-          <a:xfrm>
-            <a:off x="-29250" y="5071875"/>
-            <a:ext cx="9173400" cy="97800"/>
-          </a:xfrm>
-          <a:prstGeom prst="rect">
-            <a:avLst/>
-          </a:prstGeom>
-          <a:solidFill>
-            <a:schemeClr val="dk1"/>
-          </a:solidFill>
-          <a:ln>
-            <a:noFill/>
-          </a:ln>
-        </p:spPr>
-        <p:txBody>
-          <a:bodyPr anchorCtr="0" anchor="ctr" bIns="91425" lIns="91425" spcFirstLastPara="1" rIns="91425" wrap="square" tIns="91425">
-            <a:noAutofit/>
-          </a:bodyPr>
-          <a:lstStyle/>
-          <a:p>
-            <a:pPr indent="0" lvl="0" marL="0" rtl="0" algn="ctr">
-              <a:spcBef>
-                <a:spcPts val="0"/>
-              </a:spcBef>
-              <a:spcAft>
-                <a:spcPts val="0"/>
-              </a:spcAft>
-              <a:buNone/>
-            </a:pPr>
-            <a:r>
-              <a:t/>
-            </a:r>
-            <a:endParaRPr/>
-          </a:p>
-        </p:txBody>
-      </p:sp>
-      <p:sp>
-        <p:nvSpPr>
-          <p:cNvPr id="127" name="Google Shape;127;p22"/>
-          <p:cNvSpPr txBox="1"/>
-          <p:nvPr/>
-        </p:nvSpPr>
-        <p:spPr>
-          <a:xfrm>
-            <a:off x="265350" y="663825"/>
-            <a:ext cx="8943000" cy="561900"/>
-          </a:xfrm>
-          <a:prstGeom prst="rect">
-            <a:avLst/>
-          </a:prstGeom>
-          <a:noFill/>
-          <a:ln>
-            <a:noFill/>
-          </a:ln>
-        </p:spPr>
-        <p:txBody>
-          <a:bodyPr anchorCtr="0" anchor="t" bIns="91425" lIns="91425" spcFirstLastPara="1" rIns="91425" wrap="square" tIns="91425">
-            <a:noAutofit/>
-          </a:bodyPr>
-          <a:lstStyle/>
-          <a:p>
-            <a:pPr indent="0" lvl="0" marL="0" rtl="0" algn="l">
-              <a:spcBef>
-                <a:spcPts val="0"/>
-              </a:spcBef>
-              <a:spcAft>
-                <a:spcPts val="0"/>
-              </a:spcAft>
-              <a:buNone/>
-            </a:pPr>
-            <a:r>
-              <a:rPr lang="en-GB" sz="1600">
-                <a:latin typeface="Google Sans Flex Medium"/>
-                <a:ea typeface="Google Sans Flex Medium"/>
-                <a:cs typeface="Google Sans Flex Medium"/>
-                <a:sym typeface="Google Sans Flex Medium"/>
-              </a:rPr>
-              <a:t>Estimated implementation cost (optional)</a:t>
-            </a:r>
-            <a:endParaRPr sz="1600">
-              <a:latin typeface="Google Sans Flex Medium"/>
-              <a:ea typeface="Google Sans Flex Medium"/>
-              <a:cs typeface="Google Sans Flex Medium"/>
-              <a:sym typeface="Google Sans Flex Medium"/>
-            </a:endParaRPr>
-          </a:p>
-        </p:txBody>
-      </p:sp>
-      <p:sp>
-        <p:nvSpPr>
-          <p:cNvPr id="128" name="TextBox 127"/>
-          <p:cNvSpPr txBox="1"/>
-          <p:nvPr/>
-        </p:nvSpPr>
-        <p:spPr>
-          <a:xfrm>
-            <a:off x="411480" y="1371600"/>
-            <a:ext cx="8321040" cy="3429000"/>
-          </a:xfrm>
-          <a:prstGeom prst="rect">
-            <a:avLst/>
-          </a:prstGeom>
-          <a:noFill/>
-        </p:spPr>
-        <p:txBody>
-          <a:bodyPr wrap="square">
-            <a:spAutoFit/>
-          </a:bodyPr>
-          <a:lstStyle/>
-          <a:p>
-            <a:pPr algn="l">
-              <a:spcAft>
-                <a:spcPts val="700"/>
-              </a:spcAft>
-            </a:pPr>
-            <a:r>
-              <a:rPr sz="1250" b="0">
-                <a:solidFill>
-                  <a:srgbClr val="202328"/>
-                </a:solidFill>
-                <a:latin typeface="Calibri"/>
-              </a:rPr>
-              <a:t>•  Cloud Run - scale-to-zero; ~$0 when idle, pay only per request.</a:t>
-            </a:r>
-          </a:p>
-          <a:p>
-            <a:pPr algn="l">
-              <a:spcAft>
-                <a:spcPts val="700"/>
-              </a:spcAft>
-            </a:pPr>
-            <a:r>
-              <a:rPr sz="1250" b="0">
-                <a:solidFill>
-                  <a:srgbClr val="202328"/>
-                </a:solidFill>
-                <a:latin typeface="Calibri"/>
-              </a:rPr>
-              <a:t>•  Vertex AI (Gemini + embeddings) - per-token pricing; low for a demo workload.</a:t>
-            </a:r>
-          </a:p>
-          <a:p>
-            <a:pPr algn="l">
-              <a:spcAft>
-                <a:spcPts val="700"/>
-              </a:spcAft>
-            </a:pPr>
-            <a:r>
-              <a:rPr sz="1250" b="0">
-                <a:solidFill>
-                  <a:srgbClr val="202328"/>
-                </a:solidFill>
-                <a:latin typeface="Calibri"/>
-              </a:rPr>
-              <a:t>•  Firestore / Cloud Storage / BigQuery - minimal at demo scale (free-tier friendly).</a:t>
-            </a:r>
-          </a:p>
-          <a:p>
-            <a:pPr algn="l">
-              <a:spcAft>
-                <a:spcPts val="700"/>
-              </a:spcAft>
-            </a:pPr>
-            <a:r>
-              <a:rPr sz="1300" b="1">
-                <a:solidFill>
-                  <a:srgbClr val="174EA6"/>
-                </a:solidFill>
-                <a:latin typeface="Calibri"/>
-              </a:rPr>
-              <a:t>Estimated demo running cost: under $50 / month.</a:t>
-            </a:r>
-          </a:p>
-          <a:p>
-            <a:pPr algn="l">
-              <a:spcAft>
-                <a:spcPts val="700"/>
-              </a:spcAft>
-            </a:pPr>
-            <a:r>
-              <a:rPr sz="1250" b="0">
-                <a:solidFill>
-                  <a:srgbClr val="202328"/>
-                </a:solidFill>
-                <a:latin typeface="Calibri"/>
-              </a:rPr>
-              <a:t>Production cost scales roughly linearly per device and per analysis, with no fixed server cost.</a:t>
-            </a:r>
-          </a:p>
-          <a:p>
-            <a:pPr algn="l">
-              <a:spcAft>
-                <a:spcPts val="600"/>
-              </a:spcAft>
-            </a:pPr>
-            <a:r>
-              <a:rPr sz="1100" b="0">
-                <a:solidFill>
-                  <a:srgbClr val="5F6B7A"/>
-                </a:solidFill>
-                <a:latin typeface="Calibri"/>
-              </a:rPr>
-              <a:t>(Illustrative estimate - actual cost depends on usage, region and data volume.)</a:t>
-            </a:r>
-          </a:p>
-        </p:txBody>
-      </p:sp>
-    </p:spTree>
-  </p:cSld>
-  <p:clrMapOvr>
-    <a:masterClrMapping/>
-  </p:clrMapOvr>
-</p:sld>
-</file>
-
-<file path=ppt/slides/slide11.xml><?xml version="1.0" encoding="utf-8"?>
-<p:sld xmlns:a="http://schemas.openxmlformats.org/drawingml/2006/main" xmlns:r="http://schemas.openxmlformats.org/officeDocument/2006/relationships" xmlns:mc="http://schemas.openxmlformats.org/markup-compatibility/2006" xmlns:mv="urn:schemas-microsoft-com:mac:vml" xmlns:p="http://schemas.openxmlformats.org/presentationml/2006/main" xmlns:c="http://schemas.openxmlformats.org/drawingml/2006/chart" xmlns:dgm="http://schemas.openxmlformats.org/drawingml/2006/diagram" xmlns:o="urn:schemas-microsoft-com:office:office" xmlns:v="urn:schemas-microsoft-com:vml" xmlns:pvml="urn:schemas-microsoft-com:office:powerpoint" xmlns:com="http://schemas.openxmlformats.org/drawingml/2006/compatibility" xmlns:p14="http://schemas.microsoft.com/office/powerpoint/2010/main" xmlns:p15="http://schemas.microsoft.com/office/powerpoint/2012/main" xmlns:ahyp="http://schemas.microsoft.com/office/drawing/2018/hyperlinkcolor">
-  <p:cSld>
-    <p:spTree>
-      <p:nvGrpSpPr>
-        <p:cNvPr id="131" name="Shape 131"/>
+        <p:cNvPr id="1" name="Shape 131"/>
         <p:cNvGrpSpPr/>
         <p:nvPr/>
       </p:nvGrpSpPr>
@@ -7569,7 +7236,7 @@
           <a:blip r:embed="rId3">
             <a:alphaModFix/>
           </a:blip>
-          <a:srcRect b="98001" l="0" r="0" t="0"/>
+          <a:srcRect b="98001"/>
           <a:stretch/>
         </p:blipFill>
         <p:spPr>
@@ -7636,12 +7303,12 @@
           </a:ln>
         </p:spPr>
         <p:txBody>
-          <a:bodyPr anchorCtr="0" anchor="ctr" bIns="91425" lIns="91425" spcFirstLastPara="1" rIns="91425" wrap="square" tIns="91425">
+          <a:bodyPr spcFirstLastPara="1" wrap="square" lIns="91425" tIns="91425" rIns="91425" bIns="91425" anchor="ctr" anchorCtr="0">
             <a:noAutofit/>
           </a:bodyPr>
           <a:lstStyle/>
           <a:p>
-            <a:pPr indent="0" lvl="0" marL="0" rtl="0" algn="ctr">
+            <a:pPr marL="0" lvl="0" indent="0" algn="ctr" rtl="0">
               <a:spcBef>
                 <a:spcPts val="0"/>
               </a:spcBef>
@@ -7650,9 +7317,6 @@
               </a:spcAft>
               <a:buNone/>
             </a:pPr>
-            <a:r>
-              <a:t/>
-            </a:r>
             <a:endParaRPr/>
           </a:p>
         </p:txBody>
@@ -7677,12 +7341,12 @@
           </a:ln>
         </p:spPr>
         <p:txBody>
-          <a:bodyPr anchorCtr="0" anchor="t" bIns="91425" lIns="91425" spcFirstLastPara="1" rIns="91425" wrap="square" tIns="91425">
+          <a:bodyPr spcFirstLastPara="1" wrap="square" lIns="91425" tIns="91425" rIns="91425" bIns="91425" anchor="t" anchorCtr="0">
             <a:noAutofit/>
           </a:bodyPr>
           <a:lstStyle/>
           <a:p>
-            <a:pPr indent="0" lvl="0" marL="0" rtl="0" algn="l">
+            <a:pPr marL="0" lvl="0" indent="0" algn="l" rtl="0">
               <a:spcBef>
                 <a:spcPts val="0"/>
               </a:spcBef>
@@ -7765,12 +7429,12 @@
 </p:sld>
 </file>
 
-<file path=ppt/slides/slide12.xml><?xml version="1.0" encoding="utf-8"?>
-<p:sld xmlns:a="http://schemas.openxmlformats.org/drawingml/2006/main" xmlns:r="http://schemas.openxmlformats.org/officeDocument/2006/relationships" xmlns:mc="http://schemas.openxmlformats.org/markup-compatibility/2006" xmlns:mv="urn:schemas-microsoft-com:mac:vml" xmlns:p="http://schemas.openxmlformats.org/presentationml/2006/main" xmlns:c="http://schemas.openxmlformats.org/drawingml/2006/chart" xmlns:dgm="http://schemas.openxmlformats.org/drawingml/2006/diagram" xmlns:o="urn:schemas-microsoft-com:office:office" xmlns:v="urn:schemas-microsoft-com:vml" xmlns:pvml="urn:schemas-microsoft-com:office:powerpoint" xmlns:com="http://schemas.openxmlformats.org/drawingml/2006/compatibility" xmlns:p14="http://schemas.microsoft.com/office/powerpoint/2010/main" xmlns:p15="http://schemas.microsoft.com/office/powerpoint/2012/main" xmlns:ahyp="http://schemas.microsoft.com/office/drawing/2018/hyperlinkcolor">
+<file path=ppt/slides/slide11.xml><?xml version="1.0" encoding="utf-8"?>
+<p:sld xmlns:a="http://schemas.openxmlformats.org/drawingml/2006/main" xmlns:r="http://schemas.openxmlformats.org/officeDocument/2006/relationships" xmlns:p="http://schemas.openxmlformats.org/presentationml/2006/main">
   <p:cSld>
     <p:spTree>
       <p:nvGrpSpPr>
-        <p:cNvPr id="139" name="Shape 139"/>
+        <p:cNvPr id="1" name="Shape 139"/>
         <p:cNvGrpSpPr/>
         <p:nvPr/>
       </p:nvGrpSpPr>
@@ -7792,7 +7456,7 @@
           <a:blip r:embed="rId3">
             <a:alphaModFix/>
           </a:blip>
-          <a:srcRect b="98001" l="0" r="0" t="0"/>
+          <a:srcRect b="98001"/>
           <a:stretch/>
         </p:blipFill>
         <p:spPr>
@@ -7859,12 +7523,12 @@
           </a:ln>
         </p:spPr>
         <p:txBody>
-          <a:bodyPr anchorCtr="0" anchor="ctr" bIns="91425" lIns="91425" spcFirstLastPara="1" rIns="91425" wrap="square" tIns="91425">
+          <a:bodyPr spcFirstLastPara="1" wrap="square" lIns="91425" tIns="91425" rIns="91425" bIns="91425" anchor="ctr" anchorCtr="0">
             <a:noAutofit/>
           </a:bodyPr>
           <a:lstStyle/>
           <a:p>
-            <a:pPr indent="0" lvl="0" marL="0" rtl="0" algn="ctr">
+            <a:pPr marL="0" lvl="0" indent="0" algn="ctr" rtl="0">
               <a:spcBef>
                 <a:spcPts val="0"/>
               </a:spcBef>
@@ -7873,9 +7537,6 @@
               </a:spcAft>
               <a:buNone/>
             </a:pPr>
-            <a:r>
-              <a:t/>
-            </a:r>
             <a:endParaRPr/>
           </a:p>
         </p:txBody>
@@ -7900,12 +7561,12 @@
           </a:ln>
         </p:spPr>
         <p:txBody>
-          <a:bodyPr anchorCtr="0" anchor="t" bIns="91425" lIns="91425" spcFirstLastPara="1" rIns="91425" wrap="square" tIns="91425">
+          <a:bodyPr spcFirstLastPara="1" wrap="square" lIns="91425" tIns="91425" rIns="91425" bIns="91425" anchor="t" anchorCtr="0">
             <a:noAutofit/>
           </a:bodyPr>
           <a:lstStyle/>
           <a:p>
-            <a:pPr indent="0" lvl="0" marL="0" rtl="0" algn="l">
+            <a:pPr marL="0" lvl="0" indent="0" algn="l" rtl="0">
               <a:spcBef>
                 <a:spcPts val="0"/>
               </a:spcBef>
@@ -8043,12 +7704,12 @@
 </p:sld>
 </file>
 
-<file path=ppt/slides/slide13.xml><?xml version="1.0" encoding="utf-8"?>
-<p:sld xmlns:a="http://schemas.openxmlformats.org/drawingml/2006/main" xmlns:r="http://schemas.openxmlformats.org/officeDocument/2006/relationships" xmlns:mc="http://schemas.openxmlformats.org/markup-compatibility/2006" xmlns:mv="urn:schemas-microsoft-com:mac:vml" xmlns:p="http://schemas.openxmlformats.org/presentationml/2006/main" xmlns:c="http://schemas.openxmlformats.org/drawingml/2006/chart" xmlns:dgm="http://schemas.openxmlformats.org/drawingml/2006/diagram" xmlns:o="urn:schemas-microsoft-com:office:office" xmlns:v="urn:schemas-microsoft-com:vml" xmlns:pvml="urn:schemas-microsoft-com:office:powerpoint" xmlns:com="http://schemas.openxmlformats.org/drawingml/2006/compatibility" xmlns:p14="http://schemas.microsoft.com/office/powerpoint/2010/main" xmlns:p15="http://schemas.microsoft.com/office/powerpoint/2012/main" xmlns:ahyp="http://schemas.microsoft.com/office/drawing/2018/hyperlinkcolor">
+<file path=ppt/slides/slide12.xml><?xml version="1.0" encoding="utf-8"?>
+<p:sld xmlns:a="http://schemas.openxmlformats.org/drawingml/2006/main" xmlns:r="http://schemas.openxmlformats.org/officeDocument/2006/relationships" xmlns:p="http://schemas.openxmlformats.org/presentationml/2006/main">
   <p:cSld>
     <p:spTree>
       <p:nvGrpSpPr>
-        <p:cNvPr id="147" name="Shape 147"/>
+        <p:cNvPr id="1" name="Shape 147"/>
         <p:cNvGrpSpPr/>
         <p:nvPr/>
       </p:nvGrpSpPr>
@@ -8070,7 +7731,7 @@
           <a:blip r:embed="rId3">
             <a:alphaModFix/>
           </a:blip>
-          <a:srcRect b="98001" l="0" r="0" t="0"/>
+          <a:srcRect b="98001"/>
           <a:stretch/>
         </p:blipFill>
         <p:spPr>
@@ -8137,12 +7798,12 @@
           </a:ln>
         </p:spPr>
         <p:txBody>
-          <a:bodyPr anchorCtr="0" anchor="ctr" bIns="91425" lIns="91425" spcFirstLastPara="1" rIns="91425" wrap="square" tIns="91425">
+          <a:bodyPr spcFirstLastPara="1" wrap="square" lIns="91425" tIns="91425" rIns="91425" bIns="91425" anchor="ctr" anchorCtr="0">
             <a:noAutofit/>
           </a:bodyPr>
           <a:lstStyle/>
           <a:p>
-            <a:pPr indent="0" lvl="0" marL="0" rtl="0" algn="ctr">
+            <a:pPr marL="0" lvl="0" indent="0" algn="ctr" rtl="0">
               <a:spcBef>
                 <a:spcPts val="0"/>
               </a:spcBef>
@@ -8151,9 +7812,6 @@
               </a:spcAft>
               <a:buNone/>
             </a:pPr>
-            <a:r>
-              <a:t/>
-            </a:r>
             <a:endParaRPr/>
           </a:p>
         </p:txBody>
@@ -8178,12 +7836,12 @@
           </a:ln>
         </p:spPr>
         <p:txBody>
-          <a:bodyPr anchorCtr="0" anchor="t" bIns="91425" lIns="91425" spcFirstLastPara="1" rIns="91425" wrap="square" tIns="91425">
+          <a:bodyPr spcFirstLastPara="1" wrap="square" lIns="91425" tIns="91425" rIns="91425" bIns="91425" anchor="t" anchorCtr="0">
             <a:noAutofit/>
           </a:bodyPr>
           <a:lstStyle/>
           <a:p>
-            <a:pPr indent="0" lvl="0" marL="0" rtl="0" algn="l">
+            <a:pPr marL="0" lvl="0" indent="0" algn="l" rtl="0">
               <a:spcBef>
                 <a:spcPts val="0"/>
               </a:spcBef>
@@ -8337,12 +7995,12 @@
 </p:sld>
 </file>
 
-<file path=ppt/slides/slide14.xml><?xml version="1.0" encoding="utf-8"?>
-<p:sld xmlns:a="http://schemas.openxmlformats.org/drawingml/2006/main" xmlns:r="http://schemas.openxmlformats.org/officeDocument/2006/relationships" xmlns:mc="http://schemas.openxmlformats.org/markup-compatibility/2006" xmlns:mv="urn:schemas-microsoft-com:mac:vml" xmlns:p="http://schemas.openxmlformats.org/presentationml/2006/main" xmlns:c="http://schemas.openxmlformats.org/drawingml/2006/chart" xmlns:dgm="http://schemas.openxmlformats.org/drawingml/2006/diagram" xmlns:o="urn:schemas-microsoft-com:office:office" xmlns:v="urn:schemas-microsoft-com:vml" xmlns:pvml="urn:schemas-microsoft-com:office:powerpoint" xmlns:com="http://schemas.openxmlformats.org/drawingml/2006/compatibility" xmlns:p14="http://schemas.microsoft.com/office/powerpoint/2010/main" xmlns:p15="http://schemas.microsoft.com/office/powerpoint/2012/main" xmlns:ahyp="http://schemas.microsoft.com/office/drawing/2018/hyperlinkcolor">
+<file path=ppt/slides/slide13.xml><?xml version="1.0" encoding="utf-8"?>
+<p:sld xmlns:a="http://schemas.openxmlformats.org/drawingml/2006/main" xmlns:r="http://schemas.openxmlformats.org/officeDocument/2006/relationships" xmlns:p="http://schemas.openxmlformats.org/presentationml/2006/main">
   <p:cSld>
     <p:spTree>
       <p:nvGrpSpPr>
-        <p:cNvPr id="155" name="Shape 155"/>
+        <p:cNvPr id="1" name="Shape 155"/>
         <p:cNvGrpSpPr/>
         <p:nvPr/>
       </p:nvGrpSpPr>
@@ -8364,7 +8022,7 @@
           <a:blip r:embed="rId3">
             <a:alphaModFix/>
           </a:blip>
-          <a:srcRect b="98001" l="0" r="0" t="0"/>
+          <a:srcRect b="98001"/>
           <a:stretch/>
         </p:blipFill>
         <p:spPr>
@@ -8431,12 +8089,12 @@
           </a:ln>
         </p:spPr>
         <p:txBody>
-          <a:bodyPr anchorCtr="0" anchor="ctr" bIns="91425" lIns="91425" spcFirstLastPara="1" rIns="91425" wrap="square" tIns="91425">
+          <a:bodyPr spcFirstLastPara="1" wrap="square" lIns="91425" tIns="91425" rIns="91425" bIns="91425" anchor="ctr" anchorCtr="0">
             <a:noAutofit/>
           </a:bodyPr>
           <a:lstStyle/>
           <a:p>
-            <a:pPr indent="0" lvl="0" marL="0" rtl="0" algn="ctr">
+            <a:pPr marL="0" lvl="0" indent="0" algn="ctr" rtl="0">
               <a:spcBef>
                 <a:spcPts val="0"/>
               </a:spcBef>
@@ -8445,9 +8103,6 @@
               </a:spcAft>
               <a:buNone/>
             </a:pPr>
-            <a:r>
-              <a:t/>
-            </a:r>
             <a:endParaRPr/>
           </a:p>
         </p:txBody>
@@ -8472,12 +8127,12 @@
           </a:ln>
         </p:spPr>
         <p:txBody>
-          <a:bodyPr anchorCtr="0" anchor="t" bIns="91425" lIns="91425" spcFirstLastPara="1" rIns="91425" wrap="square" tIns="91425">
+          <a:bodyPr spcFirstLastPara="1" wrap="square" lIns="91425" tIns="91425" rIns="91425" bIns="91425" anchor="t" anchorCtr="0">
             <a:noAutofit/>
           </a:bodyPr>
           <a:lstStyle/>
           <a:p>
-            <a:pPr indent="0" lvl="0" marL="0" rtl="0" algn="l">
+            <a:pPr marL="0" lvl="0" indent="0" algn="l" rtl="0">
               <a:spcBef>
                 <a:spcPts val="0"/>
               </a:spcBef>
@@ -8513,7 +8168,7 @@
         <p:spPr>
           <a:xfrm>
             <a:off x="411480" y="1371600"/>
-            <a:ext cx="8321040" cy="3429000"/>
+            <a:ext cx="8321040" cy="1856919"/>
           </a:xfrm>
           <a:prstGeom prst="rect">
             <a:avLst/>
@@ -8529,6 +8184,77 @@
             <a:pPr algn="l">
               <a:spcAft>
                 <a:spcPts val="400"/>
+              </a:spcAft>
+            </a:pPr>
+            <a:r>
+              <a:rPr sz="1300" b="1" dirty="0">
+                <a:solidFill>
+                  <a:srgbClr val="174EA6"/>
+                </a:solidFill>
+                <a:latin typeface="Calibri"/>
+              </a:rPr>
+              <a:t>GitHub Public Repository:</a:t>
+            </a:r>
+          </a:p>
+          <a:p>
+            <a:pPr algn="l">
+              <a:spcAft>
+                <a:spcPts val="1200"/>
+              </a:spcAft>
+            </a:pPr>
+            <a:r>
+              <a:rPr sz="1300" b="0" dirty="0">
+                <a:solidFill>
+                  <a:srgbClr val="202328"/>
+                </a:solidFill>
+                <a:latin typeface="Calibri"/>
+              </a:rPr>
+              <a:t>https://github.com/puneetpahuja-eaton/kairos-ai</a:t>
+            </a:r>
+          </a:p>
+          <a:p>
+            <a:pPr algn="l">
+              <a:spcAft>
+                <a:spcPts val="400"/>
+              </a:spcAft>
+            </a:pPr>
+            <a:r>
+              <a:rPr sz="1300" b="1" dirty="0">
+                <a:solidFill>
+                  <a:srgbClr val="174EA6"/>
+                </a:solidFill>
+                <a:latin typeface="Calibri"/>
+              </a:rPr>
+              <a:t>Demo Video (3 minutes):</a:t>
+            </a:r>
+          </a:p>
+          <a:p>
+            <a:pPr>
+              <a:spcAft>
+                <a:spcPts val="1200"/>
+              </a:spcAft>
+            </a:pPr>
+            <a:r>
+              <a:rPr lang="en-US" sz="1300">
+                <a:solidFill>
+                  <a:srgbClr val="5F6B7A"/>
+                </a:solidFill>
+                <a:latin typeface="Calibri"/>
+                <a:hlinkClick r:id="rId5"/>
+              </a:rPr>
+              <a:t>https://drive.google.com/drive/u/1/folders/1-W7LAChaeTS-c9UKNpMyIzHEPwEwOItQ</a:t>
+            </a:r>
+            <a:endParaRPr lang="en-US" sz="1300">
+              <a:solidFill>
+                <a:srgbClr val="5F6B7A"/>
+              </a:solidFill>
+              <a:latin typeface="Calibri"/>
+            </a:endParaRPr>
+          </a:p>
+          <a:p>
+            <a:pPr>
+              <a:spcAft>
+                <a:spcPts val="1200"/>
               </a:spcAft>
             </a:pPr>
             <a:r>
@@ -8538,81 +8264,26 @@
                 </a:solidFill>
                 <a:latin typeface="Calibri"/>
               </a:rPr>
-              <a:t>GitHub Public Repository:</a:t>
+              <a:t>Final </a:t>
             </a:r>
-          </a:p>
-          <a:p>
-            <a:pPr algn="l">
-              <a:spcAft>
-                <a:spcPts val="1200"/>
-              </a:spcAft>
-            </a:pPr>
             <a:r>
-              <a:rPr sz="1300" b="0">
-                <a:solidFill>
-                  <a:srgbClr val="202328"/>
-                </a:solidFill>
-                <a:latin typeface="Calibri"/>
-              </a:rPr>
-              <a:t>https://github.com/puneetpahuja-eaton/kairos-ai</a:t>
-            </a:r>
-          </a:p>
-          <a:p>
-            <a:pPr algn="l">
-              <a:spcAft>
-                <a:spcPts val="400"/>
-              </a:spcAft>
-            </a:pPr>
-            <a:r>
-              <a:rPr sz="1300" b="1">
+              <a:rPr sz="1300" b="1" dirty="0">
                 <a:solidFill>
                   <a:srgbClr val="174EA6"/>
                 </a:solidFill>
                 <a:latin typeface="Calibri"/>
               </a:rPr>
-              <a:t>Demo Video (3 minutes):</a:t>
+              <a:t>Product (deployed on Cloud Run):</a:t>
             </a:r>
           </a:p>
           <a:p>
             <a:pPr algn="l">
               <a:spcAft>
-                <a:spcPts val="1200"/>
+                <a:spcPts val="600"/>
               </a:spcAft>
             </a:pPr>
             <a:r>
-              <a:rPr sz="1300" b="0">
-                <a:solidFill>
-                  <a:srgbClr val="5F6B7A"/>
-                </a:solidFill>
-                <a:latin typeface="Calibri"/>
-              </a:rPr>
-              <a:t>[Add your public YouTube / Vimeo / Drive link here after recording]</a:t>
-            </a:r>
-          </a:p>
-          <a:p>
-            <a:pPr algn="l">
-              <a:spcAft>
-                <a:spcPts val="400"/>
-              </a:spcAft>
-            </a:pPr>
-            <a:r>
-              <a:rPr sz="1300" b="1">
-                <a:solidFill>
-                  <a:srgbClr val="174EA6"/>
-                </a:solidFill>
-                <a:latin typeface="Calibri"/>
-              </a:rPr>
-              <a:t>Final Product (deployed on Cloud Run):</a:t>
-            </a:r>
-          </a:p>
-          <a:p>
-            <a:pPr algn="l">
-              <a:spcAft>
-                <a:spcPts val="600"/>
-              </a:spcAft>
-            </a:pPr>
-            <a:r>
-              <a:rPr sz="1300" b="0">
+              <a:rPr sz="1300" b="0" dirty="0">
                 <a:solidFill>
                   <a:srgbClr val="202328"/>
                 </a:solidFill>
@@ -8631,135 +8302,12 @@
 </p:sld>
 </file>
 
-<file path=ppt/slides/slide15.xml><?xml version="1.0" encoding="utf-8"?>
-<p:sld xmlns:a="http://schemas.openxmlformats.org/drawingml/2006/main" xmlns:r="http://schemas.openxmlformats.org/officeDocument/2006/relationships" xmlns:mc="http://schemas.openxmlformats.org/markup-compatibility/2006" xmlns:mv="urn:schemas-microsoft-com:mac:vml" xmlns:p="http://schemas.openxmlformats.org/presentationml/2006/main" xmlns:c="http://schemas.openxmlformats.org/drawingml/2006/chart" xmlns:dgm="http://schemas.openxmlformats.org/drawingml/2006/diagram" xmlns:o="urn:schemas-microsoft-com:office:office" xmlns:v="urn:schemas-microsoft-com:vml" xmlns:pvml="urn:schemas-microsoft-com:office:powerpoint" xmlns:com="http://schemas.openxmlformats.org/drawingml/2006/compatibility" xmlns:p14="http://schemas.microsoft.com/office/powerpoint/2010/main" xmlns:p15="http://schemas.microsoft.com/office/powerpoint/2012/main" xmlns:ahyp="http://schemas.microsoft.com/office/drawing/2018/hyperlinkcolor">
+<file path=ppt/slides/slide14.xml><?xml version="1.0" encoding="utf-8"?>
+<p:sld xmlns:a="http://schemas.openxmlformats.org/drawingml/2006/main" xmlns:r="http://schemas.openxmlformats.org/officeDocument/2006/relationships" xmlns:p="http://schemas.openxmlformats.org/presentationml/2006/main">
   <p:cSld>
     <p:spTree>
       <p:nvGrpSpPr>
-        <p:cNvPr id="163" name="Shape 163"/>
-        <p:cNvGrpSpPr/>
-        <p:nvPr/>
-      </p:nvGrpSpPr>
-      <p:grpSpPr>
-        <a:xfrm>
-          <a:off x="0" y="0"/>
-          <a:ext cx="0" cy="0"/>
-          <a:chOff x="0" y="0"/>
-          <a:chExt cx="0" cy="0"/>
-        </a:xfrm>
-      </p:grpSpPr>
-      <p:pic>
-        <p:nvPicPr>
-          <p:cNvPr id="164" name="Google Shape;164;p27" title="Frame 144.png"/>
-          <p:cNvPicPr preferRelativeResize="0"/>
-          <p:nvPr/>
-        </p:nvPicPr>
-        <p:blipFill rotWithShape="1">
-          <a:blip r:embed="rId3">
-            <a:alphaModFix/>
-          </a:blip>
-          <a:srcRect b="98001" l="0" r="0" t="0"/>
-          <a:stretch/>
-        </p:blipFill>
-        <p:spPr>
-          <a:xfrm>
-            <a:off x="0" y="5093562"/>
-            <a:ext cx="9144000" cy="54275"/>
-          </a:xfrm>
-          <a:prstGeom prst="rect">
-            <a:avLst/>
-          </a:prstGeom>
-          <a:noFill/>
-          <a:ln>
-            <a:noFill/>
-          </a:ln>
-        </p:spPr>
-      </p:pic>
-      <p:pic>
-        <p:nvPicPr>
-          <p:cNvPr id="165" name="Google Shape;165;p27" title="Group 427319979.png"/>
-          <p:cNvPicPr preferRelativeResize="0"/>
-          <p:nvPr/>
-        </p:nvPicPr>
-        <p:blipFill>
-          <a:blip r:embed="rId4">
-            <a:alphaModFix/>
-          </a:blip>
-          <a:stretch>
-            <a:fillRect/>
-          </a:stretch>
-        </p:blipFill>
-        <p:spPr>
-          <a:xfrm>
-            <a:off x="0" y="1"/>
-            <a:ext cx="9144000" cy="507359"/>
-          </a:xfrm>
-          <a:prstGeom prst="rect">
-            <a:avLst/>
-          </a:prstGeom>
-          <a:noFill/>
-          <a:ln>
-            <a:noFill/>
-          </a:ln>
-        </p:spPr>
-      </p:pic>
-      <p:sp>
-        <p:nvSpPr>
-          <p:cNvPr id="166" name="Google Shape;166;p27"/>
-          <p:cNvSpPr/>
-          <p:nvPr/>
-        </p:nvSpPr>
-        <p:spPr>
-          <a:xfrm>
-            <a:off x="-29250" y="5071875"/>
-            <a:ext cx="9173400" cy="97800"/>
-          </a:xfrm>
-          <a:prstGeom prst="rect">
-            <a:avLst/>
-          </a:prstGeom>
-          <a:solidFill>
-            <a:schemeClr val="dk1"/>
-          </a:solidFill>
-          <a:ln>
-            <a:noFill/>
-          </a:ln>
-        </p:spPr>
-        <p:txBody>
-          <a:bodyPr anchorCtr="0" anchor="ctr" bIns="91425" lIns="91425" spcFirstLastPara="1" rIns="91425" wrap="square" tIns="91425">
-            <a:noAutofit/>
-          </a:bodyPr>
-          <a:lstStyle/>
-          <a:p>
-            <a:pPr indent="0" lvl="0" marL="0" rtl="0" algn="ctr">
-              <a:spcBef>
-                <a:spcPts val="0"/>
-              </a:spcBef>
-              <a:spcAft>
-                <a:spcPts val="0"/>
-              </a:spcAft>
-              <a:buNone/>
-            </a:pPr>
-            <a:r>
-              <a:t/>
-            </a:r>
-            <a:endParaRPr/>
-          </a:p>
-        </p:txBody>
-      </p:sp>
-    </p:spTree>
-  </p:cSld>
-  <p:clrMapOvr>
-    <a:masterClrMapping/>
-  </p:clrMapOvr>
-</p:sld>
-</file>
-
-<file path=ppt/slides/slide16.xml><?xml version="1.0" encoding="utf-8"?>
-<p:sld xmlns:a="http://schemas.openxmlformats.org/drawingml/2006/main" xmlns:r="http://schemas.openxmlformats.org/officeDocument/2006/relationships" xmlns:mc="http://schemas.openxmlformats.org/markup-compatibility/2006" xmlns:mv="urn:schemas-microsoft-com:mac:vml" xmlns:p="http://schemas.openxmlformats.org/presentationml/2006/main" xmlns:c="http://schemas.openxmlformats.org/drawingml/2006/chart" xmlns:dgm="http://schemas.openxmlformats.org/drawingml/2006/diagram" xmlns:o="urn:schemas-microsoft-com:office:office" xmlns:v="urn:schemas-microsoft-com:vml" xmlns:pvml="urn:schemas-microsoft-com:office:powerpoint" xmlns:com="http://schemas.openxmlformats.org/drawingml/2006/compatibility" xmlns:p14="http://schemas.microsoft.com/office/powerpoint/2010/main" xmlns:p15="http://schemas.microsoft.com/office/powerpoint/2012/main" xmlns:ahyp="http://schemas.microsoft.com/office/drawing/2018/hyperlinkcolor">
-  <p:cSld>
-    <p:spTree>
-      <p:nvGrpSpPr>
-        <p:cNvPr id="170" name="Shape 170"/>
+        <p:cNvPr id="1" name="Shape 170"/>
         <p:cNvGrpSpPr/>
         <p:nvPr/>
       </p:nvGrpSpPr>
@@ -8781,7 +8329,7 @@
           <a:blip r:embed="rId3">
             <a:alphaModFix/>
           </a:blip>
-          <a:srcRect b="98001" l="0" r="0" t="0"/>
+          <a:srcRect b="98001"/>
           <a:stretch/>
         </p:blipFill>
         <p:spPr>
@@ -8835,268 +8383,11 @@
 </file>
 
 <file path=ppt/slides/slide2.xml><?xml version="1.0" encoding="utf-8"?>
-<p:sld xmlns:a="http://schemas.openxmlformats.org/drawingml/2006/main" xmlns:r="http://schemas.openxmlformats.org/officeDocument/2006/relationships" xmlns:mc="http://schemas.openxmlformats.org/markup-compatibility/2006" xmlns:mv="urn:schemas-microsoft-com:mac:vml" xmlns:p="http://schemas.openxmlformats.org/presentationml/2006/main" xmlns:c="http://schemas.openxmlformats.org/drawingml/2006/chart" xmlns:dgm="http://schemas.openxmlformats.org/drawingml/2006/diagram" xmlns:o="urn:schemas-microsoft-com:office:office" xmlns:v="urn:schemas-microsoft-com:vml" xmlns:pvml="urn:schemas-microsoft-com:office:powerpoint" xmlns:com="http://schemas.openxmlformats.org/drawingml/2006/compatibility" xmlns:p14="http://schemas.microsoft.com/office/powerpoint/2010/main" xmlns:p15="http://schemas.microsoft.com/office/powerpoint/2012/main" xmlns:ahyp="http://schemas.microsoft.com/office/drawing/2018/hyperlinkcolor">
+<p:sld xmlns:a="http://schemas.openxmlformats.org/drawingml/2006/main" xmlns:r="http://schemas.openxmlformats.org/officeDocument/2006/relationships" xmlns:p="http://schemas.openxmlformats.org/presentationml/2006/main">
   <p:cSld>
     <p:spTree>
       <p:nvGrpSpPr>
-        <p:cNvPr id="60" name="Shape 60"/>
-        <p:cNvGrpSpPr/>
-        <p:nvPr/>
-      </p:nvGrpSpPr>
-      <p:grpSpPr>
-        <a:xfrm>
-          <a:off x="0" y="0"/>
-          <a:ext cx="0" cy="0"/>
-          <a:chOff x="0" y="0"/>
-          <a:chExt cx="0" cy="0"/>
-        </a:xfrm>
-      </p:grpSpPr>
-      <p:pic>
-        <p:nvPicPr>
-          <p:cNvPr id="61" name="Google Shape;61;p14" title="Frame 144.png"/>
-          <p:cNvPicPr preferRelativeResize="0"/>
-          <p:nvPr/>
-        </p:nvPicPr>
-        <p:blipFill rotWithShape="1">
-          <a:blip r:embed="rId3">
-            <a:alphaModFix/>
-          </a:blip>
-          <a:srcRect b="98001" l="0" r="0" t="0"/>
-          <a:stretch/>
-        </p:blipFill>
-        <p:spPr>
-          <a:xfrm>
-            <a:off x="0" y="5093562"/>
-            <a:ext cx="9144000" cy="54275"/>
-          </a:xfrm>
-          <a:prstGeom prst="rect">
-            <a:avLst/>
-          </a:prstGeom>
-          <a:noFill/>
-          <a:ln>
-            <a:noFill/>
-          </a:ln>
-        </p:spPr>
-      </p:pic>
-      <p:sp>
-        <p:nvSpPr>
-          <p:cNvPr id="62" name="Google Shape;62;p14"/>
-          <p:cNvSpPr/>
-          <p:nvPr/>
-        </p:nvSpPr>
-        <p:spPr>
-          <a:xfrm>
-            <a:off x="0" y="0"/>
-            <a:ext cx="9144000" cy="5143500"/>
-          </a:xfrm>
-          <a:prstGeom prst="rect">
-            <a:avLst/>
-          </a:prstGeom>
-          <a:solidFill>
-            <a:schemeClr val="dk1"/>
-          </a:solidFill>
-          <a:ln>
-            <a:noFill/>
-          </a:ln>
-        </p:spPr>
-        <p:txBody>
-          <a:bodyPr anchorCtr="0" anchor="ctr" bIns="91425" lIns="91425" spcFirstLastPara="1" rIns="91425" wrap="square" tIns="91425">
-            <a:noAutofit/>
-          </a:bodyPr>
-          <a:lstStyle/>
-          <a:p>
-            <a:pPr indent="0" lvl="0" marL="0" rtl="0" algn="ctr">
-              <a:spcBef>
-                <a:spcPts val="0"/>
-              </a:spcBef>
-              <a:spcAft>
-                <a:spcPts val="0"/>
-              </a:spcAft>
-              <a:buNone/>
-            </a:pPr>
-            <a:r>
-              <a:t/>
-            </a:r>
-            <a:endParaRPr/>
-          </a:p>
-        </p:txBody>
-      </p:sp>
-      <p:sp>
-        <p:nvSpPr>
-          <p:cNvPr id="63" name="Google Shape;63;p14"/>
-          <p:cNvSpPr txBox="1"/>
-          <p:nvPr/>
-        </p:nvSpPr>
-        <p:spPr>
-          <a:xfrm>
-            <a:off x="5092475" y="1968750"/>
-            <a:ext cx="3311400" cy="1206000"/>
-          </a:xfrm>
-          <a:prstGeom prst="rect">
-            <a:avLst/>
-          </a:prstGeom>
-          <a:noFill/>
-          <a:ln>
-            <a:noFill/>
-          </a:ln>
-        </p:spPr>
-        <p:txBody>
-          <a:bodyPr anchorCtr="0" anchor="t" bIns="91425" lIns="91425" spcFirstLastPara="1" rIns="91425" wrap="square" tIns="91425">
-            <a:noAutofit/>
-          </a:bodyPr>
-          <a:lstStyle/>
-          <a:p>
-            <a:pPr indent="0" lvl="0" marL="0" rtl="0" algn="l">
-              <a:spcBef>
-                <a:spcPts val="0"/>
-              </a:spcBef>
-              <a:spcAft>
-                <a:spcPts val="0"/>
-              </a:spcAft>
-              <a:buNone/>
-            </a:pPr>
-            <a:r>
-              <a:rPr lang="en-GB" sz="1100">
-                <a:solidFill>
-                  <a:schemeClr val="lt1"/>
-                </a:solidFill>
-                <a:latin typeface="Google Sans Flex Medium"/>
-                <a:ea typeface="Google Sans Flex Medium"/>
-                <a:cs typeface="Google Sans Flex Medium"/>
-                <a:sym typeface="Google Sans Flex Medium"/>
-              </a:rPr>
-              <a:t>Note:</a:t>
-            </a:r>
-            <a:r>
-              <a:rPr lang="en-GB" sz="1100">
-                <a:solidFill>
-                  <a:schemeClr val="lt1"/>
-                </a:solidFill>
-                <a:latin typeface="Google Sans Flex"/>
-                <a:ea typeface="Google Sans Flex"/>
-                <a:cs typeface="Google Sans Flex"/>
-                <a:sym typeface="Google Sans Flex"/>
-              </a:rPr>
-              <a:t> Please download this template to make your edits and submit the final version.</a:t>
-            </a:r>
-            <a:br>
-              <a:rPr lang="en-GB" sz="1100">
-                <a:solidFill>
-                  <a:schemeClr val="lt1"/>
-                </a:solidFill>
-                <a:latin typeface="Google Sans Flex"/>
-                <a:ea typeface="Google Sans Flex"/>
-                <a:cs typeface="Google Sans Flex"/>
-                <a:sym typeface="Google Sans Flex"/>
-              </a:rPr>
-            </a:br>
-            <a:br>
-              <a:rPr lang="en-GB" sz="1100">
-                <a:solidFill>
-                  <a:schemeClr val="lt1"/>
-                </a:solidFill>
-                <a:latin typeface="Google Sans Flex"/>
-                <a:ea typeface="Google Sans Flex"/>
-                <a:cs typeface="Google Sans Flex"/>
-                <a:sym typeface="Google Sans Flex"/>
-              </a:rPr>
-            </a:br>
-            <a:r>
-              <a:rPr lang="en-GB" sz="1100">
-                <a:solidFill>
-                  <a:schemeClr val="lt1"/>
-                </a:solidFill>
-                <a:latin typeface="Google Sans Flex"/>
-                <a:ea typeface="Google Sans Flex"/>
-                <a:cs typeface="Google Sans Flex"/>
-                <a:sym typeface="Google Sans Flex"/>
-              </a:rPr>
-              <a:t>To download, go to File &gt; Download &gt; Microsoft PowerPoint (.PPTX). Kindly refrain from sending edit requests.</a:t>
-            </a:r>
-            <a:endParaRPr sz="1100">
-              <a:solidFill>
-                <a:schemeClr val="lt1"/>
-              </a:solidFill>
-              <a:latin typeface="Google Sans Flex"/>
-              <a:ea typeface="Google Sans Flex"/>
-              <a:cs typeface="Google Sans Flex"/>
-              <a:sym typeface="Google Sans Flex"/>
-            </a:endParaRPr>
-          </a:p>
-          <a:p>
-            <a:pPr indent="0" lvl="0" marL="0" rtl="0" algn="l">
-              <a:spcBef>
-                <a:spcPts val="0"/>
-              </a:spcBef>
-              <a:spcAft>
-                <a:spcPts val="0"/>
-              </a:spcAft>
-              <a:buNone/>
-            </a:pPr>
-            <a:r>
-              <a:t/>
-            </a:r>
-            <a:endParaRPr sz="1100">
-              <a:solidFill>
-                <a:schemeClr val="lt1"/>
-              </a:solidFill>
-              <a:latin typeface="Google Sans Flex"/>
-              <a:ea typeface="Google Sans Flex"/>
-              <a:cs typeface="Google Sans Flex"/>
-              <a:sym typeface="Google Sans Flex"/>
-            </a:endParaRPr>
-          </a:p>
-        </p:txBody>
-      </p:sp>
-      <p:pic>
-        <p:nvPicPr>
-          <p:cNvPr id="64" name="Google Shape;64;p14"/>
-          <p:cNvPicPr preferRelativeResize="0"/>
-          <p:nvPr/>
-        </p:nvPicPr>
-        <p:blipFill>
-          <a:blip r:embed="rId4">
-            <a:alphaModFix/>
-          </a:blip>
-          <a:stretch>
-            <a:fillRect/>
-          </a:stretch>
-        </p:blipFill>
-        <p:spPr>
-          <a:xfrm>
-            <a:off x="924203" y="1194675"/>
-            <a:ext cx="3604250" cy="2621725"/>
-          </a:xfrm>
-          <a:prstGeom prst="rect">
-            <a:avLst/>
-          </a:prstGeom>
-          <a:noFill/>
-          <a:ln>
-            <a:noFill/>
-          </a:ln>
-          <a:effectLst>
-            <a:outerShdw blurRad="971550" rotWithShape="0" algn="bl" dir="5400000" dist="19050">
-              <a:schemeClr val="lt1">
-                <a:alpha val="50000"/>
-              </a:schemeClr>
-            </a:outerShdw>
-          </a:effectLst>
-        </p:spPr>
-      </p:pic>
-    </p:spTree>
-  </p:cSld>
-  <p:clrMapOvr>
-    <a:masterClrMapping/>
-  </p:clrMapOvr>
-</p:sld>
-</file>
-
-<file path=ppt/slides/slide3.xml><?xml version="1.0" encoding="utf-8"?>
-<p:sld xmlns:a="http://schemas.openxmlformats.org/drawingml/2006/main" xmlns:r="http://schemas.openxmlformats.org/officeDocument/2006/relationships" xmlns:mc="http://schemas.openxmlformats.org/markup-compatibility/2006" xmlns:mv="urn:schemas-microsoft-com:mac:vml" xmlns:p="http://schemas.openxmlformats.org/presentationml/2006/main" xmlns:c="http://schemas.openxmlformats.org/drawingml/2006/chart" xmlns:dgm="http://schemas.openxmlformats.org/drawingml/2006/diagram" xmlns:o="urn:schemas-microsoft-com:office:office" xmlns:v="urn:schemas-microsoft-com:vml" xmlns:pvml="urn:schemas-microsoft-com:office:powerpoint" xmlns:com="http://schemas.openxmlformats.org/drawingml/2006/compatibility" xmlns:p14="http://schemas.microsoft.com/office/powerpoint/2010/main" xmlns:p15="http://schemas.microsoft.com/office/powerpoint/2012/main" xmlns:ahyp="http://schemas.microsoft.com/office/drawing/2018/hyperlinkcolor">
-  <p:cSld>
-    <p:spTree>
-      <p:nvGrpSpPr>
-        <p:cNvPr id="68" name="Shape 68"/>
+        <p:cNvPr id="1" name="Shape 68"/>
         <p:cNvGrpSpPr/>
         <p:nvPr/>
       </p:nvGrpSpPr>
@@ -9158,12 +8449,12 @@
           </a:ln>
         </p:spPr>
         <p:txBody>
-          <a:bodyPr anchorCtr="0" anchor="ctr" bIns="91425" lIns="91425" spcFirstLastPara="1" rIns="91425" wrap="square" tIns="91425">
+          <a:bodyPr spcFirstLastPara="1" wrap="square" lIns="91425" tIns="91425" rIns="91425" bIns="91425" anchor="ctr" anchorCtr="0">
             <a:noAutofit/>
           </a:bodyPr>
           <a:lstStyle/>
           <a:p>
-            <a:pPr indent="0" lvl="0" marL="0" rtl="0" algn="ctr">
+            <a:pPr marL="0" lvl="0" indent="0" algn="ctr" rtl="0">
               <a:spcBef>
                 <a:spcPts val="0"/>
               </a:spcBef>
@@ -9172,9 +8463,6 @@
               </a:spcAft>
               <a:buNone/>
             </a:pPr>
-            <a:r>
-              <a:t/>
-            </a:r>
             <a:endParaRPr/>
           </a:p>
         </p:txBody>
@@ -9199,12 +8487,12 @@
           </a:ln>
         </p:spPr>
         <p:txBody>
-          <a:bodyPr anchorCtr="0" anchor="t" bIns="91425" lIns="91425" spcFirstLastPara="1" rIns="91425" wrap="square" tIns="91425">
+          <a:bodyPr spcFirstLastPara="1" wrap="square" lIns="91425" tIns="91425" rIns="91425" bIns="91425" anchor="t" anchorCtr="0">
             <a:noAutofit/>
           </a:bodyPr>
           <a:lstStyle/>
           <a:p>
-            <a:pPr indent="0" lvl="0" marL="0" rtl="0" algn="l">
+            <a:pPr marL="0" lvl="0" indent="0" algn="l" rtl="0">
               <a:spcBef>
                 <a:spcPts val="0"/>
               </a:spcBef>
@@ -9326,12 +8614,12 @@
 </p:sld>
 </file>
 
-<file path=ppt/slides/slide4.xml><?xml version="1.0" encoding="utf-8"?>
-<p:sld xmlns:a="http://schemas.openxmlformats.org/drawingml/2006/main" xmlns:r="http://schemas.openxmlformats.org/officeDocument/2006/relationships" xmlns:mc="http://schemas.openxmlformats.org/markup-compatibility/2006" xmlns:mv="urn:schemas-microsoft-com:mac:vml" xmlns:p="http://schemas.openxmlformats.org/presentationml/2006/main" xmlns:c="http://schemas.openxmlformats.org/drawingml/2006/chart" xmlns:dgm="http://schemas.openxmlformats.org/drawingml/2006/diagram" xmlns:o="urn:schemas-microsoft-com:office:office" xmlns:v="urn:schemas-microsoft-com:vml" xmlns:pvml="urn:schemas-microsoft-com:office:powerpoint" xmlns:com="http://schemas.openxmlformats.org/drawingml/2006/compatibility" xmlns:p14="http://schemas.microsoft.com/office/powerpoint/2010/main" xmlns:p15="http://schemas.microsoft.com/office/powerpoint/2012/main" xmlns:ahyp="http://schemas.microsoft.com/office/drawing/2018/hyperlinkcolor">
+<file path=ppt/slides/slide3.xml><?xml version="1.0" encoding="utf-8"?>
+<p:sld xmlns:a="http://schemas.openxmlformats.org/drawingml/2006/main" xmlns:r="http://schemas.openxmlformats.org/officeDocument/2006/relationships" xmlns:p="http://schemas.openxmlformats.org/presentationml/2006/main">
   <p:cSld>
     <p:spTree>
       <p:nvGrpSpPr>
-        <p:cNvPr id="75" name="Shape 75"/>
+        <p:cNvPr id="1" name="Shape 75"/>
         <p:cNvGrpSpPr/>
         <p:nvPr/>
       </p:nvGrpSpPr>
@@ -9353,7 +8641,7 @@
           <a:blip r:embed="rId3">
             <a:alphaModFix/>
           </a:blip>
-          <a:srcRect b="98001" l="0" r="0" t="0"/>
+          <a:srcRect b="98001"/>
           <a:stretch/>
         </p:blipFill>
         <p:spPr>
@@ -9420,12 +8708,12 @@
           </a:ln>
         </p:spPr>
         <p:txBody>
-          <a:bodyPr anchorCtr="0" anchor="ctr" bIns="91425" lIns="91425" spcFirstLastPara="1" rIns="91425" wrap="square" tIns="91425">
+          <a:bodyPr spcFirstLastPara="1" wrap="square" lIns="91425" tIns="91425" rIns="91425" bIns="91425" anchor="ctr" anchorCtr="0">
             <a:noAutofit/>
           </a:bodyPr>
           <a:lstStyle/>
           <a:p>
-            <a:pPr indent="0" lvl="0" marL="0" rtl="0" algn="ctr">
+            <a:pPr marL="0" lvl="0" indent="0" algn="ctr" rtl="0">
               <a:spcBef>
                 <a:spcPts val="0"/>
               </a:spcBef>
@@ -9434,9 +8722,6 @@
               </a:spcAft>
               <a:buNone/>
             </a:pPr>
-            <a:r>
-              <a:t/>
-            </a:r>
             <a:endParaRPr/>
           </a:p>
         </p:txBody>
@@ -9461,12 +8746,12 @@
           </a:ln>
         </p:spPr>
         <p:txBody>
-          <a:bodyPr anchorCtr="0" anchor="t" bIns="91425" lIns="91425" spcFirstLastPara="1" rIns="91425" wrap="square" tIns="91425">
+          <a:bodyPr spcFirstLastPara="1" wrap="square" lIns="91425" tIns="91425" rIns="91425" bIns="91425" anchor="t" anchorCtr="0">
             <a:noAutofit/>
           </a:bodyPr>
           <a:lstStyle/>
           <a:p>
-            <a:pPr indent="0" lvl="0" marL="0" rtl="0" algn="l">
+            <a:pPr marL="0" lvl="0" indent="0" algn="l" rtl="0">
               <a:spcBef>
                 <a:spcPts val="0"/>
               </a:spcBef>
@@ -9628,12 +8913,12 @@
 </p:sld>
 </file>
 
-<file path=ppt/slides/slide5.xml><?xml version="1.0" encoding="utf-8"?>
-<p:sld xmlns:a="http://schemas.openxmlformats.org/drawingml/2006/main" xmlns:r="http://schemas.openxmlformats.org/officeDocument/2006/relationships" xmlns:mc="http://schemas.openxmlformats.org/markup-compatibility/2006" xmlns:mv="urn:schemas-microsoft-com:mac:vml" xmlns:p="http://schemas.openxmlformats.org/presentationml/2006/main" xmlns:c="http://schemas.openxmlformats.org/drawingml/2006/chart" xmlns:dgm="http://schemas.openxmlformats.org/drawingml/2006/diagram" xmlns:o="urn:schemas-microsoft-com:office:office" xmlns:v="urn:schemas-microsoft-com:vml" xmlns:pvml="urn:schemas-microsoft-com:office:powerpoint" xmlns:com="http://schemas.openxmlformats.org/drawingml/2006/compatibility" xmlns:p14="http://schemas.microsoft.com/office/powerpoint/2010/main" xmlns:p15="http://schemas.microsoft.com/office/powerpoint/2012/main" xmlns:ahyp="http://schemas.microsoft.com/office/drawing/2018/hyperlinkcolor">
+<file path=ppt/slides/slide4.xml><?xml version="1.0" encoding="utf-8"?>
+<p:sld xmlns:a="http://schemas.openxmlformats.org/drawingml/2006/main" xmlns:r="http://schemas.openxmlformats.org/officeDocument/2006/relationships" xmlns:p="http://schemas.openxmlformats.org/presentationml/2006/main">
   <p:cSld>
     <p:spTree>
       <p:nvGrpSpPr>
-        <p:cNvPr id="83" name="Shape 83"/>
+        <p:cNvPr id="1" name="Shape 83"/>
         <p:cNvGrpSpPr/>
         <p:nvPr/>
       </p:nvGrpSpPr>
@@ -9655,7 +8940,7 @@
           <a:blip r:embed="rId3">
             <a:alphaModFix/>
           </a:blip>
-          <a:srcRect b="98001" l="0" r="0" t="0"/>
+          <a:srcRect b="98001"/>
           <a:stretch/>
         </p:blipFill>
         <p:spPr>
@@ -9722,12 +9007,12 @@
           </a:ln>
         </p:spPr>
         <p:txBody>
-          <a:bodyPr anchorCtr="0" anchor="ctr" bIns="91425" lIns="91425" spcFirstLastPara="1" rIns="91425" wrap="square" tIns="91425">
+          <a:bodyPr spcFirstLastPara="1" wrap="square" lIns="91425" tIns="91425" rIns="91425" bIns="91425" anchor="ctr" anchorCtr="0">
             <a:noAutofit/>
           </a:bodyPr>
           <a:lstStyle/>
           <a:p>
-            <a:pPr indent="0" lvl="0" marL="0" rtl="0" algn="ctr">
+            <a:pPr marL="0" lvl="0" indent="0" algn="ctr" rtl="0">
               <a:spcBef>
                 <a:spcPts val="0"/>
               </a:spcBef>
@@ -9736,9 +9021,6 @@
               </a:spcAft>
               <a:buNone/>
             </a:pPr>
-            <a:r>
-              <a:t/>
-            </a:r>
             <a:endParaRPr/>
           </a:p>
         </p:txBody>
@@ -9763,12 +9045,12 @@
           </a:ln>
         </p:spPr>
         <p:txBody>
-          <a:bodyPr anchorCtr="0" anchor="t" bIns="91425" lIns="91425" spcFirstLastPara="1" rIns="91425" wrap="square" tIns="91425">
+          <a:bodyPr spcFirstLastPara="1" wrap="square" lIns="91425" tIns="91425" rIns="91425" bIns="91425" anchor="t" anchorCtr="0">
             <a:noAutofit/>
           </a:bodyPr>
           <a:lstStyle/>
           <a:p>
-            <a:pPr indent="0" lvl="0" marL="0" rtl="0" algn="l">
+            <a:pPr marL="0" lvl="0" indent="0" algn="l" rtl="0">
               <a:spcBef>
                 <a:spcPts val="0"/>
               </a:spcBef>
@@ -9954,12 +9236,12 @@
 </p:sld>
 </file>
 
-<file path=ppt/slides/slide6.xml><?xml version="1.0" encoding="utf-8"?>
-<p:sld xmlns:a="http://schemas.openxmlformats.org/drawingml/2006/main" xmlns:r="http://schemas.openxmlformats.org/officeDocument/2006/relationships" xmlns:mc="http://schemas.openxmlformats.org/markup-compatibility/2006" xmlns:mv="urn:schemas-microsoft-com:mac:vml" xmlns:p="http://schemas.openxmlformats.org/presentationml/2006/main" xmlns:c="http://schemas.openxmlformats.org/drawingml/2006/chart" xmlns:dgm="http://schemas.openxmlformats.org/drawingml/2006/diagram" xmlns:o="urn:schemas-microsoft-com:office:office" xmlns:v="urn:schemas-microsoft-com:vml" xmlns:pvml="urn:schemas-microsoft-com:office:powerpoint" xmlns:com="http://schemas.openxmlformats.org/drawingml/2006/compatibility" xmlns:p14="http://schemas.microsoft.com/office/powerpoint/2010/main" xmlns:p15="http://schemas.microsoft.com/office/powerpoint/2012/main" xmlns:ahyp="http://schemas.microsoft.com/office/drawing/2018/hyperlinkcolor">
+<file path=ppt/slides/slide5.xml><?xml version="1.0" encoding="utf-8"?>
+<p:sld xmlns:a="http://schemas.openxmlformats.org/drawingml/2006/main" xmlns:r="http://schemas.openxmlformats.org/officeDocument/2006/relationships" xmlns:p="http://schemas.openxmlformats.org/presentationml/2006/main">
   <p:cSld>
     <p:spTree>
       <p:nvGrpSpPr>
-        <p:cNvPr id="91" name="Shape 91"/>
+        <p:cNvPr id="1" name="Shape 91"/>
         <p:cNvGrpSpPr/>
         <p:nvPr/>
       </p:nvGrpSpPr>
@@ -9981,7 +9263,7 @@
           <a:blip r:embed="rId3">
             <a:alphaModFix/>
           </a:blip>
-          <a:srcRect b="98001" l="0" r="0" t="0"/>
+          <a:srcRect b="98001"/>
           <a:stretch/>
         </p:blipFill>
         <p:spPr>
@@ -10048,12 +9330,12 @@
           </a:ln>
         </p:spPr>
         <p:txBody>
-          <a:bodyPr anchorCtr="0" anchor="ctr" bIns="91425" lIns="91425" spcFirstLastPara="1" rIns="91425" wrap="square" tIns="91425">
+          <a:bodyPr spcFirstLastPara="1" wrap="square" lIns="91425" tIns="91425" rIns="91425" bIns="91425" anchor="ctr" anchorCtr="0">
             <a:noAutofit/>
           </a:bodyPr>
           <a:lstStyle/>
           <a:p>
-            <a:pPr indent="0" lvl="0" marL="0" rtl="0" algn="ctr">
+            <a:pPr marL="0" lvl="0" indent="0" algn="ctr" rtl="0">
               <a:spcBef>
                 <a:spcPts val="0"/>
               </a:spcBef>
@@ -10062,9 +9344,6 @@
               </a:spcAft>
               <a:buNone/>
             </a:pPr>
-            <a:r>
-              <a:t/>
-            </a:r>
             <a:endParaRPr/>
           </a:p>
         </p:txBody>
@@ -10089,12 +9368,12 @@
           </a:ln>
         </p:spPr>
         <p:txBody>
-          <a:bodyPr anchorCtr="0" anchor="t" bIns="91425" lIns="91425" spcFirstLastPara="1" rIns="91425" wrap="square" tIns="91425">
+          <a:bodyPr spcFirstLastPara="1" wrap="square" lIns="91425" tIns="91425" rIns="91425" bIns="91425" anchor="t" anchorCtr="0">
             <a:noAutofit/>
           </a:bodyPr>
           <a:lstStyle/>
           <a:p>
-            <a:pPr indent="0" lvl="0" marL="0" rtl="0" algn="l">
+            <a:pPr marL="0" lvl="0" indent="0" algn="l" rtl="0">
               <a:spcBef>
                 <a:spcPts val="0"/>
               </a:spcBef>
@@ -10153,12 +9432,12 @@
 </p:sld>
 </file>
 
-<file path=ppt/slides/slide7.xml><?xml version="1.0" encoding="utf-8"?>
-<p:sld xmlns:a="http://schemas.openxmlformats.org/drawingml/2006/main" xmlns:r="http://schemas.openxmlformats.org/officeDocument/2006/relationships" xmlns:mc="http://schemas.openxmlformats.org/markup-compatibility/2006" xmlns:mv="urn:schemas-microsoft-com:mac:vml" xmlns:p="http://schemas.openxmlformats.org/presentationml/2006/main" xmlns:c="http://schemas.openxmlformats.org/drawingml/2006/chart" xmlns:dgm="http://schemas.openxmlformats.org/drawingml/2006/diagram" xmlns:o="urn:schemas-microsoft-com:office:office" xmlns:v="urn:schemas-microsoft-com:vml" xmlns:pvml="urn:schemas-microsoft-com:office:powerpoint" xmlns:com="http://schemas.openxmlformats.org/drawingml/2006/compatibility" xmlns:p14="http://schemas.microsoft.com/office/powerpoint/2010/main" xmlns:p15="http://schemas.microsoft.com/office/powerpoint/2012/main" xmlns:ahyp="http://schemas.microsoft.com/office/drawing/2018/hyperlinkcolor">
+<file path=ppt/slides/slide6.xml><?xml version="1.0" encoding="utf-8"?>
+<p:sld xmlns:a="http://schemas.openxmlformats.org/drawingml/2006/main" xmlns:r="http://schemas.openxmlformats.org/officeDocument/2006/relationships" xmlns:p="http://schemas.openxmlformats.org/presentationml/2006/main">
   <p:cSld>
     <p:spTree>
       <p:nvGrpSpPr>
-        <p:cNvPr id="99" name="Shape 99"/>
+        <p:cNvPr id="1" name="Shape 99"/>
         <p:cNvGrpSpPr/>
         <p:nvPr/>
       </p:nvGrpSpPr>
@@ -10180,7 +9459,7 @@
           <a:blip r:embed="rId3">
             <a:alphaModFix/>
           </a:blip>
-          <a:srcRect b="98001" l="0" r="0" t="0"/>
+          <a:srcRect b="98001"/>
           <a:stretch/>
         </p:blipFill>
         <p:spPr>
@@ -10247,12 +9526,12 @@
           </a:ln>
         </p:spPr>
         <p:txBody>
-          <a:bodyPr anchorCtr="0" anchor="ctr" bIns="91425" lIns="91425" spcFirstLastPara="1" rIns="91425" wrap="square" tIns="91425">
+          <a:bodyPr spcFirstLastPara="1" wrap="square" lIns="91425" tIns="91425" rIns="91425" bIns="91425" anchor="ctr" anchorCtr="0">
             <a:noAutofit/>
           </a:bodyPr>
           <a:lstStyle/>
           <a:p>
-            <a:pPr indent="0" lvl="0" marL="0" rtl="0" algn="ctr">
+            <a:pPr marL="0" lvl="0" indent="0" algn="ctr" rtl="0">
               <a:spcBef>
                 <a:spcPts val="0"/>
               </a:spcBef>
@@ -10261,9 +9540,6 @@
               </a:spcAft>
               <a:buNone/>
             </a:pPr>
-            <a:r>
-              <a:t/>
-            </a:r>
             <a:endParaRPr/>
           </a:p>
         </p:txBody>
@@ -10288,12 +9564,12 @@
           </a:ln>
         </p:spPr>
         <p:txBody>
-          <a:bodyPr anchorCtr="0" anchor="t" bIns="91425" lIns="91425" spcFirstLastPara="1" rIns="91425" wrap="square" tIns="91425">
+          <a:bodyPr spcFirstLastPara="1" wrap="square" lIns="91425" tIns="91425" rIns="91425" bIns="91425" anchor="t" anchorCtr="0">
             <a:noAutofit/>
           </a:bodyPr>
           <a:lstStyle/>
           <a:p>
-            <a:pPr indent="0" lvl="0" marL="0" rtl="0" algn="l">
+            <a:pPr marL="0" lvl="0" indent="0" algn="l" rtl="0">
               <a:spcBef>
                 <a:spcPts val="0"/>
               </a:spcBef>
@@ -10376,12 +9652,12 @@
 </p:sld>
 </file>
 
-<file path=ppt/slides/slide8.xml><?xml version="1.0" encoding="utf-8"?>
-<p:sld xmlns:a="http://schemas.openxmlformats.org/drawingml/2006/main" xmlns:r="http://schemas.openxmlformats.org/officeDocument/2006/relationships" xmlns:mc="http://schemas.openxmlformats.org/markup-compatibility/2006" xmlns:mv="urn:schemas-microsoft-com:mac:vml" xmlns:p="http://schemas.openxmlformats.org/presentationml/2006/main" xmlns:c="http://schemas.openxmlformats.org/drawingml/2006/chart" xmlns:dgm="http://schemas.openxmlformats.org/drawingml/2006/diagram" xmlns:o="urn:schemas-microsoft-com:office:office" xmlns:v="urn:schemas-microsoft-com:vml" xmlns:pvml="urn:schemas-microsoft-com:office:powerpoint" xmlns:com="http://schemas.openxmlformats.org/drawingml/2006/compatibility" xmlns:p14="http://schemas.microsoft.com/office/powerpoint/2010/main" xmlns:p15="http://schemas.microsoft.com/office/powerpoint/2012/main" xmlns:ahyp="http://schemas.microsoft.com/office/drawing/2018/hyperlinkcolor">
+<file path=ppt/slides/slide7.xml><?xml version="1.0" encoding="utf-8"?>
+<p:sld xmlns:a="http://schemas.openxmlformats.org/drawingml/2006/main" xmlns:r="http://schemas.openxmlformats.org/officeDocument/2006/relationships" xmlns:p="http://schemas.openxmlformats.org/presentationml/2006/main">
   <p:cSld>
     <p:spTree>
       <p:nvGrpSpPr>
-        <p:cNvPr id="107" name="Shape 107"/>
+        <p:cNvPr id="1" name="Shape 107"/>
         <p:cNvGrpSpPr/>
         <p:nvPr/>
       </p:nvGrpSpPr>
@@ -10403,7 +9679,7 @@
           <a:blip r:embed="rId3">
             <a:alphaModFix/>
           </a:blip>
-          <a:srcRect b="98001" l="0" r="0" t="0"/>
+          <a:srcRect b="98001"/>
           <a:stretch/>
         </p:blipFill>
         <p:spPr>
@@ -10470,12 +9746,12 @@
           </a:ln>
         </p:spPr>
         <p:txBody>
-          <a:bodyPr anchorCtr="0" anchor="ctr" bIns="91425" lIns="91425" spcFirstLastPara="1" rIns="91425" wrap="square" tIns="91425">
+          <a:bodyPr spcFirstLastPara="1" wrap="square" lIns="91425" tIns="91425" rIns="91425" bIns="91425" anchor="ctr" anchorCtr="0">
             <a:noAutofit/>
           </a:bodyPr>
           <a:lstStyle/>
           <a:p>
-            <a:pPr indent="0" lvl="0" marL="0" rtl="0" algn="ctr">
+            <a:pPr marL="0" lvl="0" indent="0" algn="ctr" rtl="0">
               <a:spcBef>
                 <a:spcPts val="0"/>
               </a:spcBef>
@@ -10484,9 +9760,6 @@
               </a:spcAft>
               <a:buNone/>
             </a:pPr>
-            <a:r>
-              <a:t/>
-            </a:r>
             <a:endParaRPr/>
           </a:p>
         </p:txBody>
@@ -10511,12 +9784,12 @@
           </a:ln>
         </p:spPr>
         <p:txBody>
-          <a:bodyPr anchorCtr="0" anchor="t" bIns="91425" lIns="91425" spcFirstLastPara="1" rIns="91425" wrap="square" tIns="91425">
+          <a:bodyPr spcFirstLastPara="1" wrap="square" lIns="91425" tIns="91425" rIns="91425" bIns="91425" anchor="t" anchorCtr="0">
             <a:noAutofit/>
           </a:bodyPr>
           <a:lstStyle/>
           <a:p>
-            <a:pPr indent="0" lvl="0" marL="0" rtl="0" algn="l">
+            <a:pPr marL="0" lvl="0" indent="0" algn="l" rtl="0">
               <a:spcBef>
                 <a:spcPts val="0"/>
               </a:spcBef>
@@ -10575,12 +9848,12 @@
 </p:sld>
 </file>
 
-<file path=ppt/slides/slide9.xml><?xml version="1.0" encoding="utf-8"?>
-<p:sld xmlns:a="http://schemas.openxmlformats.org/drawingml/2006/main" xmlns:r="http://schemas.openxmlformats.org/officeDocument/2006/relationships" xmlns:mc="http://schemas.openxmlformats.org/markup-compatibility/2006" xmlns:mv="urn:schemas-microsoft-com:mac:vml" xmlns:p="http://schemas.openxmlformats.org/presentationml/2006/main" xmlns:c="http://schemas.openxmlformats.org/drawingml/2006/chart" xmlns:dgm="http://schemas.openxmlformats.org/drawingml/2006/diagram" xmlns:o="urn:schemas-microsoft-com:office:office" xmlns:v="urn:schemas-microsoft-com:vml" xmlns:pvml="urn:schemas-microsoft-com:office:powerpoint" xmlns:com="http://schemas.openxmlformats.org/drawingml/2006/compatibility" xmlns:p14="http://schemas.microsoft.com/office/powerpoint/2010/main" xmlns:p15="http://schemas.microsoft.com/office/powerpoint/2012/main" xmlns:ahyp="http://schemas.microsoft.com/office/drawing/2018/hyperlinkcolor">
+<file path=ppt/slides/slide8.xml><?xml version="1.0" encoding="utf-8"?>
+<p:sld xmlns:a="http://schemas.openxmlformats.org/drawingml/2006/main" xmlns:r="http://schemas.openxmlformats.org/officeDocument/2006/relationships" xmlns:p="http://schemas.openxmlformats.org/presentationml/2006/main">
   <p:cSld>
     <p:spTree>
       <p:nvGrpSpPr>
-        <p:cNvPr id="115" name="Shape 115"/>
+        <p:cNvPr id="1" name="Shape 115"/>
         <p:cNvGrpSpPr/>
         <p:nvPr/>
       </p:nvGrpSpPr>
@@ -10602,7 +9875,7 @@
           <a:blip r:embed="rId3">
             <a:alphaModFix/>
           </a:blip>
-          <a:srcRect b="98001" l="0" r="0" t="0"/>
+          <a:srcRect b="98001"/>
           <a:stretch/>
         </p:blipFill>
         <p:spPr>
@@ -10669,12 +9942,12 @@
           </a:ln>
         </p:spPr>
         <p:txBody>
-          <a:bodyPr anchorCtr="0" anchor="ctr" bIns="91425" lIns="91425" spcFirstLastPara="1" rIns="91425" wrap="square" tIns="91425">
+          <a:bodyPr spcFirstLastPara="1" wrap="square" lIns="91425" tIns="91425" rIns="91425" bIns="91425" anchor="ctr" anchorCtr="0">
             <a:noAutofit/>
           </a:bodyPr>
           <a:lstStyle/>
           <a:p>
-            <a:pPr indent="0" lvl="0" marL="0" rtl="0" algn="ctr">
+            <a:pPr marL="0" lvl="0" indent="0" algn="ctr" rtl="0">
               <a:spcBef>
                 <a:spcPts val="0"/>
               </a:spcBef>
@@ -10683,9 +9956,6 @@
               </a:spcAft>
               <a:buNone/>
             </a:pPr>
-            <a:r>
-              <a:t/>
-            </a:r>
             <a:endParaRPr/>
           </a:p>
         </p:txBody>
@@ -10710,12 +9980,12 @@
           </a:ln>
         </p:spPr>
         <p:txBody>
-          <a:bodyPr anchorCtr="0" anchor="t" bIns="91425" lIns="91425" spcFirstLastPara="1" rIns="91425" wrap="square" tIns="91425">
+          <a:bodyPr spcFirstLastPara="1" wrap="square" lIns="91425" tIns="91425" rIns="91425" bIns="91425" anchor="t" anchorCtr="0">
             <a:noAutofit/>
           </a:bodyPr>
           <a:lstStyle/>
           <a:p>
-            <a:pPr indent="0" lvl="0" marL="0" rtl="0" algn="l">
+            <a:pPr marL="0" lvl="0" indent="0" algn="l" rtl="0">
               <a:spcBef>
                 <a:spcPts val="0"/>
               </a:spcBef>
@@ -10917,8 +10187,299 @@
 </p:sld>
 </file>
 
+<file path=ppt/slides/slide9.xml><?xml version="1.0" encoding="utf-8"?>
+<p:sld xmlns:a="http://schemas.openxmlformats.org/drawingml/2006/main" xmlns:r="http://schemas.openxmlformats.org/officeDocument/2006/relationships" xmlns:p="http://schemas.openxmlformats.org/presentationml/2006/main">
+  <p:cSld>
+    <p:spTree>
+      <p:nvGrpSpPr>
+        <p:cNvPr id="1" name="Shape 123"/>
+        <p:cNvGrpSpPr/>
+        <p:nvPr/>
+      </p:nvGrpSpPr>
+      <p:grpSpPr>
+        <a:xfrm>
+          <a:off x="0" y="0"/>
+          <a:ext cx="0" cy="0"/>
+          <a:chOff x="0" y="0"/>
+          <a:chExt cx="0" cy="0"/>
+        </a:xfrm>
+      </p:grpSpPr>
+      <p:pic>
+        <p:nvPicPr>
+          <p:cNvPr id="124" name="Google Shape;124;p22" title="Frame 144.png"/>
+          <p:cNvPicPr preferRelativeResize="0"/>
+          <p:nvPr/>
+        </p:nvPicPr>
+        <p:blipFill rotWithShape="1">
+          <a:blip r:embed="rId3">
+            <a:alphaModFix/>
+          </a:blip>
+          <a:srcRect b="98001"/>
+          <a:stretch/>
+        </p:blipFill>
+        <p:spPr>
+          <a:xfrm>
+            <a:off x="0" y="5093562"/>
+            <a:ext cx="9144000" cy="54275"/>
+          </a:xfrm>
+          <a:prstGeom prst="rect">
+            <a:avLst/>
+          </a:prstGeom>
+          <a:noFill/>
+          <a:ln>
+            <a:noFill/>
+          </a:ln>
+        </p:spPr>
+      </p:pic>
+      <p:pic>
+        <p:nvPicPr>
+          <p:cNvPr id="125" name="Google Shape;125;p22" title="Group 427319979.png"/>
+          <p:cNvPicPr preferRelativeResize="0"/>
+          <p:nvPr/>
+        </p:nvPicPr>
+        <p:blipFill>
+          <a:blip r:embed="rId4">
+            <a:alphaModFix/>
+          </a:blip>
+          <a:stretch>
+            <a:fillRect/>
+          </a:stretch>
+        </p:blipFill>
+        <p:spPr>
+          <a:xfrm>
+            <a:off x="0" y="1"/>
+            <a:ext cx="9144000" cy="507359"/>
+          </a:xfrm>
+          <a:prstGeom prst="rect">
+            <a:avLst/>
+          </a:prstGeom>
+          <a:noFill/>
+          <a:ln>
+            <a:noFill/>
+          </a:ln>
+        </p:spPr>
+      </p:pic>
+      <p:sp>
+        <p:nvSpPr>
+          <p:cNvPr id="126" name="Google Shape;126;p22"/>
+          <p:cNvSpPr/>
+          <p:nvPr/>
+        </p:nvSpPr>
+        <p:spPr>
+          <a:xfrm>
+            <a:off x="-29250" y="5071875"/>
+            <a:ext cx="9173400" cy="97800"/>
+          </a:xfrm>
+          <a:prstGeom prst="rect">
+            <a:avLst/>
+          </a:prstGeom>
+          <a:solidFill>
+            <a:schemeClr val="dk1"/>
+          </a:solidFill>
+          <a:ln>
+            <a:noFill/>
+          </a:ln>
+        </p:spPr>
+        <p:txBody>
+          <a:bodyPr spcFirstLastPara="1" wrap="square" lIns="91425" tIns="91425" rIns="91425" bIns="91425" anchor="ctr" anchorCtr="0">
+            <a:noAutofit/>
+          </a:bodyPr>
+          <a:lstStyle/>
+          <a:p>
+            <a:pPr marL="0" lvl="0" indent="0" algn="ctr" rtl="0">
+              <a:spcBef>
+                <a:spcPts val="0"/>
+              </a:spcBef>
+              <a:spcAft>
+                <a:spcPts val="0"/>
+              </a:spcAft>
+              <a:buNone/>
+            </a:pPr>
+            <a:endParaRPr/>
+          </a:p>
+        </p:txBody>
+      </p:sp>
+      <p:sp>
+        <p:nvSpPr>
+          <p:cNvPr id="127" name="Google Shape;127;p22"/>
+          <p:cNvSpPr txBox="1"/>
+          <p:nvPr/>
+        </p:nvSpPr>
+        <p:spPr>
+          <a:xfrm>
+            <a:off x="265350" y="663825"/>
+            <a:ext cx="8943000" cy="561900"/>
+          </a:xfrm>
+          <a:prstGeom prst="rect">
+            <a:avLst/>
+          </a:prstGeom>
+          <a:noFill/>
+          <a:ln>
+            <a:noFill/>
+          </a:ln>
+        </p:spPr>
+        <p:txBody>
+          <a:bodyPr spcFirstLastPara="1" wrap="square" lIns="91425" tIns="91425" rIns="91425" bIns="91425" anchor="t" anchorCtr="0">
+            <a:noAutofit/>
+          </a:bodyPr>
+          <a:lstStyle/>
+          <a:p>
+            <a:pPr marL="0" lvl="0" indent="0" algn="l" rtl="0">
+              <a:spcBef>
+                <a:spcPts val="0"/>
+              </a:spcBef>
+              <a:spcAft>
+                <a:spcPts val="0"/>
+              </a:spcAft>
+              <a:buNone/>
+            </a:pPr>
+            <a:r>
+              <a:rPr lang="en-GB" sz="1600">
+                <a:latin typeface="Google Sans Flex Medium"/>
+                <a:ea typeface="Google Sans Flex Medium"/>
+                <a:cs typeface="Google Sans Flex Medium"/>
+                <a:sym typeface="Google Sans Flex Medium"/>
+              </a:rPr>
+              <a:t>Estimated implementation cost (optional)</a:t>
+            </a:r>
+            <a:endParaRPr sz="1600">
+              <a:latin typeface="Google Sans Flex Medium"/>
+              <a:ea typeface="Google Sans Flex Medium"/>
+              <a:cs typeface="Google Sans Flex Medium"/>
+              <a:sym typeface="Google Sans Flex Medium"/>
+            </a:endParaRPr>
+          </a:p>
+        </p:txBody>
+      </p:sp>
+      <p:sp>
+        <p:nvSpPr>
+          <p:cNvPr id="128" name="TextBox 127"/>
+          <p:cNvSpPr txBox="1"/>
+          <p:nvPr/>
+        </p:nvSpPr>
+        <p:spPr>
+          <a:xfrm>
+            <a:off x="411480" y="1371600"/>
+            <a:ext cx="8321040" cy="3429000"/>
+          </a:xfrm>
+          <a:prstGeom prst="rect">
+            <a:avLst/>
+          </a:prstGeom>
+          <a:noFill/>
+        </p:spPr>
+        <p:txBody>
+          <a:bodyPr wrap="square">
+            <a:spAutoFit/>
+          </a:bodyPr>
+          <a:lstStyle/>
+          <a:p>
+            <a:pPr algn="l">
+              <a:spcAft>
+                <a:spcPts val="700"/>
+              </a:spcAft>
+            </a:pPr>
+            <a:r>
+              <a:rPr sz="1250" b="0">
+                <a:solidFill>
+                  <a:srgbClr val="202328"/>
+                </a:solidFill>
+                <a:latin typeface="Calibri"/>
+              </a:rPr>
+              <a:t>•  Cloud Run - scale-to-zero; ~$0 when idle, pay only per request.</a:t>
+            </a:r>
+          </a:p>
+          <a:p>
+            <a:pPr algn="l">
+              <a:spcAft>
+                <a:spcPts val="700"/>
+              </a:spcAft>
+            </a:pPr>
+            <a:r>
+              <a:rPr sz="1250" b="0">
+                <a:solidFill>
+                  <a:srgbClr val="202328"/>
+                </a:solidFill>
+                <a:latin typeface="Calibri"/>
+              </a:rPr>
+              <a:t>•  Vertex AI (Gemini + embeddings) - per-token pricing; low for a demo workload.</a:t>
+            </a:r>
+          </a:p>
+          <a:p>
+            <a:pPr algn="l">
+              <a:spcAft>
+                <a:spcPts val="700"/>
+              </a:spcAft>
+            </a:pPr>
+            <a:r>
+              <a:rPr sz="1250" b="0">
+                <a:solidFill>
+                  <a:srgbClr val="202328"/>
+                </a:solidFill>
+                <a:latin typeface="Calibri"/>
+              </a:rPr>
+              <a:t>•  Firestore / Cloud Storage / BigQuery - minimal at demo scale (free-tier friendly).</a:t>
+            </a:r>
+          </a:p>
+          <a:p>
+            <a:pPr algn="l">
+              <a:spcAft>
+                <a:spcPts val="700"/>
+              </a:spcAft>
+            </a:pPr>
+            <a:r>
+              <a:rPr sz="1300" b="1">
+                <a:solidFill>
+                  <a:srgbClr val="174EA6"/>
+                </a:solidFill>
+                <a:latin typeface="Calibri"/>
+              </a:rPr>
+              <a:t>Estimated demo running cost: under $50 / month.</a:t>
+            </a:r>
+          </a:p>
+          <a:p>
+            <a:pPr algn="l">
+              <a:spcAft>
+                <a:spcPts val="700"/>
+              </a:spcAft>
+            </a:pPr>
+            <a:r>
+              <a:rPr sz="1250" b="0">
+                <a:solidFill>
+                  <a:srgbClr val="202328"/>
+                </a:solidFill>
+                <a:latin typeface="Calibri"/>
+              </a:rPr>
+              <a:t>Production cost scales roughly linearly per device and per analysis, with no fixed server cost.</a:t>
+            </a:r>
+          </a:p>
+          <a:p>
+            <a:pPr algn="l">
+              <a:spcAft>
+                <a:spcPts val="600"/>
+              </a:spcAft>
+            </a:pPr>
+            <a:r>
+              <a:rPr sz="1100" b="0">
+                <a:solidFill>
+                  <a:srgbClr val="5F6B7A"/>
+                </a:solidFill>
+                <a:latin typeface="Calibri"/>
+              </a:rPr>
+              <a:t>(Illustrative estimate - actual cost depends on usage, region and data volume.)</a:t>
+            </a:r>
+          </a:p>
+        </p:txBody>
+      </p:sp>
+    </p:spTree>
+  </p:cSld>
+  <p:clrMapOvr>
+    <a:masterClrMapping/>
+  </p:clrMapOvr>
+</p:sld>
+</file>
+
 <file path=ppt/theme/theme1.xml><?xml version="1.0" encoding="utf-8"?>
-<a:theme xmlns:a="http://schemas.openxmlformats.org/drawingml/2006/main" xmlns:r="http://schemas.openxmlformats.org/officeDocument/2006/relationships" name="Simple Light">
+<a:theme xmlns:a="http://schemas.openxmlformats.org/drawingml/2006/main" name="Simple Light">
   <a:themeElements>
     <a:clrScheme name="Simple Light">
       <a:dk1>
@@ -11193,11 +10754,13 @@
       </a:bgFillStyleLst>
     </a:fmtScheme>
   </a:themeElements>
+  <a:objectDefaults/>
+  <a:extraClrSchemeLst/>
 </a:theme>
 </file>
 
 <file path=ppt/theme/theme2.xml><?xml version="1.0" encoding="utf-8"?>
-<a:theme xmlns:a="http://schemas.openxmlformats.org/drawingml/2006/main" xmlns:r="http://schemas.openxmlformats.org/officeDocument/2006/relationships">
+<a:theme xmlns:a="http://schemas.openxmlformats.org/drawingml/2006/main">
   <a:themeElements>
     <a:clrScheme name="Default">
       <a:dk1>
@@ -11472,5 +11035,7 @@
       </a:bgFillStyleLst>
     </a:fmtScheme>
   </a:themeElements>
+  <a:objectDefaults/>
+  <a:extraClrSchemeLst/>
 </a:theme>
 </file>